--- a/presentation/implementation_deck.pptx
+++ b/presentation/implementation_deck.pptx
@@ -31,9 +31,13 @@
     <p:sldId id="279" r:id="rId25"/>
     <p:sldId id="280" r:id="rId26"/>
     <p:sldId id="281" r:id="rId27"/>
+    <p:sldId id="282" r:id="rId28"/>
+    <p:sldId id="283" r:id="rId29"/>
+    <p:sldId id="284" r:id="rId30"/>
+    <p:sldId id="285" r:id="rId31"/>
   </p:sldIdLst>
   <p:notesMasterIdLst>
-    <p:notesMasterId r:id="rId28"/>
+    <p:notesMasterId r:id="rId32"/>
   </p:notesMasterIdLst>
   <p:sldSz cx="9144000" cy="5143500"/>
   <p:notesSz cx="5143500" cy="9144000"/>
@@ -2153,6 +2157,270 @@
 </p:notes>
 </file>
 
+<file path=ppt/notesSlides/notesSlide27.xml><?xml version="1.0" encoding="utf-8"?>
+<p:notes xmlns:a="http://schemas.openxmlformats.org/drawingml/2006/main" xmlns:r="http://schemas.openxmlformats.org/officeDocument/2006/relationships" xmlns:p="http://schemas.openxmlformats.org/presentationml/2006/main">
+  <p:cSld>
+    <p:spTree>
+      <p:nvGrpSpPr>
+        <p:cNvPr id="1" name=""/>
+        <p:cNvGrpSpPr/>
+        <p:nvPr/>
+      </p:nvGrpSpPr>
+      <p:grpSpPr>
+        <a:xfrm>
+          <a:off x="0" y="0"/>
+          <a:ext cx="0" cy="0"/>
+          <a:chOff x="0" y="0"/>
+          <a:chExt cx="0" cy="0"/>
+        </a:xfrm>
+      </p:grpSpPr>
+      <p:sp>
+        <p:nvSpPr>
+          <p:cNvPr id="2" name="Slide Image Placeholder 1"/>
+          <p:cNvSpPr>
+            <a:spLocks noGrp="1" noRot="1" noChangeAspect="1"/>
+          </p:cNvSpPr>
+          <p:nvPr>
+            <p:ph type="sldImg"/>
+          </p:nvPr>
+        </p:nvSpPr>
+        <p:spPr/>
+      </p:sp>
+      <p:sp>
+        <p:nvSpPr>
+          <p:cNvPr id="3" name="Notes Placeholder 2"/>
+          <p:cNvSpPr>
+            <a:spLocks noGrp="1"/>
+          </p:cNvSpPr>
+          <p:nvPr>
+            <p:ph type="body" idx="1"/>
+          </p:nvPr>
+        </p:nvSpPr>
+        <p:spPr/>
+        <p:txBody>
+          <a:bodyPr/>
+          <a:lstStyle/>
+          <a:p>
+            <a:r>
+              <a:rPr lang="en-US" dirty="0"/>
+              <a:t/>
+            </a:r>
+            <a:endParaRPr lang="en-US" dirty="0"/>
+          </a:p>
+        </p:txBody>
+      </p:sp>
+      <p:sp>
+        <p:nvSpPr>
+          <p:cNvPr id="4" name="Slide Number Placeholder 3"/>
+          <p:cNvSpPr>
+            <a:spLocks noGrp="1"/>
+          </p:cNvSpPr>
+          <p:nvPr>
+            <p:ph type="sldNum" sz="quarter" idx="10"/>
+          </p:nvPr>
+        </p:nvSpPr>
+        <p:spPr/>
+        <p:txBody>
+          <a:bodyPr/>
+          <a:lstStyle/>
+          <a:p>
+            <a:fld id="{F7021451-1387-4CA6-816F-3879F97B5CBC}" type="slidenum">
+              <a:rPr lang="en-US"/>
+              <a:t>27</a:t>
+            </a:fld>
+            <a:endParaRPr lang="en-US"/>
+          </a:p>
+        </p:txBody>
+      </p:sp>
+    </p:spTree>
+    <p:extLst>
+      <p:ext uri="{BB962C8B-B14F-4D97-AF65-F5344CB8AC3E}">
+        <p14:creationId xmlns:p14="http://schemas.microsoft.com/office/powerpoint/2010/main" val="1024086991"/>
+      </p:ext>
+    </p:extLst>
+  </p:cSld>
+  <p:clrMapOvr>
+    <a:masterClrMapping/>
+  </p:clrMapOvr>
+</p:notes>
+</file>
+
+<file path=ppt/notesSlides/notesSlide28.xml><?xml version="1.0" encoding="utf-8"?>
+<p:notes xmlns:a="http://schemas.openxmlformats.org/drawingml/2006/main" xmlns:r="http://schemas.openxmlformats.org/officeDocument/2006/relationships" xmlns:p="http://schemas.openxmlformats.org/presentationml/2006/main">
+  <p:cSld>
+    <p:spTree>
+      <p:nvGrpSpPr>
+        <p:cNvPr id="1" name=""/>
+        <p:cNvGrpSpPr/>
+        <p:nvPr/>
+      </p:nvGrpSpPr>
+      <p:grpSpPr>
+        <a:xfrm>
+          <a:off x="0" y="0"/>
+          <a:ext cx="0" cy="0"/>
+          <a:chOff x="0" y="0"/>
+          <a:chExt cx="0" cy="0"/>
+        </a:xfrm>
+      </p:grpSpPr>
+      <p:sp>
+        <p:nvSpPr>
+          <p:cNvPr id="2" name="Slide Image Placeholder 1"/>
+          <p:cNvSpPr>
+            <a:spLocks noGrp="1" noRot="1" noChangeAspect="1"/>
+          </p:cNvSpPr>
+          <p:nvPr>
+            <p:ph type="sldImg"/>
+          </p:nvPr>
+        </p:nvSpPr>
+        <p:spPr/>
+      </p:sp>
+      <p:sp>
+        <p:nvSpPr>
+          <p:cNvPr id="3" name="Notes Placeholder 2"/>
+          <p:cNvSpPr>
+            <a:spLocks noGrp="1"/>
+          </p:cNvSpPr>
+          <p:nvPr>
+            <p:ph type="body" idx="1"/>
+          </p:nvPr>
+        </p:nvSpPr>
+        <p:spPr/>
+        <p:txBody>
+          <a:bodyPr/>
+          <a:lstStyle/>
+          <a:p>
+            <a:r>
+              <a:rPr lang="en-US" dirty="0"/>
+              <a:t/>
+            </a:r>
+            <a:endParaRPr lang="en-US" dirty="0"/>
+          </a:p>
+        </p:txBody>
+      </p:sp>
+      <p:sp>
+        <p:nvSpPr>
+          <p:cNvPr id="4" name="Slide Number Placeholder 3"/>
+          <p:cNvSpPr>
+            <a:spLocks noGrp="1"/>
+          </p:cNvSpPr>
+          <p:nvPr>
+            <p:ph type="sldNum" sz="quarter" idx="10"/>
+          </p:nvPr>
+        </p:nvSpPr>
+        <p:spPr/>
+        <p:txBody>
+          <a:bodyPr/>
+          <a:lstStyle/>
+          <a:p>
+            <a:fld id="{F7021451-1387-4CA6-816F-3879F97B5CBC}" type="slidenum">
+              <a:rPr lang="en-US"/>
+              <a:t>28</a:t>
+            </a:fld>
+            <a:endParaRPr lang="en-US"/>
+          </a:p>
+        </p:txBody>
+      </p:sp>
+    </p:spTree>
+    <p:extLst>
+      <p:ext uri="{BB962C8B-B14F-4D97-AF65-F5344CB8AC3E}">
+        <p14:creationId xmlns:p14="http://schemas.microsoft.com/office/powerpoint/2010/main" val="1024086991"/>
+      </p:ext>
+    </p:extLst>
+  </p:cSld>
+  <p:clrMapOvr>
+    <a:masterClrMapping/>
+  </p:clrMapOvr>
+</p:notes>
+</file>
+
+<file path=ppt/notesSlides/notesSlide29.xml><?xml version="1.0" encoding="utf-8"?>
+<p:notes xmlns:a="http://schemas.openxmlformats.org/drawingml/2006/main" xmlns:r="http://schemas.openxmlformats.org/officeDocument/2006/relationships" xmlns:p="http://schemas.openxmlformats.org/presentationml/2006/main">
+  <p:cSld>
+    <p:spTree>
+      <p:nvGrpSpPr>
+        <p:cNvPr id="1" name=""/>
+        <p:cNvGrpSpPr/>
+        <p:nvPr/>
+      </p:nvGrpSpPr>
+      <p:grpSpPr>
+        <a:xfrm>
+          <a:off x="0" y="0"/>
+          <a:ext cx="0" cy="0"/>
+          <a:chOff x="0" y="0"/>
+          <a:chExt cx="0" cy="0"/>
+        </a:xfrm>
+      </p:grpSpPr>
+      <p:sp>
+        <p:nvSpPr>
+          <p:cNvPr id="2" name="Slide Image Placeholder 1"/>
+          <p:cNvSpPr>
+            <a:spLocks noGrp="1" noRot="1" noChangeAspect="1"/>
+          </p:cNvSpPr>
+          <p:nvPr>
+            <p:ph type="sldImg"/>
+          </p:nvPr>
+        </p:nvSpPr>
+        <p:spPr/>
+      </p:sp>
+      <p:sp>
+        <p:nvSpPr>
+          <p:cNvPr id="3" name="Notes Placeholder 2"/>
+          <p:cNvSpPr>
+            <a:spLocks noGrp="1"/>
+          </p:cNvSpPr>
+          <p:nvPr>
+            <p:ph type="body" idx="1"/>
+          </p:nvPr>
+        </p:nvSpPr>
+        <p:spPr/>
+        <p:txBody>
+          <a:bodyPr/>
+          <a:lstStyle/>
+          <a:p>
+            <a:r>
+              <a:rPr lang="en-US" dirty="0"/>
+              <a:t/>
+            </a:r>
+            <a:endParaRPr lang="en-US" dirty="0"/>
+          </a:p>
+        </p:txBody>
+      </p:sp>
+      <p:sp>
+        <p:nvSpPr>
+          <p:cNvPr id="4" name="Slide Number Placeholder 3"/>
+          <p:cNvSpPr>
+            <a:spLocks noGrp="1"/>
+          </p:cNvSpPr>
+          <p:nvPr>
+            <p:ph type="sldNum" sz="quarter" idx="10"/>
+          </p:nvPr>
+        </p:nvSpPr>
+        <p:spPr/>
+        <p:txBody>
+          <a:bodyPr/>
+          <a:lstStyle/>
+          <a:p>
+            <a:fld id="{F7021451-1387-4CA6-816F-3879F97B5CBC}" type="slidenum">
+              <a:rPr lang="en-US"/>
+              <a:t>29</a:t>
+            </a:fld>
+            <a:endParaRPr lang="en-US"/>
+          </a:p>
+        </p:txBody>
+      </p:sp>
+    </p:spTree>
+    <p:extLst>
+      <p:ext uri="{BB962C8B-B14F-4D97-AF65-F5344CB8AC3E}">
+        <p14:creationId xmlns:p14="http://schemas.microsoft.com/office/powerpoint/2010/main" val="1024086991"/>
+      </p:ext>
+    </p:extLst>
+  </p:cSld>
+  <p:clrMapOvr>
+    <a:masterClrMapping/>
+  </p:clrMapOvr>
+</p:notes>
+</file>
+
 <file path=ppt/notesSlides/notesSlide3.xml><?xml version="1.0" encoding="utf-8"?>
 <p:notes xmlns:a="http://schemas.openxmlformats.org/drawingml/2006/main" xmlns:r="http://schemas.openxmlformats.org/officeDocument/2006/relationships" xmlns:p="http://schemas.openxmlformats.org/presentationml/2006/main">
   <p:cSld>
@@ -2223,6 +2491,94 @@
             <a:fld id="{F7021451-1387-4CA6-816F-3879F97B5CBC}" type="slidenum">
               <a:rPr lang="en-US"/>
               <a:t>3</a:t>
+            </a:fld>
+            <a:endParaRPr lang="en-US"/>
+          </a:p>
+        </p:txBody>
+      </p:sp>
+    </p:spTree>
+    <p:extLst>
+      <p:ext uri="{BB962C8B-B14F-4D97-AF65-F5344CB8AC3E}">
+        <p14:creationId xmlns:p14="http://schemas.microsoft.com/office/powerpoint/2010/main" val="1024086991"/>
+      </p:ext>
+    </p:extLst>
+  </p:cSld>
+  <p:clrMapOvr>
+    <a:masterClrMapping/>
+  </p:clrMapOvr>
+</p:notes>
+</file>
+
+<file path=ppt/notesSlides/notesSlide30.xml><?xml version="1.0" encoding="utf-8"?>
+<p:notes xmlns:a="http://schemas.openxmlformats.org/drawingml/2006/main" xmlns:r="http://schemas.openxmlformats.org/officeDocument/2006/relationships" xmlns:p="http://schemas.openxmlformats.org/presentationml/2006/main">
+  <p:cSld>
+    <p:spTree>
+      <p:nvGrpSpPr>
+        <p:cNvPr id="1" name=""/>
+        <p:cNvGrpSpPr/>
+        <p:nvPr/>
+      </p:nvGrpSpPr>
+      <p:grpSpPr>
+        <a:xfrm>
+          <a:off x="0" y="0"/>
+          <a:ext cx="0" cy="0"/>
+          <a:chOff x="0" y="0"/>
+          <a:chExt cx="0" cy="0"/>
+        </a:xfrm>
+      </p:grpSpPr>
+      <p:sp>
+        <p:nvSpPr>
+          <p:cNvPr id="2" name="Slide Image Placeholder 1"/>
+          <p:cNvSpPr>
+            <a:spLocks noGrp="1" noRot="1" noChangeAspect="1"/>
+          </p:cNvSpPr>
+          <p:nvPr>
+            <p:ph type="sldImg"/>
+          </p:nvPr>
+        </p:nvSpPr>
+        <p:spPr/>
+      </p:sp>
+      <p:sp>
+        <p:nvSpPr>
+          <p:cNvPr id="3" name="Notes Placeholder 2"/>
+          <p:cNvSpPr>
+            <a:spLocks noGrp="1"/>
+          </p:cNvSpPr>
+          <p:nvPr>
+            <p:ph type="body" idx="1"/>
+          </p:nvPr>
+        </p:nvSpPr>
+        <p:spPr/>
+        <p:txBody>
+          <a:bodyPr/>
+          <a:lstStyle/>
+          <a:p>
+            <a:r>
+              <a:rPr lang="en-US" dirty="0"/>
+              <a:t/>
+            </a:r>
+            <a:endParaRPr lang="en-US" dirty="0"/>
+          </a:p>
+        </p:txBody>
+      </p:sp>
+      <p:sp>
+        <p:nvSpPr>
+          <p:cNvPr id="4" name="Slide Number Placeholder 3"/>
+          <p:cNvSpPr>
+            <a:spLocks noGrp="1"/>
+          </p:cNvSpPr>
+          <p:nvPr>
+            <p:ph type="sldNum" sz="quarter" idx="10"/>
+          </p:nvPr>
+        </p:nvSpPr>
+        <p:spPr/>
+        <p:txBody>
+          <a:bodyPr/>
+          <a:lstStyle/>
+          <a:p>
+            <a:fld id="{F7021451-1387-4CA6-816F-3879F97B5CBC}" type="slidenum">
+              <a:rPr lang="en-US"/>
+              <a:t>30</a:t>
             </a:fld>
             <a:endParaRPr lang="en-US"/>
           </a:p>
@@ -3972,7 +4328,7 @@
                 <a:ea typeface="Calibri" pitchFamily="34" charset="-122"/>
                 <a:cs typeface="Calibri" pitchFamily="34" charset="-120"/>
               </a:rPr>
-              <a:t>12 LLM runs (3 models × 2 datasets × 2 templates × {0, 3}-shot) + 4 baseline runs.</a:t>
+              <a:t>24 LLM runs (3 models × 2 datasets × 2 templates × {0, 3}-shot) + 6 baseline runs (FinBERT, FinBERT-tone, VADER × 2 datasets).</a:t>
             </a:r>
             <a:endParaRPr lang="en-US" sz="1300" dirty="0"/>
           </a:p>
@@ -4705,7 +5061,7 @@
                 <a:ea typeface="Calibri" pitchFamily="34" charset="-122"/>
                 <a:cs typeface="Calibri" pitchFamily="34" charset="-120"/>
               </a:rPr>
-              <a:t>Headline numbers — fill from final_table.csv</a:t>
+              <a:t>Headline numbers — best config per model × dataset</a:t>
             </a:r>
             <a:endParaRPr lang="en-US" sz="2600" dirty="0"/>
           </a:p>
@@ -4744,7 +5100,7 @@
                 <a:ea typeface="Calibri" pitchFamily="34" charset="-122"/>
                 <a:cs typeface="Calibri" pitchFamily="34" charset="-120"/>
               </a:rPr>
-              <a:t>Best F1-macro per model × dataset. [NUM] placeholders are filled from the live results table.</a:t>
+              <a:t>F1-macro is the primary metric (it is robust to the class imbalance in FPB and FiQA).</a:t>
             </a:r>
             <a:endParaRPr lang="en-US" sz="1300" dirty="0"/>
           </a:p>
@@ -4765,19 +5121,20 @@
           </p:nvPr>
         </p:nvGraphicFramePr>
         <p:xfrm>
-          <a:off x="457200" y="1463040"/>
-          <a:ext cx="8229600" cy="914400"/>
+          <a:off x="365760" y="1417320"/>
+          <a:ext cx="8412480" cy="914400"/>
         </p:xfrm>
         <a:graphic>
           <a:graphicData uri="http://schemas.openxmlformats.org/drawingml/2006/table">
             <a:tbl>
               <a:tblPr/>
               <a:tblGrid>
-                <a:gridCol w="2743200"/>
-                <a:gridCol w="1371600"/>
-                <a:gridCol w="1371600"/>
-                <a:gridCol w="1371600"/>
-                <a:gridCol w="1371600"/>
+                <a:gridCol w="2286000"/>
+                <a:gridCol w="914400"/>
+                <a:gridCol w="914400"/>
+                <a:gridCol w="914400"/>
+                <a:gridCol w="914400"/>
+                <a:gridCol w="2468880"/>
               </a:tblGrid>
               <a:tr h="0">
                 <a:tc>
@@ -4789,7 +5146,7 @@
                         <a:buNone/>
                       </a:pPr>
                       <a:r>
-                        <a:rPr lang="en-US" sz="1200" b="1" dirty="0">
+                        <a:rPr lang="en-US" sz="1100" b="1" dirty="0">
                           <a:solidFill>
                             <a:srgbClr val="FFFFFF"/>
                           </a:solidFill>
@@ -4799,7 +5156,7 @@
                         </a:rPr>
                         <a:t>Model</a:t>
                       </a:r>
-                      <a:endParaRPr lang="en-US" sz="1200" dirty="0">
+                      <a:endParaRPr lang="en-US" sz="1100" dirty="0">
                         <a:latin typeface="Calibri" charset="0"/>
                         <a:ea typeface="Calibri" charset="0"/>
                         <a:cs typeface="Calibri" charset="0"/>
@@ -4857,7 +5214,7 @@
                         <a:buNone/>
                       </a:pPr>
                       <a:r>
-                        <a:rPr lang="en-US" sz="1200" b="1" dirty="0">
+                        <a:rPr lang="en-US" sz="1100" b="1" dirty="0">
                           <a:solidFill>
                             <a:srgbClr val="FFFFFF"/>
                           </a:solidFill>
@@ -4865,9 +5222,9 @@
                           <a:ea typeface="Calibri" pitchFamily="34" charset="-122"/>
                           <a:cs typeface="Calibri" pitchFamily="34" charset="-120"/>
                         </a:rPr>
-                        <a:t>FPB · F1-macro</a:t>
+                        <a:t>FPB · F1m</a:t>
                       </a:r>
-                      <a:endParaRPr lang="en-US" sz="1200" dirty="0">
+                      <a:endParaRPr lang="en-US" sz="1100" dirty="0">
                         <a:latin typeface="Calibri" charset="0"/>
                         <a:ea typeface="Calibri" charset="0"/>
                         <a:cs typeface="Calibri" charset="0"/>
@@ -4925,7 +5282,7 @@
                         <a:buNone/>
                       </a:pPr>
                       <a:r>
-                        <a:rPr lang="en-US" sz="1200" b="1" dirty="0">
+                        <a:rPr lang="en-US" sz="1100" b="1" dirty="0">
                           <a:solidFill>
                             <a:srgbClr val="FFFFFF"/>
                           </a:solidFill>
@@ -4933,9 +5290,9 @@
                           <a:ea typeface="Calibri" pitchFamily="34" charset="-122"/>
                           <a:cs typeface="Calibri" pitchFamily="34" charset="-120"/>
                         </a:rPr>
-                        <a:t>FPB · Accuracy</a:t>
+                        <a:t>FPB · Acc</a:t>
                       </a:r>
-                      <a:endParaRPr lang="en-US" sz="1200" dirty="0">
+                      <a:endParaRPr lang="en-US" sz="1100" dirty="0">
                         <a:latin typeface="Calibri" charset="0"/>
                         <a:ea typeface="Calibri" charset="0"/>
                         <a:cs typeface="Calibri" charset="0"/>
@@ -4993,7 +5350,7 @@
                         <a:buNone/>
                       </a:pPr>
                       <a:r>
-                        <a:rPr lang="en-US" sz="1200" b="1" dirty="0">
+                        <a:rPr lang="en-US" sz="1100" b="1" dirty="0">
                           <a:solidFill>
                             <a:srgbClr val="FFFFFF"/>
                           </a:solidFill>
@@ -5001,9 +5358,9 @@
                           <a:ea typeface="Calibri" pitchFamily="34" charset="-122"/>
                           <a:cs typeface="Calibri" pitchFamily="34" charset="-120"/>
                         </a:rPr>
-                        <a:t>FiQA · F1-macro</a:t>
+                        <a:t>FiQA · F1m</a:t>
                       </a:r>
-                      <a:endParaRPr lang="en-US" sz="1200" dirty="0">
+                      <a:endParaRPr lang="en-US" sz="1100" dirty="0">
                         <a:latin typeface="Calibri" charset="0"/>
                         <a:ea typeface="Calibri" charset="0"/>
                         <a:cs typeface="Calibri" charset="0"/>
@@ -5061,7 +5418,7 @@
                         <a:buNone/>
                       </a:pPr>
                       <a:r>
-                        <a:rPr lang="en-US" sz="1200" b="1" dirty="0">
+                        <a:rPr lang="en-US" sz="1100" b="1" dirty="0">
                           <a:solidFill>
                             <a:srgbClr val="FFFFFF"/>
                           </a:solidFill>
@@ -5069,9 +5426,77 @@
                           <a:ea typeface="Calibri" pitchFamily="34" charset="-122"/>
                           <a:cs typeface="Calibri" pitchFamily="34" charset="-120"/>
                         </a:rPr>
-                        <a:t>FiQA · Accuracy</a:t>
+                        <a:t>FiQA · Acc</a:t>
                       </a:r>
-                      <a:endParaRPr lang="en-US" sz="1200" dirty="0">
+                      <a:endParaRPr lang="en-US" sz="1100" dirty="0">
+                        <a:latin typeface="Calibri" charset="0"/>
+                        <a:ea typeface="Calibri" charset="0"/>
+                        <a:cs typeface="Calibri" charset="0"/>
+                      </a:endParaRPr>
+                    </a:p>
+                  </a:txBody>
+                  <a:tcPr marL="91440" marR="91440" marT="45720" marB="45720">
+                    <a:lnL w="6350" cap="flat" cmpd="sng" algn="ctr">
+                      <a:solidFill>
+                        <a:srgbClr val="D0D7DE"/>
+                      </a:solidFill>
+                      <a:prstDash val="solid"/>
+                      <a:round/>
+                      <a:headEnd type="none" w="med" len="med"/>
+                      <a:tailEnd type="none" w="med" len="med"/>
+                    </a:lnL>
+                    <a:lnR w="6350" cap="flat" cmpd="sng" algn="ctr">
+                      <a:solidFill>
+                        <a:srgbClr val="D0D7DE"/>
+                      </a:solidFill>
+                      <a:prstDash val="solid"/>
+                      <a:round/>
+                      <a:headEnd type="none" w="med" len="med"/>
+                      <a:tailEnd type="none" w="med" len="med"/>
+                    </a:lnR>
+                    <a:lnT w="6350" cap="flat" cmpd="sng" algn="ctr">
+                      <a:solidFill>
+                        <a:srgbClr val="D0D7DE"/>
+                      </a:solidFill>
+                      <a:prstDash val="solid"/>
+                      <a:round/>
+                      <a:headEnd type="none" w="med" len="med"/>
+                      <a:tailEnd type="none" w="med" len="med"/>
+                    </a:lnT>
+                    <a:lnB w="6350" cap="flat" cmpd="sng" algn="ctr">
+                      <a:solidFill>
+                        <a:srgbClr val="D0D7DE"/>
+                      </a:solidFill>
+                      <a:prstDash val="solid"/>
+                      <a:round/>
+                      <a:headEnd type="none" w="med" len="med"/>
+                      <a:tailEnd type="none" w="med" len="med"/>
+                    </a:lnB>
+                    <a:solidFill>
+                      <a:srgbClr val="1E2761"/>
+                    </a:solidFill>
+                  </a:tcPr>
+                </a:tc>
+                <a:tc>
+                  <a:txBody>
+                    <a:bodyPr/>
+                    <a:lstStyle/>
+                    <a:p>
+                      <a:pPr indent="0" marL="0">
+                        <a:buNone/>
+                      </a:pPr>
+                      <a:r>
+                        <a:rPr lang="en-US" sz="1100" b="1" dirty="0">
+                          <a:solidFill>
+                            <a:srgbClr val="FFFFFF"/>
+                          </a:solidFill>
+                          <a:latin typeface="Calibri" pitchFamily="34" charset="0"/>
+                          <a:ea typeface="Calibri" pitchFamily="34" charset="-122"/>
+                          <a:cs typeface="Calibri" pitchFamily="34" charset="-120"/>
+                        </a:rPr>
+                        <a:t>Best config</a:t>
+                      </a:r>
+                      <a:endParaRPr lang="en-US" sz="1100" dirty="0">
                         <a:latin typeface="Calibri" charset="0"/>
                         <a:ea typeface="Calibri" charset="0"/>
                         <a:cs typeface="Calibri" charset="0"/>
@@ -5131,17 +5556,17 @@
                         <a:buNone/>
                       </a:pPr>
                       <a:r>
-                        <a:rPr lang="en-US" sz="1200" dirty="0">
+                        <a:rPr lang="en-US" sz="1100" b="1" dirty="0">
                           <a:solidFill>
-                            <a:srgbClr val="1E293B"/>
+                            <a:srgbClr val="1E2761"/>
                           </a:solidFill>
                           <a:latin typeface="Calibri" pitchFamily="34" charset="0"/>
                           <a:ea typeface="Calibri" pitchFamily="34" charset="-122"/>
                           <a:cs typeface="Calibri" pitchFamily="34" charset="-120"/>
                         </a:rPr>
-                        <a:t>plutus-8B-instruct (focal)</a:t>
+                        <a:t>FinBERT (specialised, 110M)</a:t>
                       </a:r>
-                      <a:endParaRPr lang="en-US" sz="1200" dirty="0">
+                      <a:endParaRPr lang="en-US" sz="1100" dirty="0">
                         <a:latin typeface="Calibri" charset="0"/>
                         <a:ea typeface="Calibri" charset="0"/>
                         <a:cs typeface="Calibri" charset="0"/>
@@ -5196,7 +5621,7 @@
                         <a:buNone/>
                       </a:pPr>
                       <a:r>
-                        <a:rPr lang="en-US" sz="1200" dirty="0">
+                        <a:rPr lang="en-US" sz="1100" dirty="0">
                           <a:solidFill>
                             <a:srgbClr val="1E293B"/>
                           </a:solidFill>
@@ -5204,9 +5629,77 @@
                           <a:ea typeface="Calibri" pitchFamily="34" charset="-122"/>
                           <a:cs typeface="Calibri" pitchFamily="34" charset="-120"/>
                         </a:rPr>
-                        <a:t>[NUM]</a:t>
+                        <a:t>0.925</a:t>
                       </a:r>
-                      <a:endParaRPr lang="en-US" sz="1200" dirty="0">
+                      <a:endParaRPr lang="en-US" sz="1100" dirty="0">
+                        <a:latin typeface="Calibri" charset="0"/>
+                        <a:ea typeface="Calibri" charset="0"/>
+                        <a:cs typeface="Calibri" charset="0"/>
+                      </a:endParaRPr>
+                    </a:p>
+                  </a:txBody>
+                  <a:tcPr marL="91440" marR="91440" marT="45720" marB="45720">
+                    <a:lnL w="6350" cap="flat" cmpd="sng" algn="ctr">
+                      <a:solidFill>
+                        <a:srgbClr val="D0D7DE"/>
+                      </a:solidFill>
+                      <a:prstDash val="solid"/>
+                      <a:round/>
+                      <a:headEnd type="none" w="med" len="med"/>
+                      <a:tailEnd type="none" w="med" len="med"/>
+                    </a:lnL>
+                    <a:lnR w="6350" cap="flat" cmpd="sng" algn="ctr">
+                      <a:solidFill>
+                        <a:srgbClr val="D0D7DE"/>
+                      </a:solidFill>
+                      <a:prstDash val="solid"/>
+                      <a:round/>
+                      <a:headEnd type="none" w="med" len="med"/>
+                      <a:tailEnd type="none" w="med" len="med"/>
+                    </a:lnR>
+                    <a:lnT w="6350" cap="flat" cmpd="sng" algn="ctr">
+                      <a:solidFill>
+                        <a:srgbClr val="D0D7DE"/>
+                      </a:solidFill>
+                      <a:prstDash val="solid"/>
+                      <a:round/>
+                      <a:headEnd type="none" w="med" len="med"/>
+                      <a:tailEnd type="none" w="med" len="med"/>
+                    </a:lnT>
+                    <a:lnB w="6350" cap="flat" cmpd="sng" algn="ctr">
+                      <a:solidFill>
+                        <a:srgbClr val="D0D7DE"/>
+                      </a:solidFill>
+                      <a:prstDash val="solid"/>
+                      <a:round/>
+                      <a:headEnd type="none" w="med" len="med"/>
+                      <a:tailEnd type="none" w="med" len="med"/>
+                    </a:lnB>
+                    <a:solidFill>
+                      <a:srgbClr val="D6F5D6"/>
+                    </a:solidFill>
+                  </a:tcPr>
+                </a:tc>
+                <a:tc>
+                  <a:txBody>
+                    <a:bodyPr/>
+                    <a:lstStyle/>
+                    <a:p>
+                      <a:pPr indent="0" marL="0">
+                        <a:buNone/>
+                      </a:pPr>
+                      <a:r>
+                        <a:rPr lang="en-US" sz="1100" dirty="0">
+                          <a:solidFill>
+                            <a:srgbClr val="1E293B"/>
+                          </a:solidFill>
+                          <a:latin typeface="Calibri" pitchFamily="34" charset="0"/>
+                          <a:ea typeface="Calibri" pitchFamily="34" charset="-122"/>
+                          <a:cs typeface="Calibri" pitchFamily="34" charset="-120"/>
+                        </a:rPr>
+                        <a:t>0.935</a:t>
+                      </a:r>
+                      <a:endParaRPr lang="en-US" sz="1100" dirty="0">
                         <a:latin typeface="Calibri" charset="0"/>
                         <a:ea typeface="Calibri" charset="0"/>
                         <a:cs typeface="Calibri" charset="0"/>
@@ -5261,7 +5754,7 @@
                         <a:buNone/>
                       </a:pPr>
                       <a:r>
-                        <a:rPr lang="en-US" sz="1200" dirty="0">
+                        <a:rPr lang="en-US" sz="1100" dirty="0">
                           <a:solidFill>
                             <a:srgbClr val="1E293B"/>
                           </a:solidFill>
@@ -5269,9 +5762,9 @@
                           <a:ea typeface="Calibri" pitchFamily="34" charset="-122"/>
                           <a:cs typeface="Calibri" pitchFamily="34" charset="-120"/>
                         </a:rPr>
-                        <a:t>[NUM]</a:t>
+                        <a:t>0.482</a:t>
                       </a:r>
-                      <a:endParaRPr lang="en-US" sz="1200" dirty="0">
+                      <a:endParaRPr lang="en-US" sz="1100" dirty="0">
                         <a:latin typeface="Calibri" charset="0"/>
                         <a:ea typeface="Calibri" charset="0"/>
                         <a:cs typeface="Calibri" charset="0"/>
@@ -5326,7 +5819,7 @@
                         <a:buNone/>
                       </a:pPr>
                       <a:r>
-                        <a:rPr lang="en-US" sz="1200" dirty="0">
+                        <a:rPr lang="en-US" sz="1100" dirty="0">
                           <a:solidFill>
                             <a:srgbClr val="1E293B"/>
                           </a:solidFill>
@@ -5334,9 +5827,9 @@
                           <a:ea typeface="Calibri" pitchFamily="34" charset="-122"/>
                           <a:cs typeface="Calibri" pitchFamily="34" charset="-120"/>
                         </a:rPr>
-                        <a:t>[NUM]</a:t>
+                        <a:t>0.498</a:t>
                       </a:r>
-                      <a:endParaRPr lang="en-US" sz="1200" dirty="0">
+                      <a:endParaRPr lang="en-US" sz="1100" dirty="0">
                         <a:latin typeface="Calibri" charset="0"/>
                         <a:ea typeface="Calibri" charset="0"/>
                         <a:cs typeface="Calibri" charset="0"/>
@@ -5391,7 +5884,7 @@
                         <a:buNone/>
                       </a:pPr>
                       <a:r>
-                        <a:rPr lang="en-US" sz="1200" dirty="0">
+                        <a:rPr lang="en-US" sz="1100" dirty="0">
                           <a:solidFill>
                             <a:srgbClr val="1E293B"/>
                           </a:solidFill>
@@ -5399,9 +5892,9 @@
                           <a:ea typeface="Calibri" pitchFamily="34" charset="-122"/>
                           <a:cs typeface="Calibri" pitchFamily="34" charset="-120"/>
                         </a:rPr>
-                        <a:t>[NUM]</a:t>
+                        <a:t>Best on FPB · loses on FiQA</a:t>
                       </a:r>
-                      <a:endParaRPr lang="en-US" sz="1200" dirty="0">
+                      <a:endParaRPr lang="en-US" sz="1100" dirty="0">
                         <a:latin typeface="Calibri" charset="0"/>
                         <a:ea typeface="Calibri" charset="0"/>
                         <a:cs typeface="Calibri" charset="0"/>
@@ -5458,7 +5951,7 @@
                         <a:buNone/>
                       </a:pPr>
                       <a:r>
-                        <a:rPr lang="en-US" sz="1200" dirty="0">
+                        <a:rPr lang="en-US" sz="1100" dirty="0">
                           <a:solidFill>
                             <a:srgbClr val="1E293B"/>
                           </a:solidFill>
@@ -5466,9 +5959,9 @@
                           <a:ea typeface="Calibri" pitchFamily="34" charset="-122"/>
                           <a:cs typeface="Calibri" pitchFamily="34" charset="-120"/>
                         </a:rPr>
-                        <a:t>Mistral-7B-Instruct-v0.3</a:t>
+                        <a:t>Qwen2.5-7B-Instruct</a:t>
                       </a:r>
-                      <a:endParaRPr lang="en-US" sz="1200" dirty="0">
+                      <a:endParaRPr lang="en-US" sz="1100" dirty="0">
                         <a:latin typeface="Calibri" charset="0"/>
                         <a:ea typeface="Calibri" charset="0"/>
                         <a:cs typeface="Calibri" charset="0"/>
@@ -5523,7 +6016,7 @@
                         <a:buNone/>
                       </a:pPr>
                       <a:r>
-                        <a:rPr lang="en-US" sz="1200" dirty="0">
+                        <a:rPr lang="en-US" sz="1100" dirty="0">
                           <a:solidFill>
                             <a:srgbClr val="1E293B"/>
                           </a:solidFill>
@@ -5531,9 +6024,9 @@
                           <a:ea typeface="Calibri" pitchFamily="34" charset="-122"/>
                           <a:cs typeface="Calibri" pitchFamily="34" charset="-120"/>
                         </a:rPr>
-                        <a:t>[NUM]</a:t>
+                        <a:t>0.832</a:t>
                       </a:r>
-                      <a:endParaRPr lang="en-US" sz="1200" dirty="0">
+                      <a:endParaRPr lang="en-US" sz="1100" dirty="0">
                         <a:latin typeface="Calibri" charset="0"/>
                         <a:ea typeface="Calibri" charset="0"/>
                         <a:cs typeface="Calibri" charset="0"/>
@@ -5588,7 +6081,7 @@
                         <a:buNone/>
                       </a:pPr>
                       <a:r>
-                        <a:rPr lang="en-US" sz="1200" dirty="0">
+                        <a:rPr lang="en-US" sz="1100" dirty="0">
                           <a:solidFill>
                             <a:srgbClr val="1E293B"/>
                           </a:solidFill>
@@ -5596,9 +6089,9 @@
                           <a:ea typeface="Calibri" pitchFamily="34" charset="-122"/>
                           <a:cs typeface="Calibri" pitchFamily="34" charset="-120"/>
                         </a:rPr>
-                        <a:t>[NUM]</a:t>
+                        <a:t>0.860</a:t>
                       </a:r>
-                      <a:endParaRPr lang="en-US" sz="1200" dirty="0">
+                      <a:endParaRPr lang="en-US" sz="1100" dirty="0">
                         <a:latin typeface="Calibri" charset="0"/>
                         <a:ea typeface="Calibri" charset="0"/>
                         <a:cs typeface="Calibri" charset="0"/>
@@ -5653,7 +6146,7 @@
                         <a:buNone/>
                       </a:pPr>
                       <a:r>
-                        <a:rPr lang="en-US" sz="1200" dirty="0">
+                        <a:rPr lang="en-US" sz="1100" dirty="0">
                           <a:solidFill>
                             <a:srgbClr val="1E293B"/>
                           </a:solidFill>
@@ -5661,9 +6154,77 @@
                           <a:ea typeface="Calibri" pitchFamily="34" charset="-122"/>
                           <a:cs typeface="Calibri" pitchFamily="34" charset="-120"/>
                         </a:rPr>
-                        <a:t>[NUM]</a:t>
+                        <a:t>0.673</a:t>
                       </a:r>
-                      <a:endParaRPr lang="en-US" sz="1200" dirty="0">
+                      <a:endParaRPr lang="en-US" sz="1100" dirty="0">
+                        <a:latin typeface="Calibri" charset="0"/>
+                        <a:ea typeface="Calibri" charset="0"/>
+                        <a:cs typeface="Calibri" charset="0"/>
+                      </a:endParaRPr>
+                    </a:p>
+                  </a:txBody>
+                  <a:tcPr marL="91440" marR="91440" marT="45720" marB="45720">
+                    <a:lnL w="6350" cap="flat" cmpd="sng" algn="ctr">
+                      <a:solidFill>
+                        <a:srgbClr val="D0D7DE"/>
+                      </a:solidFill>
+                      <a:prstDash val="solid"/>
+                      <a:round/>
+                      <a:headEnd type="none" w="med" len="med"/>
+                      <a:tailEnd type="none" w="med" len="med"/>
+                    </a:lnL>
+                    <a:lnR w="6350" cap="flat" cmpd="sng" algn="ctr">
+                      <a:solidFill>
+                        <a:srgbClr val="D0D7DE"/>
+                      </a:solidFill>
+                      <a:prstDash val="solid"/>
+                      <a:round/>
+                      <a:headEnd type="none" w="med" len="med"/>
+                      <a:tailEnd type="none" w="med" len="med"/>
+                    </a:lnR>
+                    <a:lnT w="6350" cap="flat" cmpd="sng" algn="ctr">
+                      <a:solidFill>
+                        <a:srgbClr val="D0D7DE"/>
+                      </a:solidFill>
+                      <a:prstDash val="solid"/>
+                      <a:round/>
+                      <a:headEnd type="none" w="med" len="med"/>
+                      <a:tailEnd type="none" w="med" len="med"/>
+                    </a:lnT>
+                    <a:lnB w="6350" cap="flat" cmpd="sng" algn="ctr">
+                      <a:solidFill>
+                        <a:srgbClr val="D0D7DE"/>
+                      </a:solidFill>
+                      <a:prstDash val="solid"/>
+                      <a:round/>
+                      <a:headEnd type="none" w="med" len="med"/>
+                      <a:tailEnd type="none" w="med" len="med"/>
+                    </a:lnB>
+                    <a:solidFill>
+                      <a:srgbClr val="D6F5D6"/>
+                    </a:solidFill>
+                  </a:tcPr>
+                </a:tc>
+                <a:tc>
+                  <a:txBody>
+                    <a:bodyPr/>
+                    <a:lstStyle/>
+                    <a:p>
+                      <a:pPr indent="0" marL="0">
+                        <a:buNone/>
+                      </a:pPr>
+                      <a:r>
+                        <a:rPr lang="en-US" sz="1100" dirty="0">
+                          <a:solidFill>
+                            <a:srgbClr val="1E293B"/>
+                          </a:solidFill>
+                          <a:latin typeface="Calibri" pitchFamily="34" charset="0"/>
+                          <a:ea typeface="Calibri" pitchFamily="34" charset="-122"/>
+                          <a:cs typeface="Calibri" pitchFamily="34" charset="-120"/>
+                        </a:rPr>
+                        <a:t>0.717</a:t>
+                      </a:r>
+                      <a:endParaRPr lang="en-US" sz="1100" dirty="0">
                         <a:latin typeface="Calibri" charset="0"/>
                         <a:ea typeface="Calibri" charset="0"/>
                         <a:cs typeface="Calibri" charset="0"/>
@@ -5718,7 +6279,7 @@
                         <a:buNone/>
                       </a:pPr>
                       <a:r>
-                        <a:rPr lang="en-US" sz="1200" dirty="0">
+                        <a:rPr lang="en-US" sz="1100" dirty="0">
                           <a:solidFill>
                             <a:srgbClr val="1E293B"/>
                           </a:solidFill>
@@ -5726,9 +6287,9 @@
                           <a:ea typeface="Calibri" pitchFamily="34" charset="-122"/>
                           <a:cs typeface="Calibri" pitchFamily="34" charset="-120"/>
                         </a:rPr>
-                        <a:t>[NUM]</a:t>
+                        <a:t>Best LLM on FiQA: tpl B 0-shot</a:t>
                       </a:r>
-                      <a:endParaRPr lang="en-US" sz="1200" dirty="0">
+                      <a:endParaRPr lang="en-US" sz="1100" dirty="0">
                         <a:latin typeface="Calibri" charset="0"/>
                         <a:ea typeface="Calibri" charset="0"/>
                         <a:cs typeface="Calibri" charset="0"/>
@@ -5785,7 +6346,7 @@
                         <a:buNone/>
                       </a:pPr>
                       <a:r>
-                        <a:rPr lang="en-US" sz="1200" dirty="0">
+                        <a:rPr lang="en-US" sz="1100" dirty="0">
                           <a:solidFill>
                             <a:srgbClr val="1E293B"/>
                           </a:solidFill>
@@ -5793,9 +6354,9 @@
                           <a:ea typeface="Calibri" pitchFamily="34" charset="-122"/>
                           <a:cs typeface="Calibri" pitchFamily="34" charset="-120"/>
                         </a:rPr>
-                        <a:t>Qwen2.5-7B-Instruct</a:t>
+                        <a:t>Mistral-7B-Instruct-v0.3</a:t>
                       </a:r>
-                      <a:endParaRPr lang="en-US" sz="1200" dirty="0">
+                      <a:endParaRPr lang="en-US" sz="1100" dirty="0">
                         <a:latin typeface="Calibri" charset="0"/>
                         <a:ea typeface="Calibri" charset="0"/>
                         <a:cs typeface="Calibri" charset="0"/>
@@ -5850,7 +6411,7 @@
                         <a:buNone/>
                       </a:pPr>
                       <a:r>
-                        <a:rPr lang="en-US" sz="1200" dirty="0">
+                        <a:rPr lang="en-US" sz="1100" dirty="0">
                           <a:solidFill>
                             <a:srgbClr val="1E293B"/>
                           </a:solidFill>
@@ -5858,9 +6419,9 @@
                           <a:ea typeface="Calibri" pitchFamily="34" charset="-122"/>
                           <a:cs typeface="Calibri" pitchFamily="34" charset="-120"/>
                         </a:rPr>
-                        <a:t>[NUM]</a:t>
+                        <a:t>0.890</a:t>
                       </a:r>
-                      <a:endParaRPr lang="en-US" sz="1200" dirty="0">
+                      <a:endParaRPr lang="en-US" sz="1100" dirty="0">
                         <a:latin typeface="Calibri" charset="0"/>
                         <a:ea typeface="Calibri" charset="0"/>
                         <a:cs typeface="Calibri" charset="0"/>
@@ -5915,7 +6476,7 @@
                         <a:buNone/>
                       </a:pPr>
                       <a:r>
-                        <a:rPr lang="en-US" sz="1200" dirty="0">
+                        <a:rPr lang="en-US" sz="1100" dirty="0">
                           <a:solidFill>
                             <a:srgbClr val="1E293B"/>
                           </a:solidFill>
@@ -5923,9 +6484,9 @@
                           <a:ea typeface="Calibri" pitchFamily="34" charset="-122"/>
                           <a:cs typeface="Calibri" pitchFamily="34" charset="-120"/>
                         </a:rPr>
-                        <a:t>[NUM]</a:t>
+                        <a:t>0.903</a:t>
                       </a:r>
-                      <a:endParaRPr lang="en-US" sz="1200" dirty="0">
+                      <a:endParaRPr lang="en-US" sz="1100" dirty="0">
                         <a:latin typeface="Calibri" charset="0"/>
                         <a:ea typeface="Calibri" charset="0"/>
                         <a:cs typeface="Calibri" charset="0"/>
@@ -5980,7 +6541,7 @@
                         <a:buNone/>
                       </a:pPr>
                       <a:r>
-                        <a:rPr lang="en-US" sz="1200" dirty="0">
+                        <a:rPr lang="en-US" sz="1100" dirty="0">
                           <a:solidFill>
                             <a:srgbClr val="1E293B"/>
                           </a:solidFill>
@@ -5988,9 +6549,9 @@
                           <a:ea typeface="Calibri" pitchFamily="34" charset="-122"/>
                           <a:cs typeface="Calibri" pitchFamily="34" charset="-120"/>
                         </a:rPr>
-                        <a:t>[NUM]</a:t>
+                        <a:t>0.599</a:t>
                       </a:r>
-                      <a:endParaRPr lang="en-US" sz="1200" dirty="0">
+                      <a:endParaRPr lang="en-US" sz="1100" dirty="0">
                         <a:latin typeface="Calibri" charset="0"/>
                         <a:ea typeface="Calibri" charset="0"/>
                         <a:cs typeface="Calibri" charset="0"/>
@@ -6045,7 +6606,7 @@
                         <a:buNone/>
                       </a:pPr>
                       <a:r>
-                        <a:rPr lang="en-US" sz="1200" dirty="0">
+                        <a:rPr lang="en-US" sz="1100" dirty="0">
                           <a:solidFill>
                             <a:srgbClr val="1E293B"/>
                           </a:solidFill>
@@ -6053,9 +6614,74 @@
                           <a:ea typeface="Calibri" pitchFamily="34" charset="-122"/>
                           <a:cs typeface="Calibri" pitchFamily="34" charset="-120"/>
                         </a:rPr>
-                        <a:t>[NUM]</a:t>
+                        <a:t>0.620</a:t>
                       </a:r>
-                      <a:endParaRPr lang="en-US" sz="1200" dirty="0">
+                      <a:endParaRPr lang="en-US" sz="1100" dirty="0">
+                        <a:latin typeface="Calibri" charset="0"/>
+                        <a:ea typeface="Calibri" charset="0"/>
+                        <a:cs typeface="Calibri" charset="0"/>
+                      </a:endParaRPr>
+                    </a:p>
+                  </a:txBody>
+                  <a:tcPr marL="91440" marR="91440" marT="45720" marB="45720">
+                    <a:lnL w="6350" cap="flat" cmpd="sng" algn="ctr">
+                      <a:solidFill>
+                        <a:srgbClr val="D0D7DE"/>
+                      </a:solidFill>
+                      <a:prstDash val="solid"/>
+                      <a:round/>
+                      <a:headEnd type="none" w="med" len="med"/>
+                      <a:tailEnd type="none" w="med" len="med"/>
+                    </a:lnL>
+                    <a:lnR w="6350" cap="flat" cmpd="sng" algn="ctr">
+                      <a:solidFill>
+                        <a:srgbClr val="D0D7DE"/>
+                      </a:solidFill>
+                      <a:prstDash val="solid"/>
+                      <a:round/>
+                      <a:headEnd type="none" w="med" len="med"/>
+                      <a:tailEnd type="none" w="med" len="med"/>
+                    </a:lnR>
+                    <a:lnT w="6350" cap="flat" cmpd="sng" algn="ctr">
+                      <a:solidFill>
+                        <a:srgbClr val="D0D7DE"/>
+                      </a:solidFill>
+                      <a:prstDash val="solid"/>
+                      <a:round/>
+                      <a:headEnd type="none" w="med" len="med"/>
+                      <a:tailEnd type="none" w="med" len="med"/>
+                    </a:lnT>
+                    <a:lnB w="6350" cap="flat" cmpd="sng" algn="ctr">
+                      <a:solidFill>
+                        <a:srgbClr val="D0D7DE"/>
+                      </a:solidFill>
+                      <a:prstDash val="solid"/>
+                      <a:round/>
+                      <a:headEnd type="none" w="med" len="med"/>
+                      <a:tailEnd type="none" w="med" len="med"/>
+                    </a:lnB>
+                  </a:tcPr>
+                </a:tc>
+                <a:tc>
+                  <a:txBody>
+                    <a:bodyPr/>
+                    <a:lstStyle/>
+                    <a:p>
+                      <a:pPr indent="0" marL="0">
+                        <a:buNone/>
+                      </a:pPr>
+                      <a:r>
+                        <a:rPr lang="en-US" sz="1100" dirty="0">
+                          <a:solidFill>
+                            <a:srgbClr val="1E293B"/>
+                          </a:solidFill>
+                          <a:latin typeface="Calibri" pitchFamily="34" charset="0"/>
+                          <a:ea typeface="Calibri" pitchFamily="34" charset="-122"/>
+                          <a:cs typeface="Calibri" pitchFamily="34" charset="-120"/>
+                        </a:rPr>
+                        <a:t>Best LLM on FPB: tpl A 3-shot</a:t>
+                      </a:r>
+                      <a:endParaRPr lang="en-US" sz="1100" dirty="0">
                         <a:latin typeface="Calibri" charset="0"/>
                         <a:ea typeface="Calibri" charset="0"/>
                         <a:cs typeface="Calibri" charset="0"/>
@@ -6112,17 +6738,17 @@
                         <a:buNone/>
                       </a:pPr>
                       <a:r>
-                        <a:rPr lang="en-US" sz="1200" dirty="0">
+                        <a:rPr lang="en-US" sz="1100" b="1" dirty="0">
                           <a:solidFill>
-                            <a:srgbClr val="1E293B"/>
+                            <a:srgbClr val="F96167"/>
                           </a:solidFill>
                           <a:latin typeface="Calibri" pitchFamily="34" charset="0"/>
                           <a:ea typeface="Calibri" pitchFamily="34" charset="-122"/>
                           <a:cs typeface="Calibri" pitchFamily="34" charset="-120"/>
                         </a:rPr>
-                        <a:t>FinBERT (specialised classifier)</a:t>
+                        <a:t>plutus-8B-instruct (focal)</a:t>
                       </a:r>
-                      <a:endParaRPr lang="en-US" sz="1200" dirty="0">
+                      <a:endParaRPr lang="en-US" sz="1100" dirty="0">
                         <a:latin typeface="Calibri" charset="0"/>
                         <a:ea typeface="Calibri" charset="0"/>
                         <a:cs typeface="Calibri" charset="0"/>
@@ -6177,7 +6803,7 @@
                         <a:buNone/>
                       </a:pPr>
                       <a:r>
-                        <a:rPr lang="en-US" sz="1200" dirty="0">
+                        <a:rPr lang="en-US" sz="1100" dirty="0">
                           <a:solidFill>
                             <a:srgbClr val="1E293B"/>
                           </a:solidFill>
@@ -6185,9 +6811,9 @@
                           <a:ea typeface="Calibri" pitchFamily="34" charset="-122"/>
                           <a:cs typeface="Calibri" pitchFamily="34" charset="-120"/>
                         </a:rPr>
-                        <a:t>[NUM]</a:t>
+                        <a:t>0.829</a:t>
                       </a:r>
-                      <a:endParaRPr lang="en-US" sz="1200" dirty="0">
+                      <a:endParaRPr lang="en-US" sz="1100" dirty="0">
                         <a:latin typeface="Calibri" charset="0"/>
                         <a:ea typeface="Calibri" charset="0"/>
                         <a:cs typeface="Calibri" charset="0"/>
@@ -6242,7 +6868,7 @@
                         <a:buNone/>
                       </a:pPr>
                       <a:r>
-                        <a:rPr lang="en-US" sz="1200" dirty="0">
+                        <a:rPr lang="en-US" sz="1100" dirty="0">
                           <a:solidFill>
                             <a:srgbClr val="1E293B"/>
                           </a:solidFill>
@@ -6250,9 +6876,9 @@
                           <a:ea typeface="Calibri" pitchFamily="34" charset="-122"/>
                           <a:cs typeface="Calibri" pitchFamily="34" charset="-120"/>
                         </a:rPr>
-                        <a:t>[NUM]</a:t>
+                        <a:t>0.851</a:t>
                       </a:r>
-                      <a:endParaRPr lang="en-US" sz="1200" dirty="0">
+                      <a:endParaRPr lang="en-US" sz="1100" dirty="0">
                         <a:latin typeface="Calibri" charset="0"/>
                         <a:ea typeface="Calibri" charset="0"/>
                         <a:cs typeface="Calibri" charset="0"/>
@@ -6307,7 +6933,7 @@
                         <a:buNone/>
                       </a:pPr>
                       <a:r>
-                        <a:rPr lang="en-US" sz="1200" dirty="0">
+                        <a:rPr lang="en-US" sz="1100" dirty="0">
                           <a:solidFill>
                             <a:srgbClr val="1E293B"/>
                           </a:solidFill>
@@ -6315,9 +6941,9 @@
                           <a:ea typeface="Calibri" pitchFamily="34" charset="-122"/>
                           <a:cs typeface="Calibri" pitchFamily="34" charset="-120"/>
                         </a:rPr>
-                        <a:t>[NUM]</a:t>
+                        <a:t>0.597</a:t>
                       </a:r>
-                      <a:endParaRPr lang="en-US" sz="1200" dirty="0">
+                      <a:endParaRPr lang="en-US" sz="1100" dirty="0">
                         <a:latin typeface="Calibri" charset="0"/>
                         <a:ea typeface="Calibri" charset="0"/>
                         <a:cs typeface="Calibri" charset="0"/>
@@ -6372,7 +6998,7 @@
                         <a:buNone/>
                       </a:pPr>
                       <a:r>
-                        <a:rPr lang="en-US" sz="1200" dirty="0">
+                        <a:rPr lang="en-US" sz="1100" dirty="0">
                           <a:solidFill>
                             <a:srgbClr val="1E293B"/>
                           </a:solidFill>
@@ -6380,9 +7006,74 @@
                           <a:ea typeface="Calibri" pitchFamily="34" charset="-122"/>
                           <a:cs typeface="Calibri" pitchFamily="34" charset="-120"/>
                         </a:rPr>
-                        <a:t>[NUM]</a:t>
+                        <a:t>0.657</a:t>
                       </a:r>
-                      <a:endParaRPr lang="en-US" sz="1200" dirty="0">
+                      <a:endParaRPr lang="en-US" sz="1100" dirty="0">
+                        <a:latin typeface="Calibri" charset="0"/>
+                        <a:ea typeface="Calibri" charset="0"/>
+                        <a:cs typeface="Calibri" charset="0"/>
+                      </a:endParaRPr>
+                    </a:p>
+                  </a:txBody>
+                  <a:tcPr marL="91440" marR="91440" marT="45720" marB="45720">
+                    <a:lnL w="6350" cap="flat" cmpd="sng" algn="ctr">
+                      <a:solidFill>
+                        <a:srgbClr val="D0D7DE"/>
+                      </a:solidFill>
+                      <a:prstDash val="solid"/>
+                      <a:round/>
+                      <a:headEnd type="none" w="med" len="med"/>
+                      <a:tailEnd type="none" w="med" len="med"/>
+                    </a:lnL>
+                    <a:lnR w="6350" cap="flat" cmpd="sng" algn="ctr">
+                      <a:solidFill>
+                        <a:srgbClr val="D0D7DE"/>
+                      </a:solidFill>
+                      <a:prstDash val="solid"/>
+                      <a:round/>
+                      <a:headEnd type="none" w="med" len="med"/>
+                      <a:tailEnd type="none" w="med" len="med"/>
+                    </a:lnR>
+                    <a:lnT w="6350" cap="flat" cmpd="sng" algn="ctr">
+                      <a:solidFill>
+                        <a:srgbClr val="D0D7DE"/>
+                      </a:solidFill>
+                      <a:prstDash val="solid"/>
+                      <a:round/>
+                      <a:headEnd type="none" w="med" len="med"/>
+                      <a:tailEnd type="none" w="med" len="med"/>
+                    </a:lnT>
+                    <a:lnB w="6350" cap="flat" cmpd="sng" algn="ctr">
+                      <a:solidFill>
+                        <a:srgbClr val="D0D7DE"/>
+                      </a:solidFill>
+                      <a:prstDash val="solid"/>
+                      <a:round/>
+                      <a:headEnd type="none" w="med" len="med"/>
+                      <a:tailEnd type="none" w="med" len="med"/>
+                    </a:lnB>
+                  </a:tcPr>
+                </a:tc>
+                <a:tc>
+                  <a:txBody>
+                    <a:bodyPr/>
+                    <a:lstStyle/>
+                    <a:p>
+                      <a:pPr indent="0" marL="0">
+                        <a:buNone/>
+                      </a:pPr>
+                      <a:r>
+                        <a:rPr lang="en-US" sz="1100" i="1" dirty="0">
+                          <a:solidFill>
+                            <a:srgbClr val="F96167"/>
+                          </a:solidFill>
+                          <a:latin typeface="Calibri" pitchFamily="34" charset="0"/>
+                          <a:ea typeface="Calibri" pitchFamily="34" charset="-122"/>
+                          <a:cs typeface="Calibri" pitchFamily="34" charset="-120"/>
+                        </a:rPr>
+                        <a:t>Mid-pack on both — see findings</a:t>
+                      </a:r>
+                      <a:endParaRPr lang="en-US" sz="1100" dirty="0">
                         <a:latin typeface="Calibri" charset="0"/>
                         <a:ea typeface="Calibri" charset="0"/>
                         <a:cs typeface="Calibri" charset="0"/>
@@ -6439,7 +7130,7 @@
                         <a:buNone/>
                       </a:pPr>
                       <a:r>
-                        <a:rPr lang="en-US" sz="1200" dirty="0">
+                        <a:rPr lang="en-US" sz="1100" dirty="0">
                           <a:solidFill>
                             <a:srgbClr val="1E293B"/>
                           </a:solidFill>
@@ -6449,7 +7140,7 @@
                         </a:rPr>
                         <a:t>VADER (lexicon)</a:t>
                       </a:r>
-                      <a:endParaRPr lang="en-US" sz="1200" dirty="0">
+                      <a:endParaRPr lang="en-US" sz="1100" dirty="0">
                         <a:latin typeface="Calibri" charset="0"/>
                         <a:ea typeface="Calibri" charset="0"/>
                         <a:cs typeface="Calibri" charset="0"/>
@@ -6504,7 +7195,7 @@
                         <a:buNone/>
                       </a:pPr>
                       <a:r>
-                        <a:rPr lang="en-US" sz="1200" dirty="0">
+                        <a:rPr lang="en-US" sz="1100" dirty="0">
                           <a:solidFill>
                             <a:srgbClr val="1E293B"/>
                           </a:solidFill>
@@ -6512,9 +7203,9 @@
                           <a:ea typeface="Calibri" pitchFamily="34" charset="-122"/>
                           <a:cs typeface="Calibri" pitchFamily="34" charset="-120"/>
                         </a:rPr>
-                        <a:t>[NUM]</a:t>
+                        <a:t>0.469</a:t>
                       </a:r>
-                      <a:endParaRPr lang="en-US" sz="1200" dirty="0">
+                      <a:endParaRPr lang="en-US" sz="1100" dirty="0">
                         <a:latin typeface="Calibri" charset="0"/>
                         <a:ea typeface="Calibri" charset="0"/>
                         <a:cs typeface="Calibri" charset="0"/>
@@ -6569,7 +7260,7 @@
                         <a:buNone/>
                       </a:pPr>
                       <a:r>
-                        <a:rPr lang="en-US" sz="1200" dirty="0">
+                        <a:rPr lang="en-US" sz="1100" dirty="0">
                           <a:solidFill>
                             <a:srgbClr val="1E293B"/>
                           </a:solidFill>
@@ -6577,9 +7268,9 @@
                           <a:ea typeface="Calibri" pitchFamily="34" charset="-122"/>
                           <a:cs typeface="Calibri" pitchFamily="34" charset="-120"/>
                         </a:rPr>
-                        <a:t>[NUM]</a:t>
+                        <a:t>0.554</a:t>
                       </a:r>
-                      <a:endParaRPr lang="en-US" sz="1200" dirty="0">
+                      <a:endParaRPr lang="en-US" sz="1100" dirty="0">
                         <a:latin typeface="Calibri" charset="0"/>
                         <a:ea typeface="Calibri" charset="0"/>
                         <a:cs typeface="Calibri" charset="0"/>
@@ -6634,7 +7325,7 @@
                         <a:buNone/>
                       </a:pPr>
                       <a:r>
-                        <a:rPr lang="en-US" sz="1200" dirty="0">
+                        <a:rPr lang="en-US" sz="1100" dirty="0">
                           <a:solidFill>
                             <a:srgbClr val="1E293B"/>
                           </a:solidFill>
@@ -6642,9 +7333,9 @@
                           <a:ea typeface="Calibri" pitchFamily="34" charset="-122"/>
                           <a:cs typeface="Calibri" pitchFamily="34" charset="-120"/>
                         </a:rPr>
-                        <a:t>[NUM]</a:t>
+                        <a:t>0.386</a:t>
                       </a:r>
-                      <a:endParaRPr lang="en-US" sz="1200" dirty="0">
+                      <a:endParaRPr lang="en-US" sz="1100" dirty="0">
                         <a:latin typeface="Calibri" charset="0"/>
                         <a:ea typeface="Calibri" charset="0"/>
                         <a:cs typeface="Calibri" charset="0"/>
@@ -6699,7 +7390,7 @@
                         <a:buNone/>
                       </a:pPr>
                       <a:r>
-                        <a:rPr lang="en-US" sz="1200" dirty="0">
+                        <a:rPr lang="en-US" sz="1100" dirty="0">
                           <a:solidFill>
                             <a:srgbClr val="1E293B"/>
                           </a:solidFill>
@@ -6707,9 +7398,9 @@
                           <a:ea typeface="Calibri" pitchFamily="34" charset="-122"/>
                           <a:cs typeface="Calibri" pitchFamily="34" charset="-120"/>
                         </a:rPr>
-                        <a:t>[NUM]</a:t>
+                        <a:t>0.423</a:t>
                       </a:r>
-                      <a:endParaRPr lang="en-US" sz="1200" dirty="0">
+                      <a:endParaRPr lang="en-US" sz="1100" dirty="0">
                         <a:latin typeface="Calibri" charset="0"/>
                         <a:ea typeface="Calibri" charset="0"/>
                         <a:cs typeface="Calibri" charset="0"/>
@@ -6755,6 +7446,71 @@
                     </a:lnB>
                   </a:tcPr>
                 </a:tc>
+                <a:tc>
+                  <a:txBody>
+                    <a:bodyPr/>
+                    <a:lstStyle/>
+                    <a:p>
+                      <a:pPr indent="0" marL="0">
+                        <a:buNone/>
+                      </a:pPr>
+                      <a:r>
+                        <a:rPr lang="en-US" sz="1100" dirty="0">
+                          <a:solidFill>
+                            <a:srgbClr val="1E293B"/>
+                          </a:solidFill>
+                          <a:latin typeface="Calibri" pitchFamily="34" charset="0"/>
+                          <a:ea typeface="Calibri" pitchFamily="34" charset="-122"/>
+                          <a:cs typeface="Calibri" pitchFamily="34" charset="-120"/>
+                        </a:rPr>
+                        <a:t>—</a:t>
+                      </a:r>
+                      <a:endParaRPr lang="en-US" sz="1100" dirty="0">
+                        <a:latin typeface="Calibri" charset="0"/>
+                        <a:ea typeface="Calibri" charset="0"/>
+                        <a:cs typeface="Calibri" charset="0"/>
+                      </a:endParaRPr>
+                    </a:p>
+                  </a:txBody>
+                  <a:tcPr marL="91440" marR="91440" marT="45720" marB="45720">
+                    <a:lnL w="6350" cap="flat" cmpd="sng" algn="ctr">
+                      <a:solidFill>
+                        <a:srgbClr val="D0D7DE"/>
+                      </a:solidFill>
+                      <a:prstDash val="solid"/>
+                      <a:round/>
+                      <a:headEnd type="none" w="med" len="med"/>
+                      <a:tailEnd type="none" w="med" len="med"/>
+                    </a:lnL>
+                    <a:lnR w="6350" cap="flat" cmpd="sng" algn="ctr">
+                      <a:solidFill>
+                        <a:srgbClr val="D0D7DE"/>
+                      </a:solidFill>
+                      <a:prstDash val="solid"/>
+                      <a:round/>
+                      <a:headEnd type="none" w="med" len="med"/>
+                      <a:tailEnd type="none" w="med" len="med"/>
+                    </a:lnR>
+                    <a:lnT w="6350" cap="flat" cmpd="sng" algn="ctr">
+                      <a:solidFill>
+                        <a:srgbClr val="D0D7DE"/>
+                      </a:solidFill>
+                      <a:prstDash val="solid"/>
+                      <a:round/>
+                      <a:headEnd type="none" w="med" len="med"/>
+                      <a:tailEnd type="none" w="med" len="med"/>
+                    </a:lnT>
+                    <a:lnB w="6350" cap="flat" cmpd="sng" algn="ctr">
+                      <a:solidFill>
+                        <a:srgbClr val="D0D7DE"/>
+                      </a:solidFill>
+                      <a:prstDash val="solid"/>
+                      <a:round/>
+                      <a:headEnd type="none" w="med" len="med"/>
+                      <a:tailEnd type="none" w="med" len="med"/>
+                    </a:lnB>
+                  </a:tcPr>
+                </a:tc>
               </a:tr>
             </a:tbl>
           </a:graphicData>
@@ -6793,7 +7549,7 @@
                 <a:ea typeface="Calibri" pitchFamily="34" charset="-122"/>
                 <a:cs typeface="Calibri" pitchFamily="34" charset="-120"/>
               </a:rPr>
-              <a:t>Pull live numbers from results/summary/final_table.csv (visible in the dashboard at :8502).</a:t>
+              <a:t>Green-highlighted cells: per-dataset best.  ·  Source: results/summary/final_table.csv (dashboard at :8502).</a:t>
             </a:r>
             <a:endParaRPr lang="en-US" sz="900" dirty="0"/>
           </a:p>
@@ -6928,7 +7684,7 @@
                 <a:ea typeface="Calibri" pitchFamily="34" charset="-122"/>
                 <a:cs typeface="Calibri" pitchFamily="34" charset="-120"/>
               </a:rPr>
-              <a:t>Per-class F1 — Financial PhraseBank</a:t>
+              <a:t>Three findings the numbers tell us</a:t>
             </a:r>
             <a:endParaRPr lang="en-US" sz="2600" dirty="0"/>
           </a:p>
@@ -6967,36 +7723,396 @@
                 <a:ea typeface="Calibri" pitchFamily="34" charset="-122"/>
                 <a:cs typeface="Calibri" pitchFamily="34" charset="-120"/>
               </a:rPr>
-              <a:t>Class-level numbers expose hidden weaknesses an overall F1 can hide.</a:t>
+              <a:t>Read the table once — but interpret it three times.</a:t>
             </a:r>
             <a:endParaRPr lang="en-US" sz="1300" dirty="0"/>
           </a:p>
         </p:txBody>
       </p:sp>
-      <p:pic>
-        <p:nvPicPr>
-          <p:cNvPr id="6" name="Image 0" descr="C:\python_projects\finllama-sentiment\presentation\key_figures\per_class_f1_FPB.png">    </p:cNvPr>
-          <p:cNvPicPr>
-            <a:picLocks noChangeAspect="1"/>
-          </p:cNvPicPr>
-          <p:nvPr/>
-        </p:nvPicPr>
-        <p:blipFill>
-          <a:blip r:embed="rId1"/>
-          <a:stretch>
-            <a:fillRect/>
-          </a:stretch>
-        </p:blipFill>
-        <p:spPr>
-          <a:xfrm>
-            <a:off x="1371600" y="1280160"/>
-            <a:ext cx="6400800" cy="3200400"/>
-          </a:xfrm>
-          <a:prstGeom prst="rect">
-            <a:avLst/>
-          </a:prstGeom>
-        </p:spPr>
-      </p:pic>
+      <p:sp>
+        <p:nvSpPr>
+          <p:cNvPr id="6" name="Shape 4"/>
+          <p:cNvSpPr/>
+          <p:nvPr/>
+        </p:nvSpPr>
+        <p:spPr>
+          <a:xfrm>
+            <a:off x="457200" y="1417320"/>
+            <a:ext cx="8229600" cy="914400"/>
+          </a:xfrm>
+          <a:prstGeom prst="rect">
+            <a:avLst/>
+          </a:prstGeom>
+          <a:solidFill>
+            <a:srgbClr val="FFFFFF"/>
+          </a:solidFill>
+          <a:ln w="12700">
+            <a:solidFill>
+              <a:srgbClr val="CADCFC"/>
+            </a:solidFill>
+            <a:prstDash val="solid"/>
+          </a:ln>
+        </p:spPr>
+      </p:sp>
+      <p:sp>
+        <p:nvSpPr>
+          <p:cNvPr id="7" name="Shape 5"/>
+          <p:cNvSpPr/>
+          <p:nvPr/>
+        </p:nvSpPr>
+        <p:spPr>
+          <a:xfrm>
+            <a:off x="457200" y="1417320"/>
+            <a:ext cx="73152" cy="914400"/>
+          </a:xfrm>
+          <a:prstGeom prst="rect">
+            <a:avLst/>
+          </a:prstGeom>
+          <a:solidFill>
+            <a:srgbClr val="1E2761"/>
+          </a:solidFill>
+          <a:ln w="12700">
+            <a:solidFill>
+              <a:srgbClr val="1E2761"/>
+            </a:solidFill>
+            <a:prstDash val="solid"/>
+          </a:ln>
+        </p:spPr>
+      </p:sp>
+      <p:sp>
+        <p:nvSpPr>
+          <p:cNvPr id="8" name="Text 6"/>
+          <p:cNvSpPr/>
+          <p:nvPr/>
+        </p:nvSpPr>
+        <p:spPr>
+          <a:xfrm>
+            <a:off x="640080" y="1490472"/>
+            <a:ext cx="7955280" cy="292608"/>
+          </a:xfrm>
+          <a:prstGeom prst="rect">
+            <a:avLst/>
+          </a:prstGeom>
+          <a:noFill/>
+          <a:ln/>
+        </p:spPr>
+        <p:txBody>
+          <a:bodyPr wrap="square" lIns="0" tIns="0" rIns="0" bIns="0" rtlCol="0" anchor="ctr"/>
+          <a:lstStyle/>
+          <a:p>
+            <a:pPr indent="0" marL="0">
+              <a:buNone/>
+            </a:pPr>
+            <a:r>
+              <a:rPr lang="en-US" sz="1400" b="1" dirty="0">
+                <a:solidFill>
+                  <a:srgbClr val="1E2761"/>
+                </a:solidFill>
+                <a:latin typeface="Calibri" pitchFamily="34" charset="0"/>
+                <a:ea typeface="Calibri" pitchFamily="34" charset="-122"/>
+                <a:cs typeface="Calibri" pitchFamily="34" charset="-120"/>
+              </a:rPr>
+              <a:t>Financial instruction tuning did NOT pull ahead</a:t>
+            </a:r>
+            <a:endParaRPr lang="en-US" sz="1400" dirty="0"/>
+          </a:p>
+        </p:txBody>
+      </p:sp>
+      <p:sp>
+        <p:nvSpPr>
+          <p:cNvPr id="9" name="Text 7"/>
+          <p:cNvSpPr/>
+          <p:nvPr/>
+        </p:nvSpPr>
+        <p:spPr>
+          <a:xfrm>
+            <a:off x="640080" y="1801368"/>
+            <a:ext cx="7955280" cy="502920"/>
+          </a:xfrm>
+          <a:prstGeom prst="rect">
+            <a:avLst/>
+          </a:prstGeom>
+          <a:noFill/>
+          <a:ln/>
+        </p:spPr>
+        <p:txBody>
+          <a:bodyPr wrap="square" lIns="0" tIns="0" rIns="0" bIns="0" rtlCol="0" anchor="ctr"/>
+          <a:lstStyle/>
+          <a:p>
+            <a:pPr indent="0" marL="0">
+              <a:buNone/>
+            </a:pPr>
+            <a:r>
+              <a:rPr lang="en-US" sz="1050" dirty="0">
+                <a:solidFill>
+                  <a:srgbClr val="1E293B"/>
+                </a:solidFill>
+                <a:latin typeface="Calibri" pitchFamily="34" charset="0"/>
+                <a:ea typeface="Calibri" pitchFamily="34" charset="-122"/>
+                <a:cs typeface="Calibri" pitchFamily="34" charset="-120"/>
+              </a:rPr>
+              <a:t>plutus-8B (focal financial-tuned model) scored 0.829 F1m on FPB and 0.597 on FiQA. Mistral-7B beat it on FPB (0.890) and Qwen2.5-7B beat it on FiQA (0.673). On the paper's central claim — that financial instruction tuning improves downstream NLP — our subset replication says: not clearly, on these two datasets.</a:t>
+            </a:r>
+            <a:endParaRPr lang="en-US" sz="1050" dirty="0"/>
+          </a:p>
+        </p:txBody>
+      </p:sp>
+      <p:sp>
+        <p:nvSpPr>
+          <p:cNvPr id="10" name="Shape 8"/>
+          <p:cNvSpPr/>
+          <p:nvPr/>
+        </p:nvSpPr>
+        <p:spPr>
+          <a:xfrm>
+            <a:off x="457200" y="2468880"/>
+            <a:ext cx="8229600" cy="914400"/>
+          </a:xfrm>
+          <a:prstGeom prst="rect">
+            <a:avLst/>
+          </a:prstGeom>
+          <a:solidFill>
+            <a:srgbClr val="FFFFFF"/>
+          </a:solidFill>
+          <a:ln w="12700">
+            <a:solidFill>
+              <a:srgbClr val="CADCFC"/>
+            </a:solidFill>
+            <a:prstDash val="solid"/>
+          </a:ln>
+        </p:spPr>
+      </p:sp>
+      <p:sp>
+        <p:nvSpPr>
+          <p:cNvPr id="11" name="Shape 9"/>
+          <p:cNvSpPr/>
+          <p:nvPr/>
+        </p:nvSpPr>
+        <p:spPr>
+          <a:xfrm>
+            <a:off x="457200" y="2468880"/>
+            <a:ext cx="73152" cy="914400"/>
+          </a:xfrm>
+          <a:prstGeom prst="rect">
+            <a:avLst/>
+          </a:prstGeom>
+          <a:solidFill>
+            <a:srgbClr val="1E2761"/>
+          </a:solidFill>
+          <a:ln w="12700">
+            <a:solidFill>
+              <a:srgbClr val="1E2761"/>
+            </a:solidFill>
+            <a:prstDash val="solid"/>
+          </a:ln>
+        </p:spPr>
+      </p:sp>
+      <p:sp>
+        <p:nvSpPr>
+          <p:cNvPr id="12" name="Text 10"/>
+          <p:cNvSpPr/>
+          <p:nvPr/>
+        </p:nvSpPr>
+        <p:spPr>
+          <a:xfrm>
+            <a:off x="640080" y="2542032"/>
+            <a:ext cx="7955280" cy="292608"/>
+          </a:xfrm>
+          <a:prstGeom prst="rect">
+            <a:avLst/>
+          </a:prstGeom>
+          <a:noFill/>
+          <a:ln/>
+        </p:spPr>
+        <p:txBody>
+          <a:bodyPr wrap="square" lIns="0" tIns="0" rIns="0" bIns="0" rtlCol="0" anchor="ctr"/>
+          <a:lstStyle/>
+          <a:p>
+            <a:pPr indent="0" marL="0">
+              <a:buNone/>
+            </a:pPr>
+            <a:r>
+              <a:rPr lang="en-US" sz="1400" b="1" dirty="0">
+                <a:solidFill>
+                  <a:srgbClr val="1E2761"/>
+                </a:solidFill>
+                <a:latin typeface="Calibri" pitchFamily="34" charset="0"/>
+                <a:ea typeface="Calibri" pitchFamily="34" charset="-122"/>
+                <a:cs typeface="Calibri" pitchFamily="34" charset="-120"/>
+              </a:rPr>
+              <a:t>FinBERT dominates FPB; loses on FiQA — strong reverse on out-of-domain text</a:t>
+            </a:r>
+            <a:endParaRPr lang="en-US" sz="1400" dirty="0"/>
+          </a:p>
+        </p:txBody>
+      </p:sp>
+      <p:sp>
+        <p:nvSpPr>
+          <p:cNvPr id="13" name="Text 11"/>
+          <p:cNvSpPr/>
+          <p:nvPr/>
+        </p:nvSpPr>
+        <p:spPr>
+          <a:xfrm>
+            <a:off x="640080" y="2852928"/>
+            <a:ext cx="7955280" cy="502920"/>
+          </a:xfrm>
+          <a:prstGeom prst="rect">
+            <a:avLst/>
+          </a:prstGeom>
+          <a:noFill/>
+          <a:ln/>
+        </p:spPr>
+        <p:txBody>
+          <a:bodyPr wrap="square" lIns="0" tIns="0" rIns="0" bIns="0" rtlCol="0" anchor="ctr"/>
+          <a:lstStyle/>
+          <a:p>
+            <a:pPr indent="0" marL="0">
+              <a:buNone/>
+            </a:pPr>
+            <a:r>
+              <a:rPr lang="en-US" sz="1050" dirty="0">
+                <a:solidFill>
+                  <a:srgbClr val="1E293B"/>
+                </a:solidFill>
+                <a:latin typeface="Calibri" pitchFamily="34" charset="0"/>
+                <a:ea typeface="Calibri" pitchFamily="34" charset="-122"/>
+                <a:cs typeface="Calibri" pitchFamily="34" charset="-120"/>
+              </a:rPr>
+              <a:t>On FPB the 110M specialised classifier (0.925 F1m) outperforms every 8B LLM. On FiQA it drops to 0.482 — Qwen2.5-7B beats it by 19 points. Domain-trained classifiers crush LLMs in-domain but generalise poorly to noisier text. A useful warning when picking models for production.</a:t>
+            </a:r>
+            <a:endParaRPr lang="en-US" sz="1050" dirty="0"/>
+          </a:p>
+        </p:txBody>
+      </p:sp>
+      <p:sp>
+        <p:nvSpPr>
+          <p:cNvPr id="14" name="Shape 12"/>
+          <p:cNvSpPr/>
+          <p:nvPr/>
+        </p:nvSpPr>
+        <p:spPr>
+          <a:xfrm>
+            <a:off x="457200" y="3520440"/>
+            <a:ext cx="8229600" cy="914400"/>
+          </a:xfrm>
+          <a:prstGeom prst="rect">
+            <a:avLst/>
+          </a:prstGeom>
+          <a:solidFill>
+            <a:srgbClr val="FFFFFF"/>
+          </a:solidFill>
+          <a:ln w="12700">
+            <a:solidFill>
+              <a:srgbClr val="CADCFC"/>
+            </a:solidFill>
+            <a:prstDash val="solid"/>
+          </a:ln>
+        </p:spPr>
+      </p:sp>
+      <p:sp>
+        <p:nvSpPr>
+          <p:cNvPr id="15" name="Shape 13"/>
+          <p:cNvSpPr/>
+          <p:nvPr/>
+        </p:nvSpPr>
+        <p:spPr>
+          <a:xfrm>
+            <a:off x="457200" y="3520440"/>
+            <a:ext cx="73152" cy="914400"/>
+          </a:xfrm>
+          <a:prstGeom prst="rect">
+            <a:avLst/>
+          </a:prstGeom>
+          <a:solidFill>
+            <a:srgbClr val="1E2761"/>
+          </a:solidFill>
+          <a:ln w="12700">
+            <a:solidFill>
+              <a:srgbClr val="1E2761"/>
+            </a:solidFill>
+            <a:prstDash val="solid"/>
+          </a:ln>
+        </p:spPr>
+      </p:sp>
+      <p:sp>
+        <p:nvSpPr>
+          <p:cNvPr id="16" name="Text 14"/>
+          <p:cNvSpPr/>
+          <p:nvPr/>
+        </p:nvSpPr>
+        <p:spPr>
+          <a:xfrm>
+            <a:off x="640080" y="3593592"/>
+            <a:ext cx="7955280" cy="292608"/>
+          </a:xfrm>
+          <a:prstGeom prst="rect">
+            <a:avLst/>
+          </a:prstGeom>
+          <a:noFill/>
+          <a:ln/>
+        </p:spPr>
+        <p:txBody>
+          <a:bodyPr wrap="square" lIns="0" tIns="0" rIns="0" bIns="0" rtlCol="0" anchor="ctr"/>
+          <a:lstStyle/>
+          <a:p>
+            <a:pPr indent="0" marL="0">
+              <a:buNone/>
+            </a:pPr>
+            <a:r>
+              <a:rPr lang="en-US" sz="1400" b="1" dirty="0">
+                <a:solidFill>
+                  <a:srgbClr val="1E2761"/>
+                </a:solidFill>
+                <a:latin typeface="Calibri" pitchFamily="34" charset="0"/>
+                <a:ea typeface="Calibri" pitchFamily="34" charset="-122"/>
+                <a:cs typeface="Calibri" pitchFamily="34" charset="-120"/>
+              </a:rPr>
+              <a:t>Prompt sensitivity is comparable to model choice</a:t>
+            </a:r>
+            <a:endParaRPr lang="en-US" sz="1400" dirty="0"/>
+          </a:p>
+        </p:txBody>
+      </p:sp>
+      <p:sp>
+        <p:nvSpPr>
+          <p:cNvPr id="17" name="Text 15"/>
+          <p:cNvSpPr/>
+          <p:nvPr/>
+        </p:nvSpPr>
+        <p:spPr>
+          <a:xfrm>
+            <a:off x="640080" y="3904488"/>
+            <a:ext cx="7955280" cy="502920"/>
+          </a:xfrm>
+          <a:prstGeom prst="rect">
+            <a:avLst/>
+          </a:prstGeom>
+          <a:noFill/>
+          <a:ln/>
+        </p:spPr>
+        <p:txBody>
+          <a:bodyPr wrap="square" lIns="0" tIns="0" rIns="0" bIns="0" rtlCol="0" anchor="ctr"/>
+          <a:lstStyle/>
+          <a:p>
+            <a:pPr indent="0" marL="0">
+              <a:buNone/>
+            </a:pPr>
+            <a:r>
+              <a:rPr lang="en-US" sz="1050" dirty="0">
+                <a:solidFill>
+                  <a:srgbClr val="1E293B"/>
+                </a:solidFill>
+                <a:latin typeface="Calibri" pitchFamily="34" charset="0"/>
+                <a:ea typeface="Calibri" pitchFamily="34" charset="-122"/>
+                <a:cs typeface="Calibri" pitchFamily="34" charset="-120"/>
+              </a:rPr>
+              <a:t>Mistral on FPB: Template A 0-shot 0.803 vs Template B 0-shot 0.689 — an 11-point gap from rewording alone. Qwen on FiQA: Template B 0-shot 0.673 vs Template A 0-shot 0.578 — 9 points. Plutus on FiQA: A 0-shot 0.597 vs B 0-shot 0.432 — 16 points. Single-prompt LLM benchmarks should not be trusted.</a:t>
+            </a:r>
+            <a:endParaRPr lang="en-US" sz="1050" dirty="0"/>
+          </a:p>
+        </p:txBody>
+      </p:sp>
     </p:spTree>
   </p:cSld>
   <p:clrMapOvr>
@@ -7126,7 +8242,7 @@
                 <a:ea typeface="Calibri" pitchFamily="34" charset="-122"/>
                 <a:cs typeface="Calibri" pitchFamily="34" charset="-120"/>
               </a:rPr>
-              <a:t>Per-class F1 — FiQA-SA</a:t>
+              <a:t>Per-class F1 — Financial PhraseBank</a:t>
             </a:r>
             <a:endParaRPr lang="en-US" sz="2600" dirty="0"/>
           </a:p>
@@ -7165,7 +8281,7 @@
                 <a:ea typeface="Calibri" pitchFamily="34" charset="-122"/>
                 <a:cs typeface="Calibri" pitchFamily="34" charset="-120"/>
               </a:rPr>
-              <a:t>Note any class-specific gap between the financial model and the general LLMs.</a:t>
+              <a:t>Class-level numbers expose hidden weaknesses an overall F1 can hide.</a:t>
             </a:r>
             <a:endParaRPr lang="en-US" sz="1300" dirty="0"/>
           </a:p>
@@ -7173,7 +8289,7 @@
       </p:sp>
       <p:pic>
         <p:nvPicPr>
-          <p:cNvPr id="6" name="Image 0" descr="C:\python_projects\finllama-sentiment\presentation\key_figures\per_class_f1_FiQA.png">    </p:cNvPr>
+          <p:cNvPr id="6" name="Image 0" descr="C:\python_projects\finllama-sentiment\presentation\key_figures\per_class_f1_FPB.png">    </p:cNvPr>
           <p:cNvPicPr>
             <a:picLocks noChangeAspect="1"/>
           </p:cNvPicPr>
@@ -7324,7 +8440,7 @@
                 <a:ea typeface="Calibri" pitchFamily="34" charset="-122"/>
                 <a:cs typeface="Calibri" pitchFamily="34" charset="-120"/>
               </a:rPr>
-              <a:t>Confusion matrices — best config per model × dataset</a:t>
+              <a:t>Per-class F1 — FiQA-SA</a:t>
             </a:r>
             <a:endParaRPr lang="en-US" sz="2600" dirty="0"/>
           </a:p>
@@ -7363,7 +8479,7 @@
                 <a:ea typeface="Calibri" pitchFamily="34" charset="-122"/>
                 <a:cs typeface="Calibri" pitchFamily="34" charset="-120"/>
               </a:rPr>
-              <a:t>Rows: true label  ·  Columns: predicted label  ·  Look for systematic mistakes.</a:t>
+              <a:t>Note any class-specific gap between the financial model and the general LLMs.</a:t>
             </a:r>
             <a:endParaRPr lang="en-US" sz="1300" dirty="0"/>
           </a:p>
@@ -7371,7 +8487,7 @@
       </p:sp>
       <p:pic>
         <p:nvPicPr>
-          <p:cNvPr id="6" name="Image 0" descr="C:\python_projects\finllama-sentiment\presentation\key_figures\confusion_grid.png">    </p:cNvPr>
+          <p:cNvPr id="6" name="Image 0" descr="C:\python_projects\finllama-sentiment\presentation\key_figures\per_class_f1_FiQA.png">    </p:cNvPr>
           <p:cNvPicPr>
             <a:picLocks noChangeAspect="1"/>
           </p:cNvPicPr>
@@ -7385,8 +8501,8 @@
         </p:blipFill>
         <p:spPr>
           <a:xfrm>
-            <a:off x="457200" y="1280160"/>
-            <a:ext cx="8229600" cy="3291840"/>
+            <a:off x="1371600" y="1280160"/>
+            <a:ext cx="6400800" cy="3200400"/>
           </a:xfrm>
           <a:prstGeom prst="rect">
             <a:avLst/>
@@ -7522,7 +8638,7 @@
                 <a:ea typeface="Calibri" pitchFamily="34" charset="-122"/>
                 <a:cs typeface="Calibri" pitchFamily="34" charset="-120"/>
               </a:rPr>
-              <a:t>Few-shot effect — does the financial model need fewer examples?</a:t>
+              <a:t>Confusion matrices — best config per model × dataset</a:t>
             </a:r>
             <a:endParaRPr lang="en-US" sz="2600" dirty="0"/>
           </a:p>
@@ -7561,7 +8677,7 @@
                 <a:ea typeface="Calibri" pitchFamily="34" charset="-122"/>
                 <a:cs typeface="Calibri" pitchFamily="34" charset="-120"/>
               </a:rPr>
-              <a:t>ΔF1-macro when going from 0-shot to 3-shot. If the focal model gains less, its tuning already encodes the task.</a:t>
+              <a:t>Rows: true label  ·  Columns: predicted label  ·  Look for systematic mistakes.</a:t>
             </a:r>
             <a:endParaRPr lang="en-US" sz="1300" dirty="0"/>
           </a:p>
@@ -7569,7 +8685,7 @@
       </p:sp>
       <p:pic>
         <p:nvPicPr>
-          <p:cNvPr id="6" name="Image 0" descr="C:\python_projects\finllama-sentiment\presentation\key_figures\fewshot_effect.png">    </p:cNvPr>
+          <p:cNvPr id="6" name="Image 0" descr="C:\python_projects\finllama-sentiment\presentation\key_figures\confusion_grid.png">    </p:cNvPr>
           <p:cNvPicPr>
             <a:picLocks noChangeAspect="1"/>
           </p:cNvPicPr>
@@ -7583,8 +8699,8 @@
         </p:blipFill>
         <p:spPr>
           <a:xfrm>
-            <a:off x="914400" y="1280160"/>
-            <a:ext cx="7315200" cy="3291840"/>
+            <a:off x="457200" y="1280160"/>
+            <a:ext cx="8229600" cy="3291840"/>
           </a:xfrm>
           <a:prstGeom prst="rect">
             <a:avLst/>
@@ -7720,7 +8836,7 @@
                 <a:ea typeface="Calibri" pitchFamily="34" charset="-122"/>
                 <a:cs typeface="Calibri" pitchFamily="34" charset="-120"/>
               </a:rPr>
-              <a:t>Parsing coverage — does the model follow the format?</a:t>
+              <a:t>Few-shot effect — does the financial model need fewer examples?</a:t>
             </a:r>
             <a:endParaRPr lang="en-US" sz="2600" dirty="0"/>
           </a:p>
@@ -7759,7 +8875,7 @@
                 <a:ea typeface="Calibri" pitchFamily="34" charset="-122"/>
                 <a:cs typeface="Calibri" pitchFamily="34" charset="-120"/>
               </a:rPr>
-              <a:t>Below ~95% is a flag. Coverage is reported separately so we don't paper over format failures.</a:t>
+              <a:t>ΔF1-macro when going from 0-shot to 3-shot. If the focal model gains less, its tuning already encodes the task.</a:t>
             </a:r>
             <a:endParaRPr lang="en-US" sz="1300" dirty="0"/>
           </a:p>
@@ -7767,7 +8883,7 @@
       </p:sp>
       <p:pic>
         <p:nvPicPr>
-          <p:cNvPr id="6" name="Image 0" descr="C:\python_projects\finllama-sentiment\presentation\key_figures\coverage_heatmap.png">    </p:cNvPr>
+          <p:cNvPr id="6" name="Image 0" descr="C:\python_projects\finllama-sentiment\presentation\key_figures\fewshot_effect.png">    </p:cNvPr>
           <p:cNvPicPr>
             <a:picLocks noChangeAspect="1"/>
           </p:cNvPicPr>
@@ -8777,7 +9893,7 @@
                 <a:ea typeface="Calibri" pitchFamily="34" charset="-122"/>
                 <a:cs typeface="Calibri" pitchFamily="34" charset="-120"/>
               </a:rPr>
-              <a:t>Concrete cases — pulled from the dashboard 'Highlights' tab</a:t>
+              <a:t>Parsing coverage — does the model follow the format?</a:t>
             </a:r>
             <a:endParaRPr lang="en-US" sz="2600" dirty="0"/>
           </a:p>
@@ -8816,592 +9932,36 @@
                 <a:ea typeface="Calibri" pitchFamily="34" charset="-122"/>
                 <a:cs typeface="Calibri" pitchFamily="34" charset="-120"/>
               </a:rPr>
-              <a:t>Each card shows one sample, the gold label, and how each model classified it.</a:t>
+              <a:t>Below ~95% is a flag. Coverage is reported separately so we don't paper over format failures.</a:t>
             </a:r>
             <a:endParaRPr lang="en-US" sz="1300" dirty="0"/>
           </a:p>
         </p:txBody>
       </p:sp>
-      <p:sp>
-        <p:nvSpPr>
-          <p:cNvPr id="6" name="Shape 4"/>
-          <p:cNvSpPr/>
-          <p:nvPr/>
-        </p:nvSpPr>
-        <p:spPr>
-          <a:xfrm>
-            <a:off x="457200" y="1371600"/>
-            <a:ext cx="4023360" cy="1554480"/>
-          </a:xfrm>
-          <a:prstGeom prst="rect">
-            <a:avLst/>
-          </a:prstGeom>
-          <a:solidFill>
-            <a:srgbClr val="FFFFFF"/>
-          </a:solidFill>
-          <a:ln w="12700">
-            <a:solidFill>
-              <a:srgbClr val="1E2761"/>
-            </a:solidFill>
-            <a:prstDash val="solid"/>
-          </a:ln>
-        </p:spPr>
-      </p:sp>
-      <p:sp>
-        <p:nvSpPr>
-          <p:cNvPr id="7" name="Shape 5"/>
-          <p:cNvSpPr/>
-          <p:nvPr/>
-        </p:nvSpPr>
-        <p:spPr>
-          <a:xfrm>
-            <a:off x="457200" y="1371600"/>
-            <a:ext cx="73152" cy="1554480"/>
-          </a:xfrm>
-          <a:prstGeom prst="rect">
-            <a:avLst/>
-          </a:prstGeom>
-          <a:solidFill>
-            <a:srgbClr val="F96167"/>
-          </a:solidFill>
-          <a:ln w="12700">
-            <a:solidFill>
-              <a:srgbClr val="F96167"/>
-            </a:solidFill>
-            <a:prstDash val="solid"/>
-          </a:ln>
-        </p:spPr>
-      </p:sp>
-      <p:sp>
-        <p:nvSpPr>
-          <p:cNvPr id="8" name="Text 6"/>
-          <p:cNvSpPr/>
-          <p:nvPr/>
-        </p:nvSpPr>
-        <p:spPr>
-          <a:xfrm>
-            <a:off x="640080" y="1444752"/>
-            <a:ext cx="3749040" cy="292608"/>
-          </a:xfrm>
-          <a:prstGeom prst="rect">
-            <a:avLst/>
-          </a:prstGeom>
-          <a:noFill/>
-          <a:ln/>
-        </p:spPr>
-        <p:txBody>
-          <a:bodyPr wrap="square" lIns="0" tIns="0" rIns="0" bIns="0" rtlCol="0" anchor="ctr"/>
-          <a:lstStyle/>
-          <a:p>
-            <a:pPr indent="0" marL="0">
-              <a:buNone/>
-            </a:pPr>
-            <a:r>
-              <a:rPr lang="en-US" sz="1200" b="1" dirty="0">
-                <a:solidFill>
-                  <a:srgbClr val="F96167"/>
-                </a:solidFill>
-                <a:latin typeface="Calibri" pitchFamily="34" charset="0"/>
-                <a:ea typeface="Calibri" pitchFamily="34" charset="-122"/>
-                <a:cs typeface="Calibri" pitchFamily="34" charset="-120"/>
-              </a:rPr>
-              <a:t>Focal wins, generals miss</a:t>
-            </a:r>
-            <a:endParaRPr lang="en-US" sz="1200" dirty="0"/>
-          </a:p>
-        </p:txBody>
-      </p:sp>
-      <p:sp>
-        <p:nvSpPr>
-          <p:cNvPr id="9" name="Text 7"/>
-          <p:cNvSpPr/>
-          <p:nvPr/>
-        </p:nvSpPr>
-        <p:spPr>
-          <a:xfrm>
-            <a:off x="640080" y="1755648"/>
-            <a:ext cx="3749040" cy="1097280"/>
-          </a:xfrm>
-          <a:prstGeom prst="rect">
-            <a:avLst/>
-          </a:prstGeom>
-          <a:noFill/>
-          <a:ln/>
-        </p:spPr>
-        <p:txBody>
-          <a:bodyPr wrap="square" lIns="0" tIns="0" rIns="0" bIns="0" rtlCol="0" anchor="ctr"/>
-          <a:lstStyle/>
-          <a:p>
-            <a:pPr indent="0" marL="0">
-              <a:buNone/>
-            </a:pPr>
-            <a:r>
-              <a:rPr lang="en-US" sz="1100" dirty="0">
-                <a:solidFill>
-                  <a:srgbClr val="1E293B"/>
-                </a:solidFill>
-                <a:latin typeface="Calibri" pitchFamily="34" charset="0"/>
-                <a:ea typeface="Calibri" pitchFamily="34" charset="-122"/>
-                <a:cs typeface="Calibri" pitchFamily="34" charset="-120"/>
-              </a:rPr>
-              <a:t>[paste sample text]</a:t>
-            </a:r>
-            <a:endParaRPr lang="en-US" sz="1100" dirty="0"/>
-          </a:p>
-          <a:p>
-            <a:pPr indent="0" marL="0">
-              <a:buNone/>
-            </a:pPr>
-            <a:r>
-              <a:rPr lang="en-US" sz="1100" dirty="0">
-                <a:solidFill>
-                  <a:srgbClr val="1E293B"/>
-                </a:solidFill>
-                <a:latin typeface="Calibri" pitchFamily="34" charset="0"/>
-                <a:ea typeface="Calibri" pitchFamily="34" charset="-122"/>
-                <a:cs typeface="Calibri" pitchFamily="34" charset="-120"/>
-              </a:rPr>
-              <a:t>Gold: positive  ·  plutus-8B: positive  ·  Mistral: neutral  ·  Qwen2.5: neutral</a:t>
-            </a:r>
-            <a:endParaRPr lang="en-US" sz="1100" dirty="0"/>
-          </a:p>
-        </p:txBody>
-      </p:sp>
-      <p:sp>
-        <p:nvSpPr>
-          <p:cNvPr id="10" name="Shape 8"/>
-          <p:cNvSpPr/>
-          <p:nvPr/>
-        </p:nvSpPr>
-        <p:spPr>
-          <a:xfrm>
-            <a:off x="4663440" y="1371600"/>
-            <a:ext cx="4023360" cy="1554480"/>
-          </a:xfrm>
-          <a:prstGeom prst="rect">
-            <a:avLst/>
-          </a:prstGeom>
-          <a:solidFill>
-            <a:srgbClr val="FFFFFF"/>
-          </a:solidFill>
-          <a:ln w="12700">
-            <a:solidFill>
-              <a:srgbClr val="1E2761"/>
-            </a:solidFill>
-            <a:prstDash val="solid"/>
-          </a:ln>
-        </p:spPr>
-      </p:sp>
-      <p:sp>
-        <p:nvSpPr>
-          <p:cNvPr id="11" name="Shape 9"/>
-          <p:cNvSpPr/>
-          <p:nvPr/>
-        </p:nvSpPr>
-        <p:spPr>
-          <a:xfrm>
-            <a:off x="4663440" y="1371600"/>
-            <a:ext cx="73152" cy="1554480"/>
-          </a:xfrm>
-          <a:prstGeom prst="rect">
-            <a:avLst/>
-          </a:prstGeom>
-          <a:solidFill>
-            <a:srgbClr val="F96167"/>
-          </a:solidFill>
-          <a:ln w="12700">
-            <a:solidFill>
-              <a:srgbClr val="F96167"/>
-            </a:solidFill>
-            <a:prstDash val="solid"/>
-          </a:ln>
-        </p:spPr>
-      </p:sp>
-      <p:sp>
-        <p:nvSpPr>
-          <p:cNvPr id="12" name="Text 10"/>
-          <p:cNvSpPr/>
-          <p:nvPr/>
-        </p:nvSpPr>
-        <p:spPr>
-          <a:xfrm>
-            <a:off x="4846320" y="1444752"/>
-            <a:ext cx="3749040" cy="292608"/>
-          </a:xfrm>
-          <a:prstGeom prst="rect">
-            <a:avLst/>
-          </a:prstGeom>
-          <a:noFill/>
-          <a:ln/>
-        </p:spPr>
-        <p:txBody>
-          <a:bodyPr wrap="square" lIns="0" tIns="0" rIns="0" bIns="0" rtlCol="0" anchor="ctr"/>
-          <a:lstStyle/>
-          <a:p>
-            <a:pPr indent="0" marL="0">
-              <a:buNone/>
-            </a:pPr>
-            <a:r>
-              <a:rPr lang="en-US" sz="1200" b="1" dirty="0">
-                <a:solidFill>
-                  <a:srgbClr val="F96167"/>
-                </a:solidFill>
-                <a:latin typeface="Calibri" pitchFamily="34" charset="0"/>
-                <a:ea typeface="Calibri" pitchFamily="34" charset="-122"/>
-                <a:cs typeface="Calibri" pitchFamily="34" charset="-120"/>
-              </a:rPr>
-              <a:t>Generals win, focal misses</a:t>
-            </a:r>
-            <a:endParaRPr lang="en-US" sz="1200" dirty="0"/>
-          </a:p>
-        </p:txBody>
-      </p:sp>
-      <p:sp>
-        <p:nvSpPr>
-          <p:cNvPr id="13" name="Text 11"/>
-          <p:cNvSpPr/>
-          <p:nvPr/>
-        </p:nvSpPr>
-        <p:spPr>
-          <a:xfrm>
-            <a:off x="4846320" y="1755648"/>
-            <a:ext cx="3749040" cy="1097280"/>
-          </a:xfrm>
-          <a:prstGeom prst="rect">
-            <a:avLst/>
-          </a:prstGeom>
-          <a:noFill/>
-          <a:ln/>
-        </p:spPr>
-        <p:txBody>
-          <a:bodyPr wrap="square" lIns="0" tIns="0" rIns="0" bIns="0" rtlCol="0" anchor="ctr"/>
-          <a:lstStyle/>
-          <a:p>
-            <a:pPr indent="0" marL="0">
-              <a:buNone/>
-            </a:pPr>
-            <a:r>
-              <a:rPr lang="en-US" sz="1100" dirty="0">
-                <a:solidFill>
-                  <a:srgbClr val="1E293B"/>
-                </a:solidFill>
-                <a:latin typeface="Calibri" pitchFamily="34" charset="0"/>
-                <a:ea typeface="Calibri" pitchFamily="34" charset="-122"/>
-                <a:cs typeface="Calibri" pitchFamily="34" charset="-120"/>
-              </a:rPr>
-              <a:t>[paste sample text]</a:t>
-            </a:r>
-            <a:endParaRPr lang="en-US" sz="1100" dirty="0"/>
-          </a:p>
-          <a:p>
-            <a:pPr indent="0" marL="0">
-              <a:buNone/>
-            </a:pPr>
-            <a:r>
-              <a:rPr lang="en-US" sz="1100" dirty="0">
-                <a:solidFill>
-                  <a:srgbClr val="1E293B"/>
-                </a:solidFill>
-                <a:latin typeface="Calibri" pitchFamily="34" charset="0"/>
-                <a:ea typeface="Calibri" pitchFamily="34" charset="-122"/>
-                <a:cs typeface="Calibri" pitchFamily="34" charset="-120"/>
-              </a:rPr>
-              <a:t>Gold: negative  ·  Mistral: negative  ·  plutus-8B: neutral</a:t>
-            </a:r>
-            <a:endParaRPr lang="en-US" sz="1100" dirty="0"/>
-          </a:p>
-        </p:txBody>
-      </p:sp>
-      <p:sp>
-        <p:nvSpPr>
-          <p:cNvPr id="14" name="Shape 12"/>
-          <p:cNvSpPr/>
-          <p:nvPr/>
-        </p:nvSpPr>
-        <p:spPr>
-          <a:xfrm>
-            <a:off x="457200" y="3108960"/>
-            <a:ext cx="4023360" cy="1554480"/>
-          </a:xfrm>
-          <a:prstGeom prst="rect">
-            <a:avLst/>
-          </a:prstGeom>
-          <a:solidFill>
-            <a:srgbClr val="FFFFFF"/>
-          </a:solidFill>
-          <a:ln w="12700">
-            <a:solidFill>
-              <a:srgbClr val="1E2761"/>
-            </a:solidFill>
-            <a:prstDash val="solid"/>
-          </a:ln>
-        </p:spPr>
-      </p:sp>
-      <p:sp>
-        <p:nvSpPr>
-          <p:cNvPr id="15" name="Shape 13"/>
-          <p:cNvSpPr/>
-          <p:nvPr/>
-        </p:nvSpPr>
-        <p:spPr>
-          <a:xfrm>
-            <a:off x="457200" y="3108960"/>
-            <a:ext cx="73152" cy="1554480"/>
-          </a:xfrm>
-          <a:prstGeom prst="rect">
-            <a:avLst/>
-          </a:prstGeom>
-          <a:solidFill>
-            <a:srgbClr val="F96167"/>
-          </a:solidFill>
-          <a:ln w="12700">
-            <a:solidFill>
-              <a:srgbClr val="F96167"/>
-            </a:solidFill>
-            <a:prstDash val="solid"/>
-          </a:ln>
-        </p:spPr>
-      </p:sp>
-      <p:sp>
-        <p:nvSpPr>
-          <p:cNvPr id="16" name="Text 14"/>
-          <p:cNvSpPr/>
-          <p:nvPr/>
-        </p:nvSpPr>
-        <p:spPr>
-          <a:xfrm>
-            <a:off x="640080" y="3182112"/>
-            <a:ext cx="3749040" cy="292608"/>
-          </a:xfrm>
-          <a:prstGeom prst="rect">
-            <a:avLst/>
-          </a:prstGeom>
-          <a:noFill/>
-          <a:ln/>
-        </p:spPr>
-        <p:txBody>
-          <a:bodyPr wrap="square" lIns="0" tIns="0" rIns="0" bIns="0" rtlCol="0" anchor="ctr"/>
-          <a:lstStyle/>
-          <a:p>
-            <a:pPr indent="0" marL="0">
-              <a:buNone/>
-            </a:pPr>
-            <a:r>
-              <a:rPr lang="en-US" sz="1200" b="1" dirty="0">
-                <a:solidFill>
-                  <a:srgbClr val="F96167"/>
-                </a:solidFill>
-                <a:latin typeface="Calibri" pitchFamily="34" charset="0"/>
-                <a:ea typeface="Calibri" pitchFamily="34" charset="-122"/>
-                <a:cs typeface="Calibri" pitchFamily="34" charset="-120"/>
-              </a:rPr>
-              <a:t>Prompt template flips a model</a:t>
-            </a:r>
-            <a:endParaRPr lang="en-US" sz="1200" dirty="0"/>
-          </a:p>
-        </p:txBody>
-      </p:sp>
-      <p:sp>
-        <p:nvSpPr>
-          <p:cNvPr id="17" name="Text 15"/>
-          <p:cNvSpPr/>
-          <p:nvPr/>
-        </p:nvSpPr>
-        <p:spPr>
-          <a:xfrm>
-            <a:off x="640080" y="3493008"/>
-            <a:ext cx="3749040" cy="1097280"/>
-          </a:xfrm>
-          <a:prstGeom prst="rect">
-            <a:avLst/>
-          </a:prstGeom>
-          <a:noFill/>
-          <a:ln/>
-        </p:spPr>
-        <p:txBody>
-          <a:bodyPr wrap="square" lIns="0" tIns="0" rIns="0" bIns="0" rtlCol="0" anchor="ctr"/>
-          <a:lstStyle/>
-          <a:p>
-            <a:pPr indent="0" marL="0">
-              <a:buNone/>
-            </a:pPr>
-            <a:r>
-              <a:rPr lang="en-US" sz="1100" dirty="0">
-                <a:solidFill>
-                  <a:srgbClr val="1E293B"/>
-                </a:solidFill>
-                <a:latin typeface="Calibri" pitchFamily="34" charset="0"/>
-                <a:ea typeface="Calibri" pitchFamily="34" charset="-122"/>
-                <a:cs typeface="Calibri" pitchFamily="34" charset="-120"/>
-              </a:rPr>
-              <a:t>[paste sample text]</a:t>
-            </a:r>
-            <a:endParaRPr lang="en-US" sz="1100" dirty="0"/>
-          </a:p>
-          <a:p>
-            <a:pPr indent="0" marL="0">
-              <a:buNone/>
-            </a:pPr>
-            <a:r>
-              <a:rPr lang="en-US" sz="1100" dirty="0">
-                <a:solidFill>
-                  <a:srgbClr val="1E293B"/>
-                </a:solidFill>
-                <a:latin typeface="Calibri" pitchFamily="34" charset="0"/>
-                <a:ea typeface="Calibri" pitchFamily="34" charset="-122"/>
-                <a:cs typeface="Calibri" pitchFamily="34" charset="-120"/>
-              </a:rPr>
-              <a:t>Template A → positive  ·  Template B → negative  (same model, same shots)</a:t>
-            </a:r>
-            <a:endParaRPr lang="en-US" sz="1100" dirty="0"/>
-          </a:p>
-        </p:txBody>
-      </p:sp>
-      <p:sp>
-        <p:nvSpPr>
-          <p:cNvPr id="18" name="Shape 16"/>
-          <p:cNvSpPr/>
-          <p:nvPr/>
-        </p:nvSpPr>
-        <p:spPr>
-          <a:xfrm>
-            <a:off x="4663440" y="3108960"/>
-            <a:ext cx="4023360" cy="1554480"/>
-          </a:xfrm>
-          <a:prstGeom prst="rect">
-            <a:avLst/>
-          </a:prstGeom>
-          <a:solidFill>
-            <a:srgbClr val="FFFFFF"/>
-          </a:solidFill>
-          <a:ln w="12700">
-            <a:solidFill>
-              <a:srgbClr val="1E2761"/>
-            </a:solidFill>
-            <a:prstDash val="solid"/>
-          </a:ln>
-        </p:spPr>
-      </p:sp>
-      <p:sp>
-        <p:nvSpPr>
-          <p:cNvPr id="19" name="Shape 17"/>
-          <p:cNvSpPr/>
-          <p:nvPr/>
-        </p:nvSpPr>
-        <p:spPr>
-          <a:xfrm>
-            <a:off x="4663440" y="3108960"/>
-            <a:ext cx="73152" cy="1554480"/>
-          </a:xfrm>
-          <a:prstGeom prst="rect">
-            <a:avLst/>
-          </a:prstGeom>
-          <a:solidFill>
-            <a:srgbClr val="F96167"/>
-          </a:solidFill>
-          <a:ln w="12700">
-            <a:solidFill>
-              <a:srgbClr val="F96167"/>
-            </a:solidFill>
-            <a:prstDash val="solid"/>
-          </a:ln>
-        </p:spPr>
-      </p:sp>
-      <p:sp>
-        <p:nvSpPr>
-          <p:cNvPr id="20" name="Text 18"/>
-          <p:cNvSpPr/>
-          <p:nvPr/>
-        </p:nvSpPr>
-        <p:spPr>
-          <a:xfrm>
-            <a:off x="4846320" y="3182112"/>
-            <a:ext cx="3749040" cy="292608"/>
-          </a:xfrm>
-          <a:prstGeom prst="rect">
-            <a:avLst/>
-          </a:prstGeom>
-          <a:noFill/>
-          <a:ln/>
-        </p:spPr>
-        <p:txBody>
-          <a:bodyPr wrap="square" lIns="0" tIns="0" rIns="0" bIns="0" rtlCol="0" anchor="ctr"/>
-          <a:lstStyle/>
-          <a:p>
-            <a:pPr indent="0" marL="0">
-              <a:buNone/>
-            </a:pPr>
-            <a:r>
-              <a:rPr lang="en-US" sz="1200" b="1" dirty="0">
-                <a:solidFill>
-                  <a:srgbClr val="F96167"/>
-                </a:solidFill>
-                <a:latin typeface="Calibri" pitchFamily="34" charset="0"/>
-                <a:ea typeface="Calibri" pitchFamily="34" charset="-122"/>
-                <a:cs typeface="Calibri" pitchFamily="34" charset="-120"/>
-              </a:rPr>
-              <a:t>Everyone misses</a:t>
-            </a:r>
-            <a:endParaRPr lang="en-US" sz="1200" dirty="0"/>
-          </a:p>
-        </p:txBody>
-      </p:sp>
-      <p:sp>
-        <p:nvSpPr>
-          <p:cNvPr id="21" name="Text 19"/>
-          <p:cNvSpPr/>
-          <p:nvPr/>
-        </p:nvSpPr>
-        <p:spPr>
-          <a:xfrm>
-            <a:off x="4846320" y="3493008"/>
-            <a:ext cx="3749040" cy="1097280"/>
-          </a:xfrm>
-          <a:prstGeom prst="rect">
-            <a:avLst/>
-          </a:prstGeom>
-          <a:noFill/>
-          <a:ln/>
-        </p:spPr>
-        <p:txBody>
-          <a:bodyPr wrap="square" lIns="0" tIns="0" rIns="0" bIns="0" rtlCol="0" anchor="ctr"/>
-          <a:lstStyle/>
-          <a:p>
-            <a:pPr indent="0" marL="0">
-              <a:buNone/>
-            </a:pPr>
-            <a:r>
-              <a:rPr lang="en-US" sz="1100" dirty="0">
-                <a:solidFill>
-                  <a:srgbClr val="1E293B"/>
-                </a:solidFill>
-                <a:latin typeface="Calibri" pitchFamily="34" charset="0"/>
-                <a:ea typeface="Calibri" pitchFamily="34" charset="-122"/>
-                <a:cs typeface="Calibri" pitchFamily="34" charset="-120"/>
-              </a:rPr>
-              <a:t>[paste sample text]</a:t>
-            </a:r>
-            <a:endParaRPr lang="en-US" sz="1100" dirty="0"/>
-          </a:p>
-          <a:p>
-            <a:pPr indent="0" marL="0">
-              <a:buNone/>
-            </a:pPr>
-            <a:r>
-              <a:rPr lang="en-US" sz="1100" dirty="0">
-                <a:solidFill>
-                  <a:srgbClr val="1E293B"/>
-                </a:solidFill>
-                <a:latin typeface="Calibri" pitchFamily="34" charset="0"/>
-                <a:ea typeface="Calibri" pitchFamily="34" charset="-122"/>
-                <a:cs typeface="Calibri" pitchFamily="34" charset="-120"/>
-              </a:rPr>
-              <a:t>Gold: neutral  ·  All models predicted: positive (likely a calm-news-defaults-positive bias)</a:t>
-            </a:r>
-            <a:endParaRPr lang="en-US" sz="1100" dirty="0"/>
-          </a:p>
-        </p:txBody>
-      </p:sp>
+      <p:pic>
+        <p:nvPicPr>
+          <p:cNvPr id="6" name="Image 0" descr="C:\python_projects\finllama-sentiment\presentation\key_figures\coverage_heatmap.png">    </p:cNvPr>
+          <p:cNvPicPr>
+            <a:picLocks noChangeAspect="1"/>
+          </p:cNvPicPr>
+          <p:nvPr/>
+        </p:nvPicPr>
+        <p:blipFill>
+          <a:blip r:embed="rId1"/>
+          <a:stretch>
+            <a:fillRect/>
+          </a:stretch>
+        </p:blipFill>
+        <p:spPr>
+          <a:xfrm>
+            <a:off x="914400" y="1280160"/>
+            <a:ext cx="7315200" cy="3291840"/>
+          </a:xfrm>
+          <a:prstGeom prst="rect">
+            <a:avLst/>
+          </a:prstGeom>
+        </p:spPr>
+      </p:pic>
     </p:spTree>
   </p:cSld>
   <p:clrMapOvr>
@@ -9531,7 +10091,7 @@
                 <a:ea typeface="Calibri" pitchFamily="34" charset="-122"/>
                 <a:cs typeface="Calibri" pitchFamily="34" charset="-120"/>
               </a:rPr>
-              <a:t>Error categories — focal model misses (hand-categorized)</a:t>
+              <a:t>Concrete cases — pulled from the dashboard 'Highlights' tab</a:t>
             </a:r>
             <a:endParaRPr lang="en-US" sz="2600" dirty="0"/>
           </a:p>
@@ -9570,7 +10130,7 @@
                 <a:ea typeface="Calibri" pitchFamily="34" charset="-122"/>
                 <a:cs typeface="Calibri" pitchFamily="34" charset="-120"/>
               </a:rPr>
-              <a:t>Open results/summary/focal_error_sample.csv, fill the 'category' column, paste the breakdown here.</a:t>
+              <a:t>Each card shows one sample, the gold label, and how each model classified it.</a:t>
             </a:r>
             <a:endParaRPr lang="en-US" sz="1300" dirty="0"/>
           </a:p>
@@ -9578,151 +10138,24 @@
       </p:sp>
       <p:sp>
         <p:nvSpPr>
-          <p:cNvPr id="6" name="Text 4"/>
-          <p:cNvSpPr/>
-          <p:nvPr/>
-        </p:nvSpPr>
-        <p:spPr>
-          <a:xfrm>
-            <a:off x="457200" y="1463040"/>
-            <a:ext cx="8229600" cy="2286000"/>
-          </a:xfrm>
-          <a:prstGeom prst="rect">
-            <a:avLst/>
-          </a:prstGeom>
-          <a:noFill/>
-          <a:ln/>
-        </p:spPr>
-        <p:txBody>
-          <a:bodyPr wrap="square" rtlCol="0" anchor="t"/>
-          <a:lstStyle/>
-          <a:p>
-            <a:pPr marL="342900" indent="-342900">
-              <a:spcAft>
-                <a:spcPts val="600"/>
-              </a:spcAft>
-              <a:buSzPct val="100000"/>
-              <a:buChar char="•"/>
-            </a:pPr>
-            <a:r>
-              <a:rPr lang="en-US" sz="1400" dirty="0">
-                <a:solidFill>
-                  <a:srgbClr val="1E293B"/>
-                </a:solidFill>
-                <a:latin typeface="Calibri" pitchFamily="34" charset="0"/>
-                <a:ea typeface="Calibri" pitchFamily="34" charset="-122"/>
-                <a:cs typeface="Calibri" pitchFamily="34" charset="-120"/>
-              </a:rPr>
-              <a:t>Negation — model treats a negated negative as positive (e.g. 'did not miss expectations')</a:t>
-            </a:r>
-            <a:endParaRPr lang="en-US" sz="1400" dirty="0"/>
-          </a:p>
-          <a:p>
-            <a:pPr marL="342900" indent="-342900">
-              <a:spcAft>
-                <a:spcPts val="600"/>
-              </a:spcAft>
-              <a:buSzPct val="100000"/>
-              <a:buChar char="•"/>
-            </a:pPr>
-            <a:r>
-              <a:rPr lang="en-US" sz="1400" dirty="0">
-                <a:solidFill>
-                  <a:srgbClr val="1E293B"/>
-                </a:solidFill>
-                <a:latin typeface="Calibri" pitchFamily="34" charset="0"/>
-                <a:ea typeface="Calibri" pitchFamily="34" charset="-122"/>
-                <a:cs typeface="Calibri" pitchFamily="34" charset="-120"/>
-              </a:rPr>
-              <a:t>Numerical reasoning — small revenue beat treated as 'positive' on noise</a:t>
-            </a:r>
-            <a:endParaRPr lang="en-US" sz="1400" dirty="0"/>
-          </a:p>
-          <a:p>
-            <a:pPr marL="342900" indent="-342900">
-              <a:spcAft>
-                <a:spcPts val="600"/>
-              </a:spcAft>
-              <a:buSzPct val="100000"/>
-              <a:buChar char="•"/>
-            </a:pPr>
-            <a:r>
-              <a:rPr lang="en-US" sz="1400" dirty="0">
-                <a:solidFill>
-                  <a:srgbClr val="1E293B"/>
-                </a:solidFill>
-                <a:latin typeface="Calibri" pitchFamily="34" charset="0"/>
-                <a:ea typeface="Calibri" pitchFamily="34" charset="-122"/>
-                <a:cs typeface="Calibri" pitchFamily="34" charset="-120"/>
-              </a:rPr>
-              <a:t>Domain jargon / ambiguity — regulator commentary, hedged policy language</a:t>
-            </a:r>
-            <a:endParaRPr lang="en-US" sz="1400" dirty="0"/>
-          </a:p>
-          <a:p>
-            <a:pPr marL="342900" indent="-342900">
-              <a:spcAft>
-                <a:spcPts val="600"/>
-              </a:spcAft>
-              <a:buSzPct val="100000"/>
-              <a:buChar char="•"/>
-            </a:pPr>
-            <a:r>
-              <a:rPr lang="en-US" sz="1400" dirty="0">
-                <a:solidFill>
-                  <a:srgbClr val="1E293B"/>
-                </a:solidFill>
-                <a:latin typeface="Calibri" pitchFamily="34" charset="0"/>
-                <a:ea typeface="Calibri" pitchFamily="34" charset="-122"/>
-                <a:cs typeface="Calibri" pitchFamily="34" charset="-120"/>
-              </a:rPr>
-              <a:t>Factual neutrals → mistaken for positive — calm news flagged as upbeat by default</a:t>
-            </a:r>
-            <a:endParaRPr lang="en-US" sz="1400" dirty="0"/>
-          </a:p>
-          <a:p>
-            <a:pPr marL="342900" indent="-342900">
-              <a:spcAft>
-                <a:spcPts val="600"/>
-              </a:spcAft>
-              <a:buSzPct val="100000"/>
-              <a:buChar char="•"/>
-            </a:pPr>
-            <a:r>
-              <a:rPr lang="en-US" sz="1400" dirty="0">
-                <a:solidFill>
-                  <a:srgbClr val="1E293B"/>
-                </a:solidFill>
-                <a:latin typeface="Calibri" pitchFamily="34" charset="0"/>
-                <a:ea typeface="Calibri" pitchFamily="34" charset="-122"/>
-                <a:cs typeface="Calibri" pitchFamily="34" charset="-120"/>
-              </a:rPr>
-              <a:t>[+ any additional category that emerges during your hand review]</a:t>
-            </a:r>
-            <a:endParaRPr lang="en-US" sz="1400" dirty="0"/>
-          </a:p>
-        </p:txBody>
-      </p:sp>
-      <p:sp>
-        <p:nvSpPr>
-          <p:cNvPr id="7" name="Shape 5"/>
-          <p:cNvSpPr/>
-          <p:nvPr/>
-        </p:nvSpPr>
-        <p:spPr>
-          <a:xfrm>
-            <a:off x="457200" y="3931920"/>
-            <a:ext cx="8229600" cy="731520"/>
+          <p:cNvPr id="6" name="Shape 4"/>
+          <p:cNvSpPr/>
+          <p:nvPr/>
+        </p:nvSpPr>
+        <p:spPr>
+          <a:xfrm>
+            <a:off x="457200" y="1371600"/>
+            <a:ext cx="4023360" cy="1554480"/>
           </a:xfrm>
           <a:prstGeom prst="rect">
             <a:avLst/>
           </a:prstGeom>
           <a:solidFill>
-            <a:srgbClr val="CADCFC"/>
+            <a:srgbClr val="FFFFFF"/>
           </a:solidFill>
           <a:ln w="12700">
             <a:solidFill>
-              <a:srgbClr val="CADCFC"/>
+              <a:srgbClr val="1E2761"/>
             </a:solidFill>
             <a:prstDash val="solid"/>
           </a:ln>
@@ -9730,14 +10163,39 @@
       </p:sp>
       <p:sp>
         <p:nvSpPr>
+          <p:cNvPr id="7" name="Shape 5"/>
+          <p:cNvSpPr/>
+          <p:nvPr/>
+        </p:nvSpPr>
+        <p:spPr>
+          <a:xfrm>
+            <a:off x="457200" y="1371600"/>
+            <a:ext cx="73152" cy="1554480"/>
+          </a:xfrm>
+          <a:prstGeom prst="rect">
+            <a:avLst/>
+          </a:prstGeom>
+          <a:solidFill>
+            <a:srgbClr val="F96167"/>
+          </a:solidFill>
+          <a:ln w="12700">
+            <a:solidFill>
+              <a:srgbClr val="F96167"/>
+            </a:solidFill>
+            <a:prstDash val="solid"/>
+          </a:ln>
+        </p:spPr>
+      </p:sp>
+      <p:sp>
+        <p:nvSpPr>
           <p:cNvPr id="8" name="Text 6"/>
           <p:cNvSpPr/>
           <p:nvPr/>
         </p:nvSpPr>
         <p:spPr>
           <a:xfrm>
-            <a:off x="640080" y="4023360"/>
-            <a:ext cx="7863840" cy="548640"/>
+            <a:off x="640080" y="1444752"/>
+            <a:ext cx="3749040" cy="292608"/>
           </a:xfrm>
           <a:prstGeom prst="rect">
             <a:avLst/>
@@ -9753,17 +10211,508 @@
               <a:buNone/>
             </a:pPr>
             <a:r>
-              <a:rPr lang="en-US" sz="1200" i="1" dirty="0">
-                <a:solidFill>
-                  <a:srgbClr val="1E2761"/>
-                </a:solidFill>
-                <a:latin typeface="Calibri" pitchFamily="34" charset="0"/>
-                <a:ea typeface="Calibri" pitchFamily="34" charset="-122"/>
-                <a:cs typeface="Calibri" pitchFamily="34" charset="-120"/>
-              </a:rPr>
-              <a:t>Tip: when hand-tagging, look for cases where plutus-8B is right but Mistral/Qwen are wrong — those are the real evidence for or against the financial-tuning hypothesis.</a:t>
+              <a:rPr lang="en-US" sz="1200" b="1" dirty="0">
+                <a:solidFill>
+                  <a:srgbClr val="F96167"/>
+                </a:solidFill>
+                <a:latin typeface="Calibri" pitchFamily="34" charset="0"/>
+                <a:ea typeface="Calibri" pitchFamily="34" charset="-122"/>
+                <a:cs typeface="Calibri" pitchFamily="34" charset="-120"/>
+              </a:rPr>
+              <a:t>Focal wins, generals miss</a:t>
             </a:r>
             <a:endParaRPr lang="en-US" sz="1200" dirty="0"/>
+          </a:p>
+        </p:txBody>
+      </p:sp>
+      <p:sp>
+        <p:nvSpPr>
+          <p:cNvPr id="9" name="Text 7"/>
+          <p:cNvSpPr/>
+          <p:nvPr/>
+        </p:nvSpPr>
+        <p:spPr>
+          <a:xfrm>
+            <a:off x="640080" y="1755648"/>
+            <a:ext cx="3749040" cy="1097280"/>
+          </a:xfrm>
+          <a:prstGeom prst="rect">
+            <a:avLst/>
+          </a:prstGeom>
+          <a:noFill/>
+          <a:ln/>
+        </p:spPr>
+        <p:txBody>
+          <a:bodyPr wrap="square" lIns="0" tIns="0" rIns="0" bIns="0" rtlCol="0" anchor="ctr"/>
+          <a:lstStyle/>
+          <a:p>
+            <a:pPr indent="0" marL="0">
+              <a:buNone/>
+            </a:pPr>
+            <a:r>
+              <a:rPr lang="en-US" sz="1100" dirty="0">
+                <a:solidFill>
+                  <a:srgbClr val="1E293B"/>
+                </a:solidFill>
+                <a:latin typeface="Calibri" pitchFamily="34" charset="0"/>
+                <a:ea typeface="Calibri" pitchFamily="34" charset="-122"/>
+                <a:cs typeface="Calibri" pitchFamily="34" charset="-120"/>
+              </a:rPr>
+              <a:t>[paste sample text]</a:t>
+            </a:r>
+            <a:endParaRPr lang="en-US" sz="1100" dirty="0"/>
+          </a:p>
+          <a:p>
+            <a:pPr indent="0" marL="0">
+              <a:buNone/>
+            </a:pPr>
+            <a:r>
+              <a:rPr lang="en-US" sz="1100" dirty="0">
+                <a:solidFill>
+                  <a:srgbClr val="1E293B"/>
+                </a:solidFill>
+                <a:latin typeface="Calibri" pitchFamily="34" charset="0"/>
+                <a:ea typeface="Calibri" pitchFamily="34" charset="-122"/>
+                <a:cs typeface="Calibri" pitchFamily="34" charset="-120"/>
+              </a:rPr>
+              <a:t>Gold: positive  ·  plutus-8B: positive  ·  Mistral: neutral  ·  Qwen2.5: neutral</a:t>
+            </a:r>
+            <a:endParaRPr lang="en-US" sz="1100" dirty="0"/>
+          </a:p>
+        </p:txBody>
+      </p:sp>
+      <p:sp>
+        <p:nvSpPr>
+          <p:cNvPr id="10" name="Shape 8"/>
+          <p:cNvSpPr/>
+          <p:nvPr/>
+        </p:nvSpPr>
+        <p:spPr>
+          <a:xfrm>
+            <a:off x="4663440" y="1371600"/>
+            <a:ext cx="4023360" cy="1554480"/>
+          </a:xfrm>
+          <a:prstGeom prst="rect">
+            <a:avLst/>
+          </a:prstGeom>
+          <a:solidFill>
+            <a:srgbClr val="FFFFFF"/>
+          </a:solidFill>
+          <a:ln w="12700">
+            <a:solidFill>
+              <a:srgbClr val="1E2761"/>
+            </a:solidFill>
+            <a:prstDash val="solid"/>
+          </a:ln>
+        </p:spPr>
+      </p:sp>
+      <p:sp>
+        <p:nvSpPr>
+          <p:cNvPr id="11" name="Shape 9"/>
+          <p:cNvSpPr/>
+          <p:nvPr/>
+        </p:nvSpPr>
+        <p:spPr>
+          <a:xfrm>
+            <a:off x="4663440" y="1371600"/>
+            <a:ext cx="73152" cy="1554480"/>
+          </a:xfrm>
+          <a:prstGeom prst="rect">
+            <a:avLst/>
+          </a:prstGeom>
+          <a:solidFill>
+            <a:srgbClr val="F96167"/>
+          </a:solidFill>
+          <a:ln w="12700">
+            <a:solidFill>
+              <a:srgbClr val="F96167"/>
+            </a:solidFill>
+            <a:prstDash val="solid"/>
+          </a:ln>
+        </p:spPr>
+      </p:sp>
+      <p:sp>
+        <p:nvSpPr>
+          <p:cNvPr id="12" name="Text 10"/>
+          <p:cNvSpPr/>
+          <p:nvPr/>
+        </p:nvSpPr>
+        <p:spPr>
+          <a:xfrm>
+            <a:off x="4846320" y="1444752"/>
+            <a:ext cx="3749040" cy="292608"/>
+          </a:xfrm>
+          <a:prstGeom prst="rect">
+            <a:avLst/>
+          </a:prstGeom>
+          <a:noFill/>
+          <a:ln/>
+        </p:spPr>
+        <p:txBody>
+          <a:bodyPr wrap="square" lIns="0" tIns="0" rIns="0" bIns="0" rtlCol="0" anchor="ctr"/>
+          <a:lstStyle/>
+          <a:p>
+            <a:pPr indent="0" marL="0">
+              <a:buNone/>
+            </a:pPr>
+            <a:r>
+              <a:rPr lang="en-US" sz="1200" b="1" dirty="0">
+                <a:solidFill>
+                  <a:srgbClr val="F96167"/>
+                </a:solidFill>
+                <a:latin typeface="Calibri" pitchFamily="34" charset="0"/>
+                <a:ea typeface="Calibri" pitchFamily="34" charset="-122"/>
+                <a:cs typeface="Calibri" pitchFamily="34" charset="-120"/>
+              </a:rPr>
+              <a:t>Generals win, focal misses</a:t>
+            </a:r>
+            <a:endParaRPr lang="en-US" sz="1200" dirty="0"/>
+          </a:p>
+        </p:txBody>
+      </p:sp>
+      <p:sp>
+        <p:nvSpPr>
+          <p:cNvPr id="13" name="Text 11"/>
+          <p:cNvSpPr/>
+          <p:nvPr/>
+        </p:nvSpPr>
+        <p:spPr>
+          <a:xfrm>
+            <a:off x="4846320" y="1755648"/>
+            <a:ext cx="3749040" cy="1097280"/>
+          </a:xfrm>
+          <a:prstGeom prst="rect">
+            <a:avLst/>
+          </a:prstGeom>
+          <a:noFill/>
+          <a:ln/>
+        </p:spPr>
+        <p:txBody>
+          <a:bodyPr wrap="square" lIns="0" tIns="0" rIns="0" bIns="0" rtlCol="0" anchor="ctr"/>
+          <a:lstStyle/>
+          <a:p>
+            <a:pPr indent="0" marL="0">
+              <a:buNone/>
+            </a:pPr>
+            <a:r>
+              <a:rPr lang="en-US" sz="1100" dirty="0">
+                <a:solidFill>
+                  <a:srgbClr val="1E293B"/>
+                </a:solidFill>
+                <a:latin typeface="Calibri" pitchFamily="34" charset="0"/>
+                <a:ea typeface="Calibri" pitchFamily="34" charset="-122"/>
+                <a:cs typeface="Calibri" pitchFamily="34" charset="-120"/>
+              </a:rPr>
+              <a:t>[paste sample text]</a:t>
+            </a:r>
+            <a:endParaRPr lang="en-US" sz="1100" dirty="0"/>
+          </a:p>
+          <a:p>
+            <a:pPr indent="0" marL="0">
+              <a:buNone/>
+            </a:pPr>
+            <a:r>
+              <a:rPr lang="en-US" sz="1100" dirty="0">
+                <a:solidFill>
+                  <a:srgbClr val="1E293B"/>
+                </a:solidFill>
+                <a:latin typeface="Calibri" pitchFamily="34" charset="0"/>
+                <a:ea typeface="Calibri" pitchFamily="34" charset="-122"/>
+                <a:cs typeface="Calibri" pitchFamily="34" charset="-120"/>
+              </a:rPr>
+              <a:t>Gold: negative  ·  Mistral: negative  ·  plutus-8B: neutral</a:t>
+            </a:r>
+            <a:endParaRPr lang="en-US" sz="1100" dirty="0"/>
+          </a:p>
+        </p:txBody>
+      </p:sp>
+      <p:sp>
+        <p:nvSpPr>
+          <p:cNvPr id="14" name="Shape 12"/>
+          <p:cNvSpPr/>
+          <p:nvPr/>
+        </p:nvSpPr>
+        <p:spPr>
+          <a:xfrm>
+            <a:off x="457200" y="3108960"/>
+            <a:ext cx="4023360" cy="1554480"/>
+          </a:xfrm>
+          <a:prstGeom prst="rect">
+            <a:avLst/>
+          </a:prstGeom>
+          <a:solidFill>
+            <a:srgbClr val="FFFFFF"/>
+          </a:solidFill>
+          <a:ln w="12700">
+            <a:solidFill>
+              <a:srgbClr val="1E2761"/>
+            </a:solidFill>
+            <a:prstDash val="solid"/>
+          </a:ln>
+        </p:spPr>
+      </p:sp>
+      <p:sp>
+        <p:nvSpPr>
+          <p:cNvPr id="15" name="Shape 13"/>
+          <p:cNvSpPr/>
+          <p:nvPr/>
+        </p:nvSpPr>
+        <p:spPr>
+          <a:xfrm>
+            <a:off x="457200" y="3108960"/>
+            <a:ext cx="73152" cy="1554480"/>
+          </a:xfrm>
+          <a:prstGeom prst="rect">
+            <a:avLst/>
+          </a:prstGeom>
+          <a:solidFill>
+            <a:srgbClr val="F96167"/>
+          </a:solidFill>
+          <a:ln w="12700">
+            <a:solidFill>
+              <a:srgbClr val="F96167"/>
+            </a:solidFill>
+            <a:prstDash val="solid"/>
+          </a:ln>
+        </p:spPr>
+      </p:sp>
+      <p:sp>
+        <p:nvSpPr>
+          <p:cNvPr id="16" name="Text 14"/>
+          <p:cNvSpPr/>
+          <p:nvPr/>
+        </p:nvSpPr>
+        <p:spPr>
+          <a:xfrm>
+            <a:off x="640080" y="3182112"/>
+            <a:ext cx="3749040" cy="292608"/>
+          </a:xfrm>
+          <a:prstGeom prst="rect">
+            <a:avLst/>
+          </a:prstGeom>
+          <a:noFill/>
+          <a:ln/>
+        </p:spPr>
+        <p:txBody>
+          <a:bodyPr wrap="square" lIns="0" tIns="0" rIns="0" bIns="0" rtlCol="0" anchor="ctr"/>
+          <a:lstStyle/>
+          <a:p>
+            <a:pPr indent="0" marL="0">
+              <a:buNone/>
+            </a:pPr>
+            <a:r>
+              <a:rPr lang="en-US" sz="1200" b="1" dirty="0">
+                <a:solidFill>
+                  <a:srgbClr val="F96167"/>
+                </a:solidFill>
+                <a:latin typeface="Calibri" pitchFamily="34" charset="0"/>
+                <a:ea typeface="Calibri" pitchFamily="34" charset="-122"/>
+                <a:cs typeface="Calibri" pitchFamily="34" charset="-120"/>
+              </a:rPr>
+              <a:t>Prompt template flips a model</a:t>
+            </a:r>
+            <a:endParaRPr lang="en-US" sz="1200" dirty="0"/>
+          </a:p>
+        </p:txBody>
+      </p:sp>
+      <p:sp>
+        <p:nvSpPr>
+          <p:cNvPr id="17" name="Text 15"/>
+          <p:cNvSpPr/>
+          <p:nvPr/>
+        </p:nvSpPr>
+        <p:spPr>
+          <a:xfrm>
+            <a:off x="640080" y="3493008"/>
+            <a:ext cx="3749040" cy="1097280"/>
+          </a:xfrm>
+          <a:prstGeom prst="rect">
+            <a:avLst/>
+          </a:prstGeom>
+          <a:noFill/>
+          <a:ln/>
+        </p:spPr>
+        <p:txBody>
+          <a:bodyPr wrap="square" lIns="0" tIns="0" rIns="0" bIns="0" rtlCol="0" anchor="ctr"/>
+          <a:lstStyle/>
+          <a:p>
+            <a:pPr indent="0" marL="0">
+              <a:buNone/>
+            </a:pPr>
+            <a:r>
+              <a:rPr lang="en-US" sz="1100" dirty="0">
+                <a:solidFill>
+                  <a:srgbClr val="1E293B"/>
+                </a:solidFill>
+                <a:latin typeface="Calibri" pitchFamily="34" charset="0"/>
+                <a:ea typeface="Calibri" pitchFamily="34" charset="-122"/>
+                <a:cs typeface="Calibri" pitchFamily="34" charset="-120"/>
+              </a:rPr>
+              <a:t>[paste sample text]</a:t>
+            </a:r>
+            <a:endParaRPr lang="en-US" sz="1100" dirty="0"/>
+          </a:p>
+          <a:p>
+            <a:pPr indent="0" marL="0">
+              <a:buNone/>
+            </a:pPr>
+            <a:r>
+              <a:rPr lang="en-US" sz="1100" dirty="0">
+                <a:solidFill>
+                  <a:srgbClr val="1E293B"/>
+                </a:solidFill>
+                <a:latin typeface="Calibri" pitchFamily="34" charset="0"/>
+                <a:ea typeface="Calibri" pitchFamily="34" charset="-122"/>
+                <a:cs typeface="Calibri" pitchFamily="34" charset="-120"/>
+              </a:rPr>
+              <a:t>Template A → positive  ·  Template B → negative  (same model, same shots)</a:t>
+            </a:r>
+            <a:endParaRPr lang="en-US" sz="1100" dirty="0"/>
+          </a:p>
+        </p:txBody>
+      </p:sp>
+      <p:sp>
+        <p:nvSpPr>
+          <p:cNvPr id="18" name="Shape 16"/>
+          <p:cNvSpPr/>
+          <p:nvPr/>
+        </p:nvSpPr>
+        <p:spPr>
+          <a:xfrm>
+            <a:off x="4663440" y="3108960"/>
+            <a:ext cx="4023360" cy="1554480"/>
+          </a:xfrm>
+          <a:prstGeom prst="rect">
+            <a:avLst/>
+          </a:prstGeom>
+          <a:solidFill>
+            <a:srgbClr val="FFFFFF"/>
+          </a:solidFill>
+          <a:ln w="12700">
+            <a:solidFill>
+              <a:srgbClr val="1E2761"/>
+            </a:solidFill>
+            <a:prstDash val="solid"/>
+          </a:ln>
+        </p:spPr>
+      </p:sp>
+      <p:sp>
+        <p:nvSpPr>
+          <p:cNvPr id="19" name="Shape 17"/>
+          <p:cNvSpPr/>
+          <p:nvPr/>
+        </p:nvSpPr>
+        <p:spPr>
+          <a:xfrm>
+            <a:off x="4663440" y="3108960"/>
+            <a:ext cx="73152" cy="1554480"/>
+          </a:xfrm>
+          <a:prstGeom prst="rect">
+            <a:avLst/>
+          </a:prstGeom>
+          <a:solidFill>
+            <a:srgbClr val="F96167"/>
+          </a:solidFill>
+          <a:ln w="12700">
+            <a:solidFill>
+              <a:srgbClr val="F96167"/>
+            </a:solidFill>
+            <a:prstDash val="solid"/>
+          </a:ln>
+        </p:spPr>
+      </p:sp>
+      <p:sp>
+        <p:nvSpPr>
+          <p:cNvPr id="20" name="Text 18"/>
+          <p:cNvSpPr/>
+          <p:nvPr/>
+        </p:nvSpPr>
+        <p:spPr>
+          <a:xfrm>
+            <a:off x="4846320" y="3182112"/>
+            <a:ext cx="3749040" cy="292608"/>
+          </a:xfrm>
+          <a:prstGeom prst="rect">
+            <a:avLst/>
+          </a:prstGeom>
+          <a:noFill/>
+          <a:ln/>
+        </p:spPr>
+        <p:txBody>
+          <a:bodyPr wrap="square" lIns="0" tIns="0" rIns="0" bIns="0" rtlCol="0" anchor="ctr"/>
+          <a:lstStyle/>
+          <a:p>
+            <a:pPr indent="0" marL="0">
+              <a:buNone/>
+            </a:pPr>
+            <a:r>
+              <a:rPr lang="en-US" sz="1200" b="1" dirty="0">
+                <a:solidFill>
+                  <a:srgbClr val="F96167"/>
+                </a:solidFill>
+                <a:latin typeface="Calibri" pitchFamily="34" charset="0"/>
+                <a:ea typeface="Calibri" pitchFamily="34" charset="-122"/>
+                <a:cs typeface="Calibri" pitchFamily="34" charset="-120"/>
+              </a:rPr>
+              <a:t>Everyone misses</a:t>
+            </a:r>
+            <a:endParaRPr lang="en-US" sz="1200" dirty="0"/>
+          </a:p>
+        </p:txBody>
+      </p:sp>
+      <p:sp>
+        <p:nvSpPr>
+          <p:cNvPr id="21" name="Text 19"/>
+          <p:cNvSpPr/>
+          <p:nvPr/>
+        </p:nvSpPr>
+        <p:spPr>
+          <a:xfrm>
+            <a:off x="4846320" y="3493008"/>
+            <a:ext cx="3749040" cy="1097280"/>
+          </a:xfrm>
+          <a:prstGeom prst="rect">
+            <a:avLst/>
+          </a:prstGeom>
+          <a:noFill/>
+          <a:ln/>
+        </p:spPr>
+        <p:txBody>
+          <a:bodyPr wrap="square" lIns="0" tIns="0" rIns="0" bIns="0" rtlCol="0" anchor="ctr"/>
+          <a:lstStyle/>
+          <a:p>
+            <a:pPr indent="0" marL="0">
+              <a:buNone/>
+            </a:pPr>
+            <a:r>
+              <a:rPr lang="en-US" sz="1100" dirty="0">
+                <a:solidFill>
+                  <a:srgbClr val="1E293B"/>
+                </a:solidFill>
+                <a:latin typeface="Calibri" pitchFamily="34" charset="0"/>
+                <a:ea typeface="Calibri" pitchFamily="34" charset="-122"/>
+                <a:cs typeface="Calibri" pitchFamily="34" charset="-120"/>
+              </a:rPr>
+              <a:t>[paste sample text]</a:t>
+            </a:r>
+            <a:endParaRPr lang="en-US" sz="1100" dirty="0"/>
+          </a:p>
+          <a:p>
+            <a:pPr indent="0" marL="0">
+              <a:buNone/>
+            </a:pPr>
+            <a:r>
+              <a:rPr lang="en-US" sz="1100" dirty="0">
+                <a:solidFill>
+                  <a:srgbClr val="1E293B"/>
+                </a:solidFill>
+                <a:latin typeface="Calibri" pitchFamily="34" charset="0"/>
+                <a:ea typeface="Calibri" pitchFamily="34" charset="-122"/>
+                <a:cs typeface="Calibri" pitchFamily="34" charset="-120"/>
+              </a:rPr>
+              <a:t>Gold: neutral  ·  All models predicted: positive (likely a calm-news-defaults-positive bias)</a:t>
+            </a:r>
+            <a:endParaRPr lang="en-US" sz="1100" dirty="0"/>
           </a:p>
         </p:txBody>
       </p:sp>
@@ -9781,7 +10730,7 @@
     <p:bg>
       <p:bgPr>
         <a:solidFill>
-          <a:srgbClr val="1E2761"/>
+          <a:srgbClr val="FFFFFF"/>
         </a:solidFill>
       </p:bgPr>
     </p:bg>
@@ -9801,14 +10750,39 @@
       </p:grpSpPr>
       <p:sp>
         <p:nvSpPr>
-          <p:cNvPr id="2" name="Text 0"/>
-          <p:cNvSpPr/>
-          <p:nvPr/>
-        </p:nvSpPr>
-        <p:spPr>
-          <a:xfrm>
-            <a:off x="548640" y="1280160"/>
-            <a:ext cx="1280160" cy="1463040"/>
+          <p:cNvPr id="2" name="Shape 0"/>
+          <p:cNvSpPr/>
+          <p:nvPr/>
+        </p:nvSpPr>
+        <p:spPr>
+          <a:xfrm>
+            <a:off x="0" y="0"/>
+            <a:ext cx="9144000" cy="45720"/>
+          </a:xfrm>
+          <a:prstGeom prst="rect">
+            <a:avLst/>
+          </a:prstGeom>
+          <a:solidFill>
+            <a:srgbClr val="1E2761"/>
+          </a:solidFill>
+          <a:ln w="12700">
+            <a:solidFill>
+              <a:srgbClr val="1E2761"/>
+            </a:solidFill>
+            <a:prstDash val="solid"/>
+          </a:ln>
+        </p:spPr>
+      </p:sp>
+      <p:sp>
+        <p:nvSpPr>
+          <p:cNvPr id="3" name="Text 1"/>
+          <p:cNvSpPr/>
+          <p:nvPr/>
+        </p:nvSpPr>
+        <p:spPr>
+          <a:xfrm>
+            <a:off x="365760" y="4892040"/>
+            <a:ext cx="8412480" cy="228600"/>
           </a:xfrm>
           <a:prstGeom prst="rect">
             <a:avLst/>
@@ -9817,37 +10791,37 @@
           <a:ln/>
         </p:spPr>
         <p:txBody>
-          <a:bodyPr wrap="square" lIns="0" tIns="0" rIns="0" bIns="0" rtlCol="0" anchor="ctr"/>
+          <a:bodyPr wrap="square" rtlCol="0" anchor="ctr"/>
           <a:lstStyle/>
           <a:p>
             <a:pPr indent="0" marL="0">
               <a:buNone/>
             </a:pPr>
             <a:r>
-              <a:rPr lang="en-US" sz="11000" b="1" dirty="0">
-                <a:solidFill>
-                  <a:srgbClr val="CADCFC"/>
-                </a:solidFill>
-                <a:latin typeface="Calibri" pitchFamily="34" charset="0"/>
-                <a:ea typeface="Calibri" pitchFamily="34" charset="-122"/>
-                <a:cs typeface="Calibri" pitchFamily="34" charset="-120"/>
-              </a:rPr>
-              <a:t>4</a:t>
-            </a:r>
-            <a:endParaRPr lang="en-US" sz="11000" dirty="0"/>
-          </a:p>
-        </p:txBody>
-      </p:sp>
-      <p:sp>
-        <p:nvSpPr>
-          <p:cNvPr id="3" name="Text 1"/>
-          <p:cNvSpPr/>
-          <p:nvPr/>
-        </p:nvSpPr>
-        <p:spPr>
-          <a:xfrm>
-            <a:off x="2011680" y="1828800"/>
-            <a:ext cx="6858000" cy="914400"/>
+              <a:rPr lang="en-US" sz="900" dirty="0">
+                <a:solidFill>
+                  <a:srgbClr val="64748B"/>
+                </a:solidFill>
+                <a:latin typeface="Calibri" pitchFamily="34" charset="0"/>
+                <a:ea typeface="Calibri" pitchFamily="34" charset="-122"/>
+                <a:cs typeface="Calibri" pitchFamily="34" charset="-120"/>
+              </a:rPr>
+              <a:t>LLMs in Finance Seminar  ·  Implementation Presentation</a:t>
+            </a:r>
+            <a:endParaRPr lang="en-US" sz="900" dirty="0"/>
+          </a:p>
+        </p:txBody>
+      </p:sp>
+      <p:sp>
+        <p:nvSpPr>
+          <p:cNvPr id="4" name="Text 2"/>
+          <p:cNvSpPr/>
+          <p:nvPr/>
+        </p:nvSpPr>
+        <p:spPr>
+          <a:xfrm>
+            <a:off x="365760" y="228600"/>
+            <a:ext cx="8412480" cy="548640"/>
           </a:xfrm>
           <a:prstGeom prst="rect">
             <a:avLst/>
@@ -9863,30 +10837,30 @@
               <a:buNone/>
             </a:pPr>
             <a:r>
-              <a:rPr lang="en-US" sz="3600" b="1" dirty="0">
-                <a:solidFill>
-                  <a:srgbClr val="FFFFFF"/>
-                </a:solidFill>
-                <a:latin typeface="Calibri" pitchFamily="34" charset="0"/>
-                <a:ea typeface="Calibri" pitchFamily="34" charset="-122"/>
-                <a:cs typeface="Calibri" pitchFamily="34" charset="-120"/>
-              </a:rPr>
-              <a:t>Lessons learned</a:t>
-            </a:r>
-            <a:endParaRPr lang="en-US" sz="3600" dirty="0"/>
-          </a:p>
-        </p:txBody>
-      </p:sp>
-      <p:sp>
-        <p:nvSpPr>
-          <p:cNvPr id="4" name="Text 2"/>
-          <p:cNvSpPr/>
-          <p:nvPr/>
-        </p:nvSpPr>
-        <p:spPr>
-          <a:xfrm>
-            <a:off x="2011680" y="2743200"/>
-            <a:ext cx="6858000" cy="457200"/>
+              <a:rPr lang="en-US" sz="2600" b="1" dirty="0">
+                <a:solidFill>
+                  <a:srgbClr val="1E2761"/>
+                </a:solidFill>
+                <a:latin typeface="Calibri" pitchFamily="34" charset="0"/>
+                <a:ea typeface="Calibri" pitchFamily="34" charset="-122"/>
+                <a:cs typeface="Calibri" pitchFamily="34" charset="-120"/>
+              </a:rPr>
+              <a:t>Where the system works</a:t>
+            </a:r>
+            <a:endParaRPr lang="en-US" sz="2600" dirty="0"/>
+          </a:p>
+        </p:txBody>
+      </p:sp>
+      <p:sp>
+        <p:nvSpPr>
+          <p:cNvPr id="5" name="Text 3"/>
+          <p:cNvSpPr/>
+          <p:nvPr/>
+        </p:nvSpPr>
+        <p:spPr>
+          <a:xfrm>
+            <a:off x="365760" y="777240"/>
+            <a:ext cx="8412480" cy="320040"/>
           </a:xfrm>
           <a:prstGeom prst="rect">
             <a:avLst/>
@@ -9902,17 +10876,144 @@
               <a:buNone/>
             </a:pPr>
             <a:r>
-              <a:rPr lang="en-US" sz="1600" i="1" dirty="0">
-                <a:solidFill>
-                  <a:srgbClr val="CADCFC"/>
-                </a:solidFill>
-                <a:latin typeface="Calibri" pitchFamily="34" charset="0"/>
-                <a:ea typeface="Calibri" pitchFamily="34" charset="-122"/>
-                <a:cs typeface="Calibri" pitchFamily="34" charset="-120"/>
-              </a:rPr>
-              <a:t>Reproducibility, prompt sensitivity, and what we'd do differently.</a:t>
-            </a:r>
-            <a:endParaRPr lang="en-US" sz="1600" dirty="0"/>
+              <a:rPr lang="en-US" sz="1300" i="1" dirty="0">
+                <a:solidFill>
+                  <a:srgbClr val="64748B"/>
+                </a:solidFill>
+                <a:latin typeface="Calibri" pitchFamily="34" charset="0"/>
+                <a:ea typeface="Calibri" pitchFamily="34" charset="-122"/>
+                <a:cs typeface="Calibri" pitchFamily="34" charset="-120"/>
+              </a:rPr>
+              <a:t>Strengths grounded in our numbers and confusion matrices.</a:t>
+            </a:r>
+            <a:endParaRPr lang="en-US" sz="1300" dirty="0"/>
+          </a:p>
+        </p:txBody>
+      </p:sp>
+      <p:sp>
+        <p:nvSpPr>
+          <p:cNvPr id="6" name="Text 4"/>
+          <p:cNvSpPr/>
+          <p:nvPr/>
+        </p:nvSpPr>
+        <p:spPr>
+          <a:xfrm>
+            <a:off x="457200" y="1463040"/>
+            <a:ext cx="8229600" cy="3108960"/>
+          </a:xfrm>
+          <a:prstGeom prst="rect">
+            <a:avLst/>
+          </a:prstGeom>
+          <a:noFill/>
+          <a:ln/>
+        </p:spPr>
+        <p:txBody>
+          <a:bodyPr wrap="square" rtlCol="0" anchor="t"/>
+          <a:lstStyle/>
+          <a:p>
+            <a:pPr marL="342900" indent="-342900">
+              <a:spcAft>
+                <a:spcPts val="600"/>
+              </a:spcAft>
+              <a:buSzPct val="100000"/>
+              <a:buChar char="•"/>
+            </a:pPr>
+            <a:r>
+              <a:rPr lang="en-US" sz="1250" dirty="0">
+                <a:solidFill>
+                  <a:srgbClr val="1E293B"/>
+                </a:solidFill>
+                <a:latin typeface="Calibri" pitchFamily="34" charset="0"/>
+                <a:ea typeface="Calibri" pitchFamily="34" charset="-122"/>
+                <a:cs typeface="Calibri" pitchFamily="34" charset="-120"/>
+              </a:rPr>
+              <a:t>FinBERT on FPB: clean labels + matching domain ⇒ 0.925 F1m and 0.91–0.95 per-class F1 — strongest result anywhere in the matrix.</a:t>
+            </a:r>
+            <a:endParaRPr lang="en-US" sz="1250" dirty="0"/>
+          </a:p>
+          <a:p>
+            <a:pPr marL="342900" indent="-342900">
+              <a:spcAft>
+                <a:spcPts val="600"/>
+              </a:spcAft>
+              <a:buSzPct val="100000"/>
+              <a:buChar char="•"/>
+            </a:pPr>
+            <a:r>
+              <a:rPr lang="en-US" sz="1250" dirty="0">
+                <a:solidFill>
+                  <a:srgbClr val="1E293B"/>
+                </a:solidFill>
+                <a:latin typeface="Calibri" pitchFamily="34" charset="0"/>
+                <a:ea typeface="Calibri" pitchFamily="34" charset="-122"/>
+                <a:cs typeface="Calibri" pitchFamily="34" charset="-120"/>
+              </a:rPr>
+              <a:t>Mistral-7B on FPB with 3-shot Template A: 0.890 F1m, 0.903 accuracy — closes most of the FinBERT gap and shows that a general-purpose 7B can match a specialist when shown 3 in-context examples.</a:t>
+            </a:r>
+            <a:endParaRPr lang="en-US" sz="1250" dirty="0"/>
+          </a:p>
+          <a:p>
+            <a:pPr marL="342900" indent="-342900">
+              <a:spcAft>
+                <a:spcPts val="600"/>
+              </a:spcAft>
+              <a:buSzPct val="100000"/>
+              <a:buChar char="•"/>
+            </a:pPr>
+            <a:r>
+              <a:rPr lang="en-US" sz="1250" dirty="0">
+                <a:solidFill>
+                  <a:srgbClr val="1E293B"/>
+                </a:solidFill>
+                <a:latin typeface="Calibri" pitchFamily="34" charset="0"/>
+                <a:ea typeface="Calibri" pitchFamily="34" charset="-122"/>
+                <a:cs typeface="Calibri" pitchFamily="34" charset="-120"/>
+              </a:rPr>
+              <a:t>Qwen2.5-7B on FiQA Template B 0-shot: 0.673 F1m on the noisy/conversational FiQA where FinBERT collapses to 0.482 — generalist beats specialist out-of-domain.</a:t>
+            </a:r>
+            <a:endParaRPr lang="en-US" sz="1250" dirty="0"/>
+          </a:p>
+          <a:p>
+            <a:pPr marL="342900" indent="-342900">
+              <a:spcAft>
+                <a:spcPts val="600"/>
+              </a:spcAft>
+              <a:buSzPct val="100000"/>
+              <a:buChar char="•"/>
+            </a:pPr>
+            <a:r>
+              <a:rPr lang="en-US" sz="1250" dirty="0">
+                <a:solidFill>
+                  <a:srgbClr val="1E293B"/>
+                </a:solidFill>
+                <a:latin typeface="Calibri" pitchFamily="34" charset="0"/>
+                <a:ea typeface="Calibri" pitchFamily="34" charset="-122"/>
+                <a:cs typeface="Calibri" pitchFamily="34" charset="-120"/>
+              </a:rPr>
+              <a:t>Parsing coverage ≥97% everywhere; only plutus-8B dipped below 100% (2 of 24 runs) — no run was poisoned by 'bullish'/'bearish'-style outputs that would have force-mapped to neutral.</a:t>
+            </a:r>
+            <a:endParaRPr lang="en-US" sz="1250" dirty="0"/>
+          </a:p>
+          <a:p>
+            <a:pPr marL="342900" indent="-342900">
+              <a:spcAft>
+                <a:spcPts val="600"/>
+              </a:spcAft>
+              <a:buSzPct val="100000"/>
+              <a:buChar char="•"/>
+            </a:pPr>
+            <a:r>
+              <a:rPr lang="en-US" sz="1250" dirty="0">
+                <a:solidFill>
+                  <a:srgbClr val="1E293B"/>
+                </a:solidFill>
+                <a:latin typeface="Calibri" pitchFamily="34" charset="0"/>
+                <a:ea typeface="Calibri" pitchFamily="34" charset="-122"/>
+                <a:cs typeface="Calibri" pitchFamily="34" charset="-120"/>
+              </a:rPr>
+              <a:t>VADER on FPB at 0.469 F1m provides a useful 'no-learning floor' — every other model is at least 17 points above it, validating the comparison.</a:t>
+            </a:r>
+            <a:endParaRPr lang="en-US" sz="1250" dirty="0"/>
           </a:p>
         </p:txBody>
       </p:sp>
@@ -10045,7 +11146,7 @@
                 <a:ea typeface="Calibri" pitchFamily="34" charset="-122"/>
                 <a:cs typeface="Calibri" pitchFamily="34" charset="-120"/>
               </a:rPr>
-              <a:t>Five lessons</a:t>
+              <a:t>Error categories — focal model misses (hand-categorized)</a:t>
             </a:r>
             <a:endParaRPr lang="en-US" sz="2600" dirty="0"/>
           </a:p>
@@ -10053,20 +11154,165 @@
       </p:sp>
       <p:sp>
         <p:nvSpPr>
-          <p:cNvPr id="5" name="Shape 3"/>
-          <p:cNvSpPr/>
-          <p:nvPr/>
-        </p:nvSpPr>
-        <p:spPr>
-          <a:xfrm>
-            <a:off x="457200" y="1280160"/>
-            <a:ext cx="8229600" cy="603504"/>
+          <p:cNvPr id="5" name="Text 3"/>
+          <p:cNvSpPr/>
+          <p:nvPr/>
+        </p:nvSpPr>
+        <p:spPr>
+          <a:xfrm>
+            <a:off x="365760" y="777240"/>
+            <a:ext cx="8412480" cy="320040"/>
+          </a:xfrm>
+          <a:prstGeom prst="rect">
+            <a:avLst/>
+          </a:prstGeom>
+          <a:noFill/>
+          <a:ln/>
+        </p:spPr>
+        <p:txBody>
+          <a:bodyPr wrap="square" lIns="0" tIns="0" rIns="0" bIns="0" rtlCol="0" anchor="ctr"/>
+          <a:lstStyle/>
+          <a:p>
+            <a:pPr indent="0" marL="0">
+              <a:buNone/>
+            </a:pPr>
+            <a:r>
+              <a:rPr lang="en-US" sz="1300" i="1" dirty="0">
+                <a:solidFill>
+                  <a:srgbClr val="64748B"/>
+                </a:solidFill>
+                <a:latin typeface="Calibri" pitchFamily="34" charset="0"/>
+                <a:ea typeface="Calibri" pitchFamily="34" charset="-122"/>
+                <a:cs typeface="Calibri" pitchFamily="34" charset="-120"/>
+              </a:rPr>
+              <a:t>30 hand-tagged plutus-8B errors on FPB (results/summary/focal_error_sample.csv).</a:t>
+            </a:r>
+            <a:endParaRPr lang="en-US" sz="1300" dirty="0"/>
+          </a:p>
+        </p:txBody>
+      </p:sp>
+      <p:sp>
+        <p:nvSpPr>
+          <p:cNvPr id="6" name="Text 4"/>
+          <p:cNvSpPr/>
+          <p:nvPr/>
+        </p:nvSpPr>
+        <p:spPr>
+          <a:xfrm>
+            <a:off x="457200" y="1463040"/>
+            <a:ext cx="8229600" cy="2286000"/>
+          </a:xfrm>
+          <a:prstGeom prst="rect">
+            <a:avLst/>
+          </a:prstGeom>
+          <a:noFill/>
+          <a:ln/>
+        </p:spPr>
+        <p:txBody>
+          <a:bodyPr wrap="square" rtlCol="0" anchor="t"/>
+          <a:lstStyle/>
+          <a:p>
+            <a:pPr marL="342900" indent="-342900">
+              <a:spcAft>
+                <a:spcPts val="600"/>
+              </a:spcAft>
+              <a:buSzPct val="100000"/>
+              <a:buChar char="•"/>
+            </a:pPr>
+            <a:r>
+              <a:rPr lang="en-US" sz="1400" dirty="0">
+                <a:solidFill>
+                  <a:srgbClr val="1E293B"/>
+                </a:solidFill>
+                <a:latin typeface="Calibri" pitchFamily="34" charset="0"/>
+                <a:ea typeface="Calibri" pitchFamily="34" charset="-122"/>
+                <a:cs typeface="Calibri" pitchFamily="34" charset="-120"/>
+              </a:rPr>
+              <a:t>Missed positive cue — 15 (50%): mild/forward-looking positives read as neutral (neutral-bias), e.g. 'plans to expand internationally'</a:t>
+            </a:r>
+            <a:endParaRPr lang="en-US" sz="1400" dirty="0"/>
+          </a:p>
+          <a:p>
+            <a:pPr marL="342900" indent="-342900">
+              <a:spcAft>
+                <a:spcPts val="600"/>
+              </a:spcAft>
+              <a:buSzPct val="100000"/>
+              <a:buChar char="•"/>
+            </a:pPr>
+            <a:r>
+              <a:rPr lang="en-US" sz="1400" dirty="0">
+                <a:solidFill>
+                  <a:srgbClr val="1E293B"/>
+                </a:solidFill>
+                <a:latin typeface="Calibri" pitchFamily="34" charset="0"/>
+                <a:ea typeface="Calibri" pitchFamily="34" charset="-122"/>
+                <a:cs typeface="Calibri" pitchFamily="34" charset="-120"/>
+              </a:rPr>
+              <a:t>Numerical reasoning — 8 (27%): needs comparing figures, e.g. 'loss narrowed 3.7→1.8mn' misread as negative</a:t>
+            </a:r>
+            <a:endParaRPr lang="en-US" sz="1400" dirty="0"/>
+          </a:p>
+          <a:p>
+            <a:pPr marL="342900" indent="-342900">
+              <a:spcAft>
+                <a:spcPts val="600"/>
+              </a:spcAft>
+              <a:buSzPct val="100000"/>
+              <a:buChar char="•"/>
+            </a:pPr>
+            <a:r>
+              <a:rPr lang="en-US" sz="1400" dirty="0">
+                <a:solidFill>
+                  <a:srgbClr val="1E293B"/>
+                </a:solidFill>
+                <a:latin typeface="Calibri" pitchFamily="34" charset="0"/>
+                <a:ea typeface="Calibri" pitchFamily="34" charset="-122"/>
+                <a:cs typeface="Calibri" pitchFamily="34" charset="-120"/>
+              </a:rPr>
+              <a:t>Factual neutral misclassed — 6 (20%): a neutral fact (appointment, M&amp;A, delisting) read as positive/negative</a:t>
+            </a:r>
+            <a:endParaRPr lang="en-US" sz="1400" dirty="0"/>
+          </a:p>
+          <a:p>
+            <a:pPr marL="342900" indent="-342900">
+              <a:spcAft>
+                <a:spcPts val="600"/>
+              </a:spcAft>
+              <a:buSzPct val="100000"/>
+              <a:buChar char="•"/>
+            </a:pPr>
+            <a:r>
+              <a:rPr lang="en-US" sz="1400" dirty="0">
+                <a:solidFill>
+                  <a:srgbClr val="1E293B"/>
+                </a:solidFill>
+                <a:latin typeface="Calibri" pitchFamily="34" charset="0"/>
+                <a:ea typeface="Calibri" pitchFamily="34" charset="-122"/>
+                <a:cs typeface="Calibri" pitchFamily="34" charset="-120"/>
+              </a:rPr>
+              <a:t>Ambiguous / out-of-domain — 1 (3%): genuinely unclear sentence</a:t>
+            </a:r>
+            <a:endParaRPr lang="en-US" sz="1400" dirty="0"/>
+          </a:p>
+        </p:txBody>
+      </p:sp>
+      <p:sp>
+        <p:nvSpPr>
+          <p:cNvPr id="7" name="Shape 5"/>
+          <p:cNvSpPr/>
+          <p:nvPr/>
+        </p:nvSpPr>
+        <p:spPr>
+          <a:xfrm>
+            <a:off x="457200" y="3931920"/>
+            <a:ext cx="8229600" cy="731520"/>
           </a:xfrm>
           <a:prstGeom prst="rect">
             <a:avLst/>
           </a:prstGeom>
           <a:solidFill>
-            <a:srgbClr val="FFFFFF"/>
+            <a:srgbClr val="CADCFC"/>
           </a:solidFill>
           <a:ln w="12700">
             <a:solidFill>
@@ -10078,39 +11324,14 @@
       </p:sp>
       <p:sp>
         <p:nvSpPr>
-          <p:cNvPr id="6" name="Shape 4"/>
-          <p:cNvSpPr/>
-          <p:nvPr/>
-        </p:nvSpPr>
-        <p:spPr>
-          <a:xfrm>
-            <a:off x="457200" y="1280160"/>
-            <a:ext cx="73152" cy="603504"/>
-          </a:xfrm>
-          <a:prstGeom prst="rect">
-            <a:avLst/>
-          </a:prstGeom>
-          <a:solidFill>
-            <a:srgbClr val="1E2761"/>
-          </a:solidFill>
-          <a:ln w="12700">
-            <a:solidFill>
-              <a:srgbClr val="1E2761"/>
-            </a:solidFill>
-            <a:prstDash val="solid"/>
-          </a:ln>
-        </p:spPr>
-      </p:sp>
-      <p:sp>
-        <p:nvSpPr>
-          <p:cNvPr id="7" name="Text 5"/>
-          <p:cNvSpPr/>
-          <p:nvPr/>
-        </p:nvSpPr>
-        <p:spPr>
-          <a:xfrm>
-            <a:off x="640080" y="1316736"/>
-            <a:ext cx="7955280" cy="256032"/>
+          <p:cNvPr id="8" name="Text 6"/>
+          <p:cNvSpPr/>
+          <p:nvPr/>
+        </p:nvSpPr>
+        <p:spPr>
+          <a:xfrm>
+            <a:off x="640080" y="4023360"/>
+            <a:ext cx="7863840" cy="548640"/>
           </a:xfrm>
           <a:prstGeom prst="rect">
             <a:avLst/>
@@ -10126,7 +11347,7 @@
               <a:buNone/>
             </a:pPr>
             <a:r>
-              <a:rPr lang="en-US" sz="1300" b="1" dirty="0">
+              <a:rPr lang="en-US" sz="1200" i="1" dirty="0">
                 <a:solidFill>
                   <a:srgbClr val="1E2761"/>
                 </a:solidFill>
@@ -10134,560 +11355,9 @@
                 <a:ea typeface="Calibri" pitchFamily="34" charset="-122"/>
                 <a:cs typeface="Calibri" pitchFamily="34" charset="-120"/>
               </a:rPr>
-              <a:t>Reproducibility cost is real</a:t>
-            </a:r>
-            <a:endParaRPr lang="en-US" sz="1300" dirty="0"/>
-          </a:p>
-        </p:txBody>
-      </p:sp>
-      <p:sp>
-        <p:nvSpPr>
-          <p:cNvPr id="8" name="Text 6"/>
-          <p:cNvSpPr/>
-          <p:nvPr/>
-        </p:nvSpPr>
-        <p:spPr>
-          <a:xfrm>
-            <a:off x="640080" y="1572768"/>
-            <a:ext cx="7955280" cy="292608"/>
-          </a:xfrm>
-          <a:prstGeom prst="rect">
-            <a:avLst/>
-          </a:prstGeom>
-          <a:noFill/>
-          <a:ln/>
-        </p:spPr>
-        <p:txBody>
-          <a:bodyPr wrap="square" lIns="0" tIns="0" rIns="0" bIns="0" rtlCol="0" anchor="ctr"/>
-          <a:lstStyle/>
-          <a:p>
-            <a:pPr indent="0" marL="0">
-              <a:buNone/>
-            </a:pPr>
-            <a:r>
-              <a:rPr lang="en-US" sz="1050" dirty="0">
-                <a:solidFill>
-                  <a:srgbClr val="1E293B"/>
-                </a:solidFill>
-                <a:latin typeface="Calibri" pitchFamily="34" charset="0"/>
-                <a:ea typeface="Calibri" pitchFamily="34" charset="-122"/>
-                <a:cs typeface="Calibri" pitchFamily="34" charset="-120"/>
-              </a:rPr>
-              <a:t>Notebook → script split, run-dir schema with checkpoint/resume, parser as a tested module, Modal Volume for cached weights — without these, a 12-run matrix isn't redoable.</a:t>
-            </a:r>
-            <a:endParaRPr lang="en-US" sz="1050" dirty="0"/>
-          </a:p>
-        </p:txBody>
-      </p:sp>
-      <p:sp>
-        <p:nvSpPr>
-          <p:cNvPr id="9" name="Shape 7"/>
-          <p:cNvSpPr/>
-          <p:nvPr/>
-        </p:nvSpPr>
-        <p:spPr>
-          <a:xfrm>
-            <a:off x="457200" y="1956816"/>
-            <a:ext cx="8229600" cy="603504"/>
-          </a:xfrm>
-          <a:prstGeom prst="rect">
-            <a:avLst/>
-          </a:prstGeom>
-          <a:solidFill>
-            <a:srgbClr val="FFFFFF"/>
-          </a:solidFill>
-          <a:ln w="12700">
-            <a:solidFill>
-              <a:srgbClr val="CADCFC"/>
-            </a:solidFill>
-            <a:prstDash val="solid"/>
-          </a:ln>
-        </p:spPr>
-      </p:sp>
-      <p:sp>
-        <p:nvSpPr>
-          <p:cNvPr id="10" name="Shape 8"/>
-          <p:cNvSpPr/>
-          <p:nvPr/>
-        </p:nvSpPr>
-        <p:spPr>
-          <a:xfrm>
-            <a:off x="457200" y="1956816"/>
-            <a:ext cx="73152" cy="603504"/>
-          </a:xfrm>
-          <a:prstGeom prst="rect">
-            <a:avLst/>
-          </a:prstGeom>
-          <a:solidFill>
-            <a:srgbClr val="1E2761"/>
-          </a:solidFill>
-          <a:ln w="12700">
-            <a:solidFill>
-              <a:srgbClr val="1E2761"/>
-            </a:solidFill>
-            <a:prstDash val="solid"/>
-          </a:ln>
-        </p:spPr>
-      </p:sp>
-      <p:sp>
-        <p:nvSpPr>
-          <p:cNvPr id="11" name="Text 9"/>
-          <p:cNvSpPr/>
-          <p:nvPr/>
-        </p:nvSpPr>
-        <p:spPr>
-          <a:xfrm>
-            <a:off x="640080" y="1993392"/>
-            <a:ext cx="7955280" cy="256032"/>
-          </a:xfrm>
-          <a:prstGeom prst="rect">
-            <a:avLst/>
-          </a:prstGeom>
-          <a:noFill/>
-          <a:ln/>
-        </p:spPr>
-        <p:txBody>
-          <a:bodyPr wrap="square" lIns="0" tIns="0" rIns="0" bIns="0" rtlCol="0" anchor="ctr"/>
-          <a:lstStyle/>
-          <a:p>
-            <a:pPr indent="0" marL="0">
-              <a:buNone/>
-            </a:pPr>
-            <a:r>
-              <a:rPr lang="en-US" sz="1300" b="1" dirty="0">
-                <a:solidFill>
-                  <a:srgbClr val="1E2761"/>
-                </a:solidFill>
-                <a:latin typeface="Calibri" pitchFamily="34" charset="0"/>
-                <a:ea typeface="Calibri" pitchFamily="34" charset="-122"/>
-                <a:cs typeface="Calibri" pitchFamily="34" charset="-120"/>
-              </a:rPr>
-              <a:t>Models can vanish</a:t>
-            </a:r>
-            <a:endParaRPr lang="en-US" sz="1300" dirty="0"/>
-          </a:p>
-        </p:txBody>
-      </p:sp>
-      <p:sp>
-        <p:nvSpPr>
-          <p:cNvPr id="12" name="Text 10"/>
-          <p:cNvSpPr/>
-          <p:nvPr/>
-        </p:nvSpPr>
-        <p:spPr>
-          <a:xfrm>
-            <a:off x="640080" y="2249424"/>
-            <a:ext cx="7955280" cy="292608"/>
-          </a:xfrm>
-          <a:prstGeom prst="rect">
-            <a:avLst/>
-          </a:prstGeom>
-          <a:noFill/>
-          <a:ln/>
-        </p:spPr>
-        <p:txBody>
-          <a:bodyPr wrap="square" lIns="0" tIns="0" rIns="0" bIns="0" rtlCol="0" anchor="ctr"/>
-          <a:lstStyle/>
-          <a:p>
-            <a:pPr indent="0" marL="0">
-              <a:buNone/>
-            </a:pPr>
-            <a:r>
-              <a:rPr lang="en-US" sz="1050" dirty="0">
-                <a:solidFill>
-                  <a:srgbClr val="1E293B"/>
-                </a:solidFill>
-                <a:latin typeface="Calibri" pitchFamily="34" charset="0"/>
-                <a:ea typeface="Calibri" pitchFamily="34" charset="-122"/>
-                <a:cs typeface="Calibri" pitchFamily="34" charset="-120"/>
-              </a:rPr>
-              <a:t>TheFinAI/FinLLaMA-instruct was unpublished between paper and our run. Benchmark results are only as durable as the artifacts they reference.</a:t>
-            </a:r>
-            <a:endParaRPr lang="en-US" sz="1050" dirty="0"/>
-          </a:p>
-        </p:txBody>
-      </p:sp>
-      <p:sp>
-        <p:nvSpPr>
-          <p:cNvPr id="13" name="Shape 11"/>
-          <p:cNvSpPr/>
-          <p:nvPr/>
-        </p:nvSpPr>
-        <p:spPr>
-          <a:xfrm>
-            <a:off x="457200" y="2633472"/>
-            <a:ext cx="8229600" cy="603504"/>
-          </a:xfrm>
-          <a:prstGeom prst="rect">
-            <a:avLst/>
-          </a:prstGeom>
-          <a:solidFill>
-            <a:srgbClr val="FFFFFF"/>
-          </a:solidFill>
-          <a:ln w="12700">
-            <a:solidFill>
-              <a:srgbClr val="CADCFC"/>
-            </a:solidFill>
-            <a:prstDash val="solid"/>
-          </a:ln>
-        </p:spPr>
-      </p:sp>
-      <p:sp>
-        <p:nvSpPr>
-          <p:cNvPr id="14" name="Shape 12"/>
-          <p:cNvSpPr/>
-          <p:nvPr/>
-        </p:nvSpPr>
-        <p:spPr>
-          <a:xfrm>
-            <a:off x="457200" y="2633472"/>
-            <a:ext cx="73152" cy="603504"/>
-          </a:xfrm>
-          <a:prstGeom prst="rect">
-            <a:avLst/>
-          </a:prstGeom>
-          <a:solidFill>
-            <a:srgbClr val="1E2761"/>
-          </a:solidFill>
-          <a:ln w="12700">
-            <a:solidFill>
-              <a:srgbClr val="1E2761"/>
-            </a:solidFill>
-            <a:prstDash val="solid"/>
-          </a:ln>
-        </p:spPr>
-      </p:sp>
-      <p:sp>
-        <p:nvSpPr>
-          <p:cNvPr id="15" name="Text 13"/>
-          <p:cNvSpPr/>
-          <p:nvPr/>
-        </p:nvSpPr>
-        <p:spPr>
-          <a:xfrm>
-            <a:off x="640080" y="2670048"/>
-            <a:ext cx="7955280" cy="256032"/>
-          </a:xfrm>
-          <a:prstGeom prst="rect">
-            <a:avLst/>
-          </a:prstGeom>
-          <a:noFill/>
-          <a:ln/>
-        </p:spPr>
-        <p:txBody>
-          <a:bodyPr wrap="square" lIns="0" tIns="0" rIns="0" bIns="0" rtlCol="0" anchor="ctr"/>
-          <a:lstStyle/>
-          <a:p>
-            <a:pPr indent="0" marL="0">
-              <a:buNone/>
-            </a:pPr>
-            <a:r>
-              <a:rPr lang="en-US" sz="1300" b="1" dirty="0">
-                <a:solidFill>
-                  <a:srgbClr val="1E2761"/>
-                </a:solidFill>
-                <a:latin typeface="Calibri" pitchFamily="34" charset="0"/>
-                <a:ea typeface="Calibri" pitchFamily="34" charset="-122"/>
-                <a:cs typeface="Calibri" pitchFamily="34" charset="-120"/>
-              </a:rPr>
-              <a:t>Prompt sensitivity ≥ model choice (often)</a:t>
-            </a:r>
-            <a:endParaRPr lang="en-US" sz="1300" dirty="0"/>
-          </a:p>
-        </p:txBody>
-      </p:sp>
-      <p:sp>
-        <p:nvSpPr>
-          <p:cNvPr id="16" name="Text 14"/>
-          <p:cNvSpPr/>
-          <p:nvPr/>
-        </p:nvSpPr>
-        <p:spPr>
-          <a:xfrm>
-            <a:off x="640080" y="2926080"/>
-            <a:ext cx="7955280" cy="292608"/>
-          </a:xfrm>
-          <a:prstGeom prst="rect">
-            <a:avLst/>
-          </a:prstGeom>
-          <a:noFill/>
-          <a:ln/>
-        </p:spPr>
-        <p:txBody>
-          <a:bodyPr wrap="square" lIns="0" tIns="0" rIns="0" bIns="0" rtlCol="0" anchor="ctr"/>
-          <a:lstStyle/>
-          <a:p>
-            <a:pPr indent="0" marL="0">
-              <a:buNone/>
-            </a:pPr>
-            <a:r>
-              <a:rPr lang="en-US" sz="1050" dirty="0">
-                <a:solidFill>
-                  <a:srgbClr val="1E293B"/>
-                </a:solidFill>
-                <a:latin typeface="Calibri" pitchFamily="34" charset="0"/>
-                <a:ea typeface="Calibri" pitchFamily="34" charset="-122"/>
-                <a:cs typeface="Calibri" pitchFamily="34" charset="-120"/>
-              </a:rPr>
-              <a:t>ΔF1 between Template A and B was [NUM] points — comparable to gaps between models. Single-prompt LLM benchmarks should not be trusted.</a:t>
-            </a:r>
-            <a:endParaRPr lang="en-US" sz="1050" dirty="0"/>
-          </a:p>
-        </p:txBody>
-      </p:sp>
-      <p:sp>
-        <p:nvSpPr>
-          <p:cNvPr id="17" name="Shape 15"/>
-          <p:cNvSpPr/>
-          <p:nvPr/>
-        </p:nvSpPr>
-        <p:spPr>
-          <a:xfrm>
-            <a:off x="457200" y="3310128"/>
-            <a:ext cx="8229600" cy="603504"/>
-          </a:xfrm>
-          <a:prstGeom prst="rect">
-            <a:avLst/>
-          </a:prstGeom>
-          <a:solidFill>
-            <a:srgbClr val="FFFFFF"/>
-          </a:solidFill>
-          <a:ln w="12700">
-            <a:solidFill>
-              <a:srgbClr val="CADCFC"/>
-            </a:solidFill>
-            <a:prstDash val="solid"/>
-          </a:ln>
-        </p:spPr>
-      </p:sp>
-      <p:sp>
-        <p:nvSpPr>
-          <p:cNvPr id="18" name="Shape 16"/>
-          <p:cNvSpPr/>
-          <p:nvPr/>
-        </p:nvSpPr>
-        <p:spPr>
-          <a:xfrm>
-            <a:off x="457200" y="3310128"/>
-            <a:ext cx="73152" cy="603504"/>
-          </a:xfrm>
-          <a:prstGeom prst="rect">
-            <a:avLst/>
-          </a:prstGeom>
-          <a:solidFill>
-            <a:srgbClr val="1E2761"/>
-          </a:solidFill>
-          <a:ln w="12700">
-            <a:solidFill>
-              <a:srgbClr val="1E2761"/>
-            </a:solidFill>
-            <a:prstDash val="solid"/>
-          </a:ln>
-        </p:spPr>
-      </p:sp>
-      <p:sp>
-        <p:nvSpPr>
-          <p:cNvPr id="19" name="Text 17"/>
-          <p:cNvSpPr/>
-          <p:nvPr/>
-        </p:nvSpPr>
-        <p:spPr>
-          <a:xfrm>
-            <a:off x="640080" y="3346704"/>
-            <a:ext cx="7955280" cy="256032"/>
-          </a:xfrm>
-          <a:prstGeom prst="rect">
-            <a:avLst/>
-          </a:prstGeom>
-          <a:noFill/>
-          <a:ln/>
-        </p:spPr>
-        <p:txBody>
-          <a:bodyPr wrap="square" lIns="0" tIns="0" rIns="0" bIns="0" rtlCol="0" anchor="ctr"/>
-          <a:lstStyle/>
-          <a:p>
-            <a:pPr indent="0" marL="0">
-              <a:buNone/>
-            </a:pPr>
-            <a:r>
-              <a:rPr lang="en-US" sz="1300" b="1" dirty="0">
-                <a:solidFill>
-                  <a:srgbClr val="1E2761"/>
-                </a:solidFill>
-                <a:latin typeface="Calibri" pitchFamily="34" charset="0"/>
-                <a:ea typeface="Calibri" pitchFamily="34" charset="-122"/>
-                <a:cs typeface="Calibri" pitchFamily="34" charset="-120"/>
-              </a:rPr>
-              <a:t>Coverage matters more than people report</a:t>
-            </a:r>
-            <a:endParaRPr lang="en-US" sz="1300" dirty="0"/>
-          </a:p>
-        </p:txBody>
-      </p:sp>
-      <p:sp>
-        <p:nvSpPr>
-          <p:cNvPr id="20" name="Text 18"/>
-          <p:cNvSpPr/>
-          <p:nvPr/>
-        </p:nvSpPr>
-        <p:spPr>
-          <a:xfrm>
-            <a:off x="640080" y="3602736"/>
-            <a:ext cx="7955280" cy="292608"/>
-          </a:xfrm>
-          <a:prstGeom prst="rect">
-            <a:avLst/>
-          </a:prstGeom>
-          <a:noFill/>
-          <a:ln/>
-        </p:spPr>
-        <p:txBody>
-          <a:bodyPr wrap="square" lIns="0" tIns="0" rIns="0" bIns="0" rtlCol="0" anchor="ctr"/>
-          <a:lstStyle/>
-          <a:p>
-            <a:pPr indent="0" marL="0">
-              <a:buNone/>
-            </a:pPr>
-            <a:r>
-              <a:rPr lang="en-US" sz="1050" dirty="0">
-                <a:solidFill>
-                  <a:srgbClr val="1E293B"/>
-                </a:solidFill>
-                <a:latin typeface="Calibri" pitchFamily="34" charset="0"/>
-                <a:ea typeface="Calibri" pitchFamily="34" charset="-122"/>
-                <a:cs typeface="Calibri" pitchFamily="34" charset="-120"/>
-              </a:rPr>
-              <a:t>Force-mapping parse failures to 'neutral' would overstate accuracy by [NUM] points. Most papers don't report it.</a:t>
-            </a:r>
-            <a:endParaRPr lang="en-US" sz="1050" dirty="0"/>
-          </a:p>
-        </p:txBody>
-      </p:sp>
-      <p:sp>
-        <p:nvSpPr>
-          <p:cNvPr id="21" name="Shape 19"/>
-          <p:cNvSpPr/>
-          <p:nvPr/>
-        </p:nvSpPr>
-        <p:spPr>
-          <a:xfrm>
-            <a:off x="457200" y="3986784"/>
-            <a:ext cx="8229600" cy="603504"/>
-          </a:xfrm>
-          <a:prstGeom prst="rect">
-            <a:avLst/>
-          </a:prstGeom>
-          <a:solidFill>
-            <a:srgbClr val="FFFFFF"/>
-          </a:solidFill>
-          <a:ln w="12700">
-            <a:solidFill>
-              <a:srgbClr val="CADCFC"/>
-            </a:solidFill>
-            <a:prstDash val="solid"/>
-          </a:ln>
-        </p:spPr>
-      </p:sp>
-      <p:sp>
-        <p:nvSpPr>
-          <p:cNvPr id="22" name="Shape 20"/>
-          <p:cNvSpPr/>
-          <p:nvPr/>
-        </p:nvSpPr>
-        <p:spPr>
-          <a:xfrm>
-            <a:off x="457200" y="3986784"/>
-            <a:ext cx="73152" cy="603504"/>
-          </a:xfrm>
-          <a:prstGeom prst="rect">
-            <a:avLst/>
-          </a:prstGeom>
-          <a:solidFill>
-            <a:srgbClr val="1E2761"/>
-          </a:solidFill>
-          <a:ln w="12700">
-            <a:solidFill>
-              <a:srgbClr val="1E2761"/>
-            </a:solidFill>
-            <a:prstDash val="solid"/>
-          </a:ln>
-        </p:spPr>
-      </p:sp>
-      <p:sp>
-        <p:nvSpPr>
-          <p:cNvPr id="23" name="Text 21"/>
-          <p:cNvSpPr/>
-          <p:nvPr/>
-        </p:nvSpPr>
-        <p:spPr>
-          <a:xfrm>
-            <a:off x="640080" y="4023360"/>
-            <a:ext cx="7955280" cy="256032"/>
-          </a:xfrm>
-          <a:prstGeom prst="rect">
-            <a:avLst/>
-          </a:prstGeom>
-          <a:noFill/>
-          <a:ln/>
-        </p:spPr>
-        <p:txBody>
-          <a:bodyPr wrap="square" lIns="0" tIns="0" rIns="0" bIns="0" rtlCol="0" anchor="ctr"/>
-          <a:lstStyle/>
-          <a:p>
-            <a:pPr indent="0" marL="0">
-              <a:buNone/>
-            </a:pPr>
-            <a:r>
-              <a:rPr lang="en-US" sz="1300" b="1" dirty="0">
-                <a:solidFill>
-                  <a:srgbClr val="1E2761"/>
-                </a:solidFill>
-                <a:latin typeface="Calibri" pitchFamily="34" charset="0"/>
-                <a:ea typeface="Calibri" pitchFamily="34" charset="-122"/>
-                <a:cs typeface="Calibri" pitchFamily="34" charset="-120"/>
-              </a:rPr>
-              <a:t>Data leakage caveat</a:t>
-            </a:r>
-            <a:endParaRPr lang="en-US" sz="1300" dirty="0"/>
-          </a:p>
-        </p:txBody>
-      </p:sp>
-      <p:sp>
-        <p:nvSpPr>
-          <p:cNvPr id="24" name="Text 22"/>
-          <p:cNvSpPr/>
-          <p:nvPr/>
-        </p:nvSpPr>
-        <p:spPr>
-          <a:xfrm>
-            <a:off x="640080" y="4279392"/>
-            <a:ext cx="7955280" cy="292608"/>
-          </a:xfrm>
-          <a:prstGeom prst="rect">
-            <a:avLst/>
-          </a:prstGeom>
-          <a:noFill/>
-          <a:ln/>
-        </p:spPr>
-        <p:txBody>
-          <a:bodyPr wrap="square" lIns="0" tIns="0" rIns="0" bIns="0" rtlCol="0" anchor="ctr"/>
-          <a:lstStyle/>
-          <a:p>
-            <a:pPr indent="0" marL="0">
-              <a:buNone/>
-            </a:pPr>
-            <a:r>
-              <a:rPr lang="en-US" sz="1050" dirty="0">
-                <a:solidFill>
-                  <a:srgbClr val="1E293B"/>
-                </a:solidFill>
-                <a:latin typeface="Calibri" pitchFamily="34" charset="0"/>
-                <a:ea typeface="Calibri" pitchFamily="34" charset="-122"/>
-                <a:cs typeface="Calibri" pitchFamily="34" charset="-120"/>
-              </a:rPr>
-              <a:t>FPB (2014) and FiQA (2018) almost certainly leaked into pretraining. Numbers here are an upper bound on real-world generalisation — a 2025 hold-out would be the honest test.</a:t>
-            </a:r>
-            <a:endParaRPr lang="en-US" sz="1050" dirty="0"/>
+              <a:t>Takeaway: half the misses are a conservative neutral-bias, not random noise — only 1 of 30 errors is genuinely ambiguous label noise.</a:t>
+            </a:r>
+            <a:endParaRPr lang="en-US" sz="1200" dirty="0"/>
           </a:p>
         </p:txBody>
       </p:sp>
@@ -10820,7 +11490,7 @@
                 <a:ea typeface="Calibri" pitchFamily="34" charset="-122"/>
                 <a:cs typeface="Calibri" pitchFamily="34" charset="-120"/>
               </a:rPr>
-              <a:t>What we'd do differently</a:t>
+              <a:t>Interactive analysis dashboard</a:t>
             </a:r>
             <a:endParaRPr lang="en-US" sz="2600" dirty="0"/>
           </a:p>
@@ -10834,8 +11504,8 @@
         </p:nvSpPr>
         <p:spPr>
           <a:xfrm>
-            <a:off x="457200" y="1463040"/>
-            <a:ext cx="8229600" cy="2743200"/>
+            <a:off x="365760" y="777240"/>
+            <a:ext cx="8412480" cy="320040"/>
           </a:xfrm>
           <a:prstGeom prst="rect">
             <a:avLst/>
@@ -10844,112 +11514,86 @@
           <a:ln/>
         </p:spPr>
         <p:txBody>
-          <a:bodyPr wrap="square" rtlCol="0" anchor="t"/>
-          <a:lstStyle/>
-          <a:p>
-            <a:pPr marL="342900" indent="-342900">
-              <a:spcAft>
-                <a:spcPts val="600"/>
-              </a:spcAft>
-              <a:buSzPct val="100000"/>
-              <a:buChar char="•"/>
-            </a:pPr>
-            <a:r>
-              <a:rPr lang="en-US" sz="1400" dirty="0">
-                <a:solidFill>
-                  <a:srgbClr val="1E293B"/>
-                </a:solidFill>
-                <a:latin typeface="Calibri" pitchFamily="34" charset="0"/>
-                <a:ea typeface="Calibri" pitchFamily="34" charset="-122"/>
-                <a:cs typeface="Calibri" pitchFamily="34" charset="-120"/>
-              </a:rPr>
-              <a:t>Build a 2025 financial-news held-out set to break leakage from FPB/FiQA pretraining</a:t>
-            </a:r>
-            <a:endParaRPr lang="en-US" sz="1400" dirty="0"/>
-          </a:p>
-          <a:p>
-            <a:pPr marL="342900" indent="-342900">
-              <a:spcAft>
-                <a:spcPts val="600"/>
-              </a:spcAft>
-              <a:buSzPct val="100000"/>
-              <a:buChar char="•"/>
-            </a:pPr>
-            <a:r>
-              <a:rPr lang="en-US" sz="1400" dirty="0">
-                <a:solidFill>
-                  <a:srgbClr val="1E293B"/>
-                </a:solidFill>
-                <a:latin typeface="Calibri" pitchFamily="34" charset="0"/>
-                <a:ea typeface="Calibri" pitchFamily="34" charset="-122"/>
-                <a:cs typeface="Calibri" pitchFamily="34" charset="-120"/>
-              </a:rPr>
-              <a:t>Run three or four prompt templates instead of two — make sensitivity even more legible</a:t>
-            </a:r>
-            <a:endParaRPr lang="en-US" sz="1400" dirty="0"/>
-          </a:p>
-          <a:p>
-            <a:pPr marL="342900" indent="-342900">
-              <a:spcAft>
-                <a:spcPts val="600"/>
-              </a:spcAft>
-              <a:buSzPct val="100000"/>
-              <a:buChar char="•"/>
-            </a:pPr>
-            <a:r>
-              <a:rPr lang="en-US" sz="1400" dirty="0">
-                <a:solidFill>
-                  <a:srgbClr val="1E293B"/>
-                </a:solidFill>
-                <a:latin typeface="Calibri" pitchFamily="34" charset="0"/>
-                <a:ea typeface="Calibri" pitchFamily="34" charset="-122"/>
-                <a:cs typeface="Calibri" pitchFamily="34" charset="-120"/>
-              </a:rPr>
-              <a:t>Add an LLM-as-judge sanity pass over a 100-sample slice — catch label noise</a:t>
-            </a:r>
-            <a:endParaRPr lang="en-US" sz="1400" dirty="0"/>
-          </a:p>
-          <a:p>
-            <a:pPr marL="342900" indent="-342900">
-              <a:spcAft>
-                <a:spcPts val="600"/>
-              </a:spcAft>
-              <a:buSzPct val="100000"/>
-              <a:buChar char="•"/>
-            </a:pPr>
-            <a:r>
-              <a:rPr lang="en-US" sz="1400" dirty="0">
-                <a:solidFill>
-                  <a:srgbClr val="1E293B"/>
-                </a:solidFill>
-                <a:latin typeface="Calibri" pitchFamily="34" charset="0"/>
-                <a:ea typeface="Calibri" pitchFamily="34" charset="-122"/>
-                <a:cs typeface="Calibri" pitchFamily="34" charset="-120"/>
-              </a:rPr>
-              <a:t>Try few-shot examples drawn from the same dataset as the test (when available) — closer to real deployment</a:t>
-            </a:r>
-            <a:endParaRPr lang="en-US" sz="1400" dirty="0"/>
-          </a:p>
-          <a:p>
-            <a:pPr marL="342900" indent="-342900">
-              <a:spcAft>
-                <a:spcPts val="600"/>
-              </a:spcAft>
-              <a:buSzPct val="100000"/>
-              <a:buChar char="•"/>
-            </a:pPr>
-            <a:r>
-              <a:rPr lang="en-US" sz="1400" dirty="0">
-                <a:solidFill>
-                  <a:srgbClr val="1E293B"/>
-                </a:solidFill>
-                <a:latin typeface="Calibri" pitchFamily="34" charset="0"/>
-                <a:ea typeface="Calibri" pitchFamily="34" charset="-122"/>
-                <a:cs typeface="Calibri" pitchFamily="34" charset="-120"/>
-              </a:rPr>
-              <a:t>Include a smaller financial model (e.g. finma-7b) and a non-financial 8B baseline of the same era for a tighter family comparison</a:t>
-            </a:r>
-            <a:endParaRPr lang="en-US" sz="1400" dirty="0"/>
+          <a:bodyPr wrap="square" lIns="0" tIns="0" rIns="0" bIns="0" rtlCol="0" anchor="ctr"/>
+          <a:lstStyle/>
+          <a:p>
+            <a:pPr indent="0" marL="0">
+              <a:buNone/>
+            </a:pPr>
+            <a:r>
+              <a:rPr lang="en-US" sz="1300" i="1" dirty="0">
+                <a:solidFill>
+                  <a:srgbClr val="64748B"/>
+                </a:solidFill>
+                <a:latin typeface="Calibri" pitchFamily="34" charset="0"/>
+                <a:ea typeface="Calibri" pitchFamily="34" charset="-122"/>
+                <a:cs typeface="Calibri" pitchFamily="34" charset="-120"/>
+              </a:rPr>
+              <a:t>Live at localhost:8502 — every chart and table on these slides also updates as new runs finish.</a:t>
+            </a:r>
+            <a:endParaRPr lang="en-US" sz="1300" dirty="0"/>
+          </a:p>
+        </p:txBody>
+      </p:sp>
+      <p:pic>
+        <p:nvPicPr>
+          <p:cNvPr id="6" name="Image 0" descr="C:\python_projects\finllama-sentiment\presentation\key_figures\dashboard_overview.png">    </p:cNvPr>
+          <p:cNvPicPr>
+            <a:picLocks noChangeAspect="1"/>
+          </p:cNvPicPr>
+          <p:nvPr/>
+        </p:nvPicPr>
+        <p:blipFill>
+          <a:blip r:embed="rId1"/>
+          <a:srcRect l="0" r="0" t="0" b="0"/>
+          <a:stretch/>
+        </p:blipFill>
+        <p:spPr>
+          <a:xfrm>
+            <a:off x="457200" y="1325880"/>
+            <a:ext cx="8229600" cy="3291840"/>
+          </a:xfrm>
+          <a:prstGeom prst="rect">
+            <a:avLst/>
+          </a:prstGeom>
+        </p:spPr>
+      </p:pic>
+      <p:sp>
+        <p:nvSpPr>
+          <p:cNvPr id="7" name="Text 4"/>
+          <p:cNvSpPr/>
+          <p:nvPr/>
+        </p:nvSpPr>
+        <p:spPr>
+          <a:xfrm>
+            <a:off x="365760" y="4617720"/>
+            <a:ext cx="8412480" cy="228600"/>
+          </a:xfrm>
+          <a:prstGeom prst="rect">
+            <a:avLst/>
+          </a:prstGeom>
+          <a:noFill/>
+          <a:ln/>
+        </p:spPr>
+        <p:txBody>
+          <a:bodyPr wrap="square" lIns="0" tIns="0" rIns="0" bIns="0" rtlCol="0" anchor="ctr"/>
+          <a:lstStyle/>
+          <a:p>
+            <a:pPr indent="0" marL="0">
+              <a:buNone/>
+            </a:pPr>
+            <a:r>
+              <a:rPr lang="en-US" sz="900" i="1" dirty="0">
+                <a:solidFill>
+                  <a:srgbClr val="64748B"/>
+                </a:solidFill>
+                <a:latin typeface="Calibri" pitchFamily="34" charset="0"/>
+                <a:ea typeface="Calibri" pitchFamily="34" charset="-122"/>
+                <a:cs typeface="Calibri" pitchFamily="34" charset="-120"/>
+              </a:rPr>
+              <a:t>Includes: research-question verdict card, F1 comparison, prompt-sensitivity &amp; few-shot tables, per-class breakdown, confusion matrices.</a:t>
+            </a:r>
+            <a:endParaRPr lang="en-US" sz="900" dirty="0"/>
           </a:p>
         </p:txBody>
       </p:sp>
@@ -10967,7 +11611,7 @@
     <p:bg>
       <p:bgPr>
         <a:solidFill>
-          <a:srgbClr val="1E2761"/>
+          <a:srgbClr val="FFFFFF"/>
         </a:solidFill>
       </p:bgPr>
     </p:bg>
@@ -10993,18 +11637,18 @@
         </p:nvSpPr>
         <p:spPr>
           <a:xfrm>
-            <a:off x="0" y="4206240"/>
+            <a:off x="0" y="0"/>
             <a:ext cx="9144000" cy="45720"/>
           </a:xfrm>
           <a:prstGeom prst="rect">
             <a:avLst/>
           </a:prstGeom>
           <a:solidFill>
-            <a:srgbClr val="CADCFC"/>
+            <a:srgbClr val="1E2761"/>
           </a:solidFill>
           <a:ln w="12700">
             <a:solidFill>
-              <a:srgbClr val="CADCFC"/>
+              <a:srgbClr val="1E2761"/>
             </a:solidFill>
             <a:prstDash val="solid"/>
           </a:ln>
@@ -11018,8 +11662,8 @@
         </p:nvSpPr>
         <p:spPr>
           <a:xfrm>
-            <a:off x="548640" y="731520"/>
-            <a:ext cx="8046720" cy="548640"/>
+            <a:off x="365760" y="4892040"/>
+            <a:ext cx="8412480" cy="228600"/>
           </a:xfrm>
           <a:prstGeom prst="rect">
             <a:avLst/>
@@ -11028,24 +11672,24 @@
           <a:ln/>
         </p:spPr>
         <p:txBody>
-          <a:bodyPr wrap="square" lIns="0" tIns="0" rIns="0" bIns="0" rtlCol="0" anchor="ctr"/>
+          <a:bodyPr wrap="square" rtlCol="0" anchor="ctr"/>
           <a:lstStyle/>
           <a:p>
             <a:pPr indent="0" marL="0">
               <a:buNone/>
             </a:pPr>
             <a:r>
-              <a:rPr lang="en-US" sz="2200" i="1" dirty="0">
-                <a:solidFill>
-                  <a:srgbClr val="CADCFC"/>
-                </a:solidFill>
-                <a:latin typeface="Calibri" pitchFamily="34" charset="0"/>
-                <a:ea typeface="Calibri" pitchFamily="34" charset="-122"/>
-                <a:cs typeface="Calibri" pitchFamily="34" charset="-120"/>
-              </a:rPr>
-              <a:t>Bottom line</a:t>
-            </a:r>
-            <a:endParaRPr lang="en-US" sz="2200" dirty="0"/>
+              <a:rPr lang="en-US" sz="900" dirty="0">
+                <a:solidFill>
+                  <a:srgbClr val="64748B"/>
+                </a:solidFill>
+                <a:latin typeface="Calibri" pitchFamily="34" charset="0"/>
+                <a:ea typeface="Calibri" pitchFamily="34" charset="-122"/>
+                <a:cs typeface="Calibri" pitchFamily="34" charset="-120"/>
+              </a:rPr>
+              <a:t>LLMs in Finance Seminar  ·  Implementation Presentation</a:t>
+            </a:r>
+            <a:endParaRPr lang="en-US" sz="900" dirty="0"/>
           </a:p>
         </p:txBody>
       </p:sp>
@@ -11057,8 +11701,8 @@
         </p:nvSpPr>
         <p:spPr>
           <a:xfrm>
-            <a:off x="548640" y="1463040"/>
-            <a:ext cx="8046720" cy="1645920"/>
+            <a:off x="365760" y="228600"/>
+            <a:ext cx="8412480" cy="548640"/>
           </a:xfrm>
           <a:prstGeom prst="rect">
             <a:avLst/>
@@ -11074,17 +11718,17 @@
               <a:buNone/>
             </a:pPr>
             <a:r>
-              <a:rPr lang="en-US" sz="2200" b="1" dirty="0">
-                <a:solidFill>
-                  <a:srgbClr val="FFFFFF"/>
-                </a:solidFill>
-                <a:latin typeface="Calibri" pitchFamily="34" charset="0"/>
-                <a:ea typeface="Calibri" pitchFamily="34" charset="-122"/>
-                <a:cs typeface="Calibri" pitchFamily="34" charset="-120"/>
-              </a:rPr>
-              <a:t>[Insert a one-sentence answer to the research question once the matrix completes — e.g. 'Financial instruction tuning gave plutus-8B a [NUM]-point F1 edge over the strongest general 7B LLM on FPB, but the small specialised FinBERT still outperformed every 8B model on this in-domain task.']</a:t>
-            </a:r>
-            <a:endParaRPr lang="en-US" sz="2200" dirty="0"/>
+              <a:rPr lang="en-US" sz="2600" b="1" dirty="0">
+                <a:solidFill>
+                  <a:srgbClr val="1E2761"/>
+                </a:solidFill>
+                <a:latin typeface="Calibri" pitchFamily="34" charset="0"/>
+                <a:ea typeface="Calibri" pitchFamily="34" charset="-122"/>
+                <a:cs typeface="Calibri" pitchFamily="34" charset="-120"/>
+              </a:rPr>
+              <a:t>Per-example breakdown — every model on the same sentence</a:t>
+            </a:r>
+            <a:endParaRPr lang="en-US" sz="2600" dirty="0"/>
           </a:p>
         </p:txBody>
       </p:sp>
@@ -11096,8 +11740,8 @@
         </p:nvSpPr>
         <p:spPr>
           <a:xfrm>
-            <a:off x="548640" y="3383280"/>
-            <a:ext cx="8046720" cy="365760"/>
+            <a:off x="365760" y="777240"/>
+            <a:ext cx="8412480" cy="320040"/>
           </a:xfrm>
           <a:prstGeom prst="rect">
             <a:avLst/>
@@ -11115,28 +11759,51 @@
             <a:r>
               <a:rPr lang="en-US" sz="1300" i="1" dirty="0">
                 <a:solidFill>
-                  <a:srgbClr val="CADCFC"/>
-                </a:solidFill>
-                <a:latin typeface="Calibri" pitchFamily="34" charset="0"/>
-                <a:ea typeface="Calibri" pitchFamily="34" charset="-122"/>
-                <a:cs typeface="Calibri" pitchFamily="34" charset="-120"/>
-              </a:rPr>
-              <a:t>Two takeaways for the audience to remember:</a:t>
+                  <a:srgbClr val="64748B"/>
+                </a:solidFill>
+                <a:latin typeface="Calibri" pitchFamily="34" charset="0"/>
+                <a:ea typeface="Calibri" pitchFamily="34" charset="-122"/>
+                <a:cs typeface="Calibri" pitchFamily="34" charset="-120"/>
+              </a:rPr>
+              <a:t>Pick any sample, see how each (model, template, shots) classified it; green = correct, red = wrong.</a:t>
             </a:r>
             <a:endParaRPr lang="en-US" sz="1300" dirty="0"/>
           </a:p>
         </p:txBody>
       </p:sp>
-      <p:sp>
-        <p:nvSpPr>
-          <p:cNvPr id="6" name="Text 4"/>
-          <p:cNvSpPr/>
-          <p:nvPr/>
-        </p:nvSpPr>
-        <p:spPr>
-          <a:xfrm>
-            <a:off x="548640" y="3703320"/>
-            <a:ext cx="8046720" cy="548640"/>
+      <p:pic>
+        <p:nvPicPr>
+          <p:cNvPr id="6" name="Image 0" descr="C:\python_projects\finllama-sentiment\presentation\key_figures\dashboard_per_example.png">    </p:cNvPr>
+          <p:cNvPicPr>
+            <a:picLocks noChangeAspect="1"/>
+          </p:cNvPicPr>
+          <p:nvPr/>
+        </p:nvPicPr>
+        <p:blipFill>
+          <a:blip r:embed="rId1"/>
+          <a:srcRect l="0" r="0" t="0" b="0"/>
+          <a:stretch/>
+        </p:blipFill>
+        <p:spPr>
+          <a:xfrm>
+            <a:off x="457200" y="1325880"/>
+            <a:ext cx="8229600" cy="3291840"/>
+          </a:xfrm>
+          <a:prstGeom prst="rect">
+            <a:avLst/>
+          </a:prstGeom>
+        </p:spPr>
+      </p:pic>
+      <p:sp>
+        <p:nvSpPr>
+          <p:cNvPr id="7" name="Text 4"/>
+          <p:cNvSpPr/>
+          <p:nvPr/>
+        </p:nvSpPr>
+        <p:spPr>
+          <a:xfrm>
+            <a:off x="365760" y="4617720"/>
+            <a:ext cx="8412480" cy="228600"/>
           </a:xfrm>
           <a:prstGeom prst="rect">
             <a:avLst/>
@@ -11152,34 +11819,17 @@
               <a:buNone/>
             </a:pPr>
             <a:r>
-              <a:rPr lang="en-US" sz="1300" dirty="0">
-                <a:solidFill>
-                  <a:srgbClr val="FFFFFF"/>
-                </a:solidFill>
-                <a:latin typeface="Calibri" pitchFamily="34" charset="0"/>
-                <a:ea typeface="Calibri" pitchFamily="34" charset="-122"/>
-                <a:cs typeface="Calibri" pitchFamily="34" charset="-120"/>
-              </a:rPr>
-              <a:t>1. [primary takeaway — fill in once you have the numbers]</a:t>
-            </a:r>
-            <a:endParaRPr lang="en-US" sz="1300" dirty="0"/>
-          </a:p>
-          <a:p>
-            <a:pPr indent="0" marL="0">
-              <a:buNone/>
-            </a:pPr>
-            <a:r>
-              <a:rPr lang="en-US" sz="1300" dirty="0">
-                <a:solidFill>
-                  <a:srgbClr val="FFFFFF"/>
-                </a:solidFill>
-                <a:latin typeface="Calibri" pitchFamily="34" charset="0"/>
-                <a:ea typeface="Calibri" pitchFamily="34" charset="-122"/>
-                <a:cs typeface="Calibri" pitchFamily="34" charset="-120"/>
-              </a:rPr>
-              <a:t>2. [secondary takeaway — likely about prompt sensitivity or reproducibility]</a:t>
-            </a:r>
-            <a:endParaRPr lang="en-US" sz="1300" dirty="0"/>
+              <a:rPr lang="en-US" sz="900" i="1" dirty="0">
+                <a:solidFill>
+                  <a:srgbClr val="64748B"/>
+                </a:solidFill>
+                <a:latin typeface="Calibri" pitchFamily="34" charset="0"/>
+                <a:ea typeface="Calibri" pitchFamily="34" charset="-122"/>
+                <a:cs typeface="Calibri" pitchFamily="34" charset="-120"/>
+              </a:rPr>
+              <a:t>The 'highlights' tab auto-curates cases where models disagree — useful for picking concrete examples for a presentation.</a:t>
+            </a:r>
+            <a:endParaRPr lang="en-US" sz="900" dirty="0"/>
           </a:p>
         </p:txBody>
       </p:sp>
@@ -11223,8 +11873,8 @@
         </p:nvSpPr>
         <p:spPr>
           <a:xfrm>
-            <a:off x="548640" y="1463040"/>
-            <a:ext cx="8046720" cy="914400"/>
+            <a:off x="548640" y="1280160"/>
+            <a:ext cx="1280160" cy="1463040"/>
           </a:xfrm>
           <a:prstGeom prst="rect">
             <a:avLst/>
@@ -11240,17 +11890,17 @@
               <a:buNone/>
             </a:pPr>
             <a:r>
-              <a:rPr lang="en-US" sz="5600" b="1" dirty="0">
-                <a:solidFill>
-                  <a:srgbClr val="FFFFFF"/>
-                </a:solidFill>
-                <a:latin typeface="Calibri" pitchFamily="34" charset="0"/>
-                <a:ea typeface="Calibri" pitchFamily="34" charset="-122"/>
-                <a:cs typeface="Calibri" pitchFamily="34" charset="-120"/>
-              </a:rPr>
-              <a:t>Thank you</a:t>
-            </a:r>
-            <a:endParaRPr lang="en-US" sz="5600" dirty="0"/>
+              <a:rPr lang="en-US" sz="11000" b="1" dirty="0">
+                <a:solidFill>
+                  <a:srgbClr val="CADCFC"/>
+                </a:solidFill>
+                <a:latin typeface="Calibri" pitchFamily="34" charset="0"/>
+                <a:ea typeface="Calibri" pitchFamily="34" charset="-122"/>
+                <a:cs typeface="Calibri" pitchFamily="34" charset="-120"/>
+              </a:rPr>
+              <a:t>4</a:t>
+            </a:r>
+            <a:endParaRPr lang="en-US" sz="11000" dirty="0"/>
           </a:p>
         </p:txBody>
       </p:sp>
@@ -11262,8 +11912,8 @@
         </p:nvSpPr>
         <p:spPr>
           <a:xfrm>
-            <a:off x="548640" y="2377440"/>
-            <a:ext cx="8046720" cy="548640"/>
+            <a:off x="2011680" y="1828800"/>
+            <a:ext cx="6858000" cy="914400"/>
           </a:xfrm>
           <a:prstGeom prst="rect">
             <a:avLst/>
@@ -11279,17 +11929,17 @@
               <a:buNone/>
             </a:pPr>
             <a:r>
-              <a:rPr lang="en-US" sz="2400" i="1" dirty="0">
-                <a:solidFill>
-                  <a:srgbClr val="CADCFC"/>
-                </a:solidFill>
-                <a:latin typeface="Calibri" pitchFamily="34" charset="0"/>
-                <a:ea typeface="Calibri" pitchFamily="34" charset="-122"/>
-                <a:cs typeface="Calibri" pitchFamily="34" charset="-120"/>
-              </a:rPr>
-              <a:t>Questions?</a:t>
-            </a:r>
-            <a:endParaRPr lang="en-US" sz="2400" dirty="0"/>
+              <a:rPr lang="en-US" sz="3600" b="1" dirty="0">
+                <a:solidFill>
+                  <a:srgbClr val="FFFFFF"/>
+                </a:solidFill>
+                <a:latin typeface="Calibri" pitchFamily="34" charset="0"/>
+                <a:ea typeface="Calibri" pitchFamily="34" charset="-122"/>
+                <a:cs typeface="Calibri" pitchFamily="34" charset="-120"/>
+              </a:rPr>
+              <a:t>Lessons learned</a:t>
+            </a:r>
+            <a:endParaRPr lang="en-US" sz="3600" dirty="0"/>
           </a:p>
         </p:txBody>
       </p:sp>
@@ -11301,8 +11951,8 @@
         </p:nvSpPr>
         <p:spPr>
           <a:xfrm>
-            <a:off x="548640" y="4114800"/>
-            <a:ext cx="8046720" cy="365760"/>
+            <a:off x="2011680" y="2743200"/>
+            <a:ext cx="6858000" cy="457200"/>
           </a:xfrm>
           <a:prstGeom prst="rect">
             <a:avLst/>
@@ -11318,30 +11968,87 @@
               <a:buNone/>
             </a:pPr>
             <a:r>
-              <a:rPr lang="en-US" sz="1200" dirty="0">
+              <a:rPr lang="en-US" sz="1600" i="1" dirty="0">
                 <a:solidFill>
                   <a:srgbClr val="CADCFC"/>
                 </a:solidFill>
-                <a:latin typeface="Consolas" pitchFamily="34" charset="0"/>
-                <a:ea typeface="Consolas" pitchFamily="34" charset="-122"/>
-                <a:cs typeface="Consolas" pitchFamily="34" charset="-120"/>
-              </a:rPr>
-              <a:t>Code · github.com/shimi777/finllama-sentiment</a:t>
-            </a:r>
-            <a:endParaRPr lang="en-US" sz="1200" dirty="0"/>
-          </a:p>
-        </p:txBody>
-      </p:sp>
-      <p:sp>
-        <p:nvSpPr>
-          <p:cNvPr id="5" name="Text 3"/>
-          <p:cNvSpPr/>
-          <p:nvPr/>
-        </p:nvSpPr>
-        <p:spPr>
-          <a:xfrm>
-            <a:off x="548640" y="4434840"/>
-            <a:ext cx="8046720" cy="365760"/>
+                <a:latin typeface="Calibri" pitchFamily="34" charset="0"/>
+                <a:ea typeface="Calibri" pitchFamily="34" charset="-122"/>
+                <a:cs typeface="Calibri" pitchFamily="34" charset="-120"/>
+              </a:rPr>
+              <a:t>Reproducibility, prompt sensitivity, and what we'd do differently.</a:t>
+            </a:r>
+            <a:endParaRPr lang="en-US" sz="1600" dirty="0"/>
+          </a:p>
+        </p:txBody>
+      </p:sp>
+    </p:spTree>
+  </p:cSld>
+  <p:clrMapOvr>
+    <a:masterClrMapping/>
+  </p:clrMapOvr>
+</p:sld>
+</file>
+
+<file path=ppt/slides/slide27.xml><?xml version="1.0" encoding="utf-8"?>
+<p:sld xmlns:a="http://schemas.openxmlformats.org/drawingml/2006/main" xmlns:r="http://schemas.openxmlformats.org/officeDocument/2006/relationships" xmlns:p="http://schemas.openxmlformats.org/presentationml/2006/main">
+  <p:cSld name="Slide 27">
+    <p:bg>
+      <p:bgPr>
+        <a:solidFill>
+          <a:srgbClr val="FFFFFF"/>
+        </a:solidFill>
+      </p:bgPr>
+    </p:bg>
+    <p:spTree>
+      <p:nvGrpSpPr>
+        <p:cNvPr id="1" name=""/>
+        <p:cNvGrpSpPr/>
+        <p:nvPr/>
+      </p:nvGrpSpPr>
+      <p:grpSpPr>
+        <a:xfrm>
+          <a:off x="0" y="0"/>
+          <a:ext cx="0" cy="0"/>
+          <a:chOff x="0" y="0"/>
+          <a:chExt cx="0" cy="0"/>
+        </a:xfrm>
+      </p:grpSpPr>
+      <p:sp>
+        <p:nvSpPr>
+          <p:cNvPr id="2" name="Shape 0"/>
+          <p:cNvSpPr/>
+          <p:nvPr/>
+        </p:nvSpPr>
+        <p:spPr>
+          <a:xfrm>
+            <a:off x="0" y="0"/>
+            <a:ext cx="9144000" cy="45720"/>
+          </a:xfrm>
+          <a:prstGeom prst="rect">
+            <a:avLst/>
+          </a:prstGeom>
+          <a:solidFill>
+            <a:srgbClr val="1E2761"/>
+          </a:solidFill>
+          <a:ln w="12700">
+            <a:solidFill>
+              <a:srgbClr val="1E2761"/>
+            </a:solidFill>
+            <a:prstDash val="solid"/>
+          </a:ln>
+        </p:spPr>
+      </p:sp>
+      <p:sp>
+        <p:nvSpPr>
+          <p:cNvPr id="3" name="Text 1"/>
+          <p:cNvSpPr/>
+          <p:nvPr/>
+        </p:nvSpPr>
+        <p:spPr>
+          <a:xfrm>
+            <a:off x="365760" y="4892040"/>
+            <a:ext cx="8412480" cy="228600"/>
           </a:xfrm>
           <a:prstGeom prst="rect">
             <a:avLst/>
@@ -11350,22 +12057,1210 @@
           <a:ln/>
         </p:spPr>
         <p:txBody>
-          <a:bodyPr wrap="square" lIns="0" tIns="0" rIns="0" bIns="0" rtlCol="0" anchor="ctr"/>
+          <a:bodyPr wrap="square" rtlCol="0" anchor="ctr"/>
           <a:lstStyle/>
           <a:p>
             <a:pPr indent="0" marL="0">
               <a:buNone/>
             </a:pPr>
             <a:r>
+              <a:rPr lang="en-US" sz="900" dirty="0">
+                <a:solidFill>
+                  <a:srgbClr val="64748B"/>
+                </a:solidFill>
+                <a:latin typeface="Calibri" pitchFamily="34" charset="0"/>
+                <a:ea typeface="Calibri" pitchFamily="34" charset="-122"/>
+                <a:cs typeface="Calibri" pitchFamily="34" charset="-120"/>
+              </a:rPr>
+              <a:t>LLMs in Finance Seminar  ·  Implementation Presentation</a:t>
+            </a:r>
+            <a:endParaRPr lang="en-US" sz="900" dirty="0"/>
+          </a:p>
+        </p:txBody>
+      </p:sp>
+      <p:sp>
+        <p:nvSpPr>
+          <p:cNvPr id="4" name="Text 2"/>
+          <p:cNvSpPr/>
+          <p:nvPr/>
+        </p:nvSpPr>
+        <p:spPr>
+          <a:xfrm>
+            <a:off x="365760" y="228600"/>
+            <a:ext cx="8412480" cy="548640"/>
+          </a:xfrm>
+          <a:prstGeom prst="rect">
+            <a:avLst/>
+          </a:prstGeom>
+          <a:noFill/>
+          <a:ln/>
+        </p:spPr>
+        <p:txBody>
+          <a:bodyPr wrap="square" lIns="0" tIns="0" rIns="0" bIns="0" rtlCol="0" anchor="ctr"/>
+          <a:lstStyle/>
+          <a:p>
+            <a:pPr indent="0" marL="0">
+              <a:buNone/>
+            </a:pPr>
+            <a:r>
+              <a:rPr lang="en-US" sz="2600" b="1" dirty="0">
+                <a:solidFill>
+                  <a:srgbClr val="1E2761"/>
+                </a:solidFill>
+                <a:latin typeface="Calibri" pitchFamily="34" charset="0"/>
+                <a:ea typeface="Calibri" pitchFamily="34" charset="-122"/>
+                <a:cs typeface="Calibri" pitchFamily="34" charset="-120"/>
+              </a:rPr>
+              <a:t>Five lessons</a:t>
+            </a:r>
+            <a:endParaRPr lang="en-US" sz="2600" dirty="0"/>
+          </a:p>
+        </p:txBody>
+      </p:sp>
+      <p:sp>
+        <p:nvSpPr>
+          <p:cNvPr id="5" name="Shape 3"/>
+          <p:cNvSpPr/>
+          <p:nvPr/>
+        </p:nvSpPr>
+        <p:spPr>
+          <a:xfrm>
+            <a:off x="457200" y="1280160"/>
+            <a:ext cx="8229600" cy="603504"/>
+          </a:xfrm>
+          <a:prstGeom prst="rect">
+            <a:avLst/>
+          </a:prstGeom>
+          <a:solidFill>
+            <a:srgbClr val="FFFFFF"/>
+          </a:solidFill>
+          <a:ln w="12700">
+            <a:solidFill>
+              <a:srgbClr val="CADCFC"/>
+            </a:solidFill>
+            <a:prstDash val="solid"/>
+          </a:ln>
+        </p:spPr>
+      </p:sp>
+      <p:sp>
+        <p:nvSpPr>
+          <p:cNvPr id="6" name="Shape 4"/>
+          <p:cNvSpPr/>
+          <p:nvPr/>
+        </p:nvSpPr>
+        <p:spPr>
+          <a:xfrm>
+            <a:off x="457200" y="1280160"/>
+            <a:ext cx="73152" cy="603504"/>
+          </a:xfrm>
+          <a:prstGeom prst="rect">
+            <a:avLst/>
+          </a:prstGeom>
+          <a:solidFill>
+            <a:srgbClr val="1E2761"/>
+          </a:solidFill>
+          <a:ln w="12700">
+            <a:solidFill>
+              <a:srgbClr val="1E2761"/>
+            </a:solidFill>
+            <a:prstDash val="solid"/>
+          </a:ln>
+        </p:spPr>
+      </p:sp>
+      <p:sp>
+        <p:nvSpPr>
+          <p:cNvPr id="7" name="Text 5"/>
+          <p:cNvSpPr/>
+          <p:nvPr/>
+        </p:nvSpPr>
+        <p:spPr>
+          <a:xfrm>
+            <a:off x="640080" y="1316736"/>
+            <a:ext cx="7955280" cy="256032"/>
+          </a:xfrm>
+          <a:prstGeom prst="rect">
+            <a:avLst/>
+          </a:prstGeom>
+          <a:noFill/>
+          <a:ln/>
+        </p:spPr>
+        <p:txBody>
+          <a:bodyPr wrap="square" lIns="0" tIns="0" rIns="0" bIns="0" rtlCol="0" anchor="ctr"/>
+          <a:lstStyle/>
+          <a:p>
+            <a:pPr indent="0" marL="0">
+              <a:buNone/>
+            </a:pPr>
+            <a:r>
+              <a:rPr lang="en-US" sz="1300" b="1" dirty="0">
+                <a:solidFill>
+                  <a:srgbClr val="1E2761"/>
+                </a:solidFill>
+                <a:latin typeface="Calibri" pitchFamily="34" charset="0"/>
+                <a:ea typeface="Calibri" pitchFamily="34" charset="-122"/>
+                <a:cs typeface="Calibri" pitchFamily="34" charset="-120"/>
+              </a:rPr>
+              <a:t>Reproducibility cost is real</a:t>
+            </a:r>
+            <a:endParaRPr lang="en-US" sz="1300" dirty="0"/>
+          </a:p>
+        </p:txBody>
+      </p:sp>
+      <p:sp>
+        <p:nvSpPr>
+          <p:cNvPr id="8" name="Text 6"/>
+          <p:cNvSpPr/>
+          <p:nvPr/>
+        </p:nvSpPr>
+        <p:spPr>
+          <a:xfrm>
+            <a:off x="640080" y="1572768"/>
+            <a:ext cx="7955280" cy="292608"/>
+          </a:xfrm>
+          <a:prstGeom prst="rect">
+            <a:avLst/>
+          </a:prstGeom>
+          <a:noFill/>
+          <a:ln/>
+        </p:spPr>
+        <p:txBody>
+          <a:bodyPr wrap="square" lIns="0" tIns="0" rIns="0" bIns="0" rtlCol="0" anchor="ctr"/>
+          <a:lstStyle/>
+          <a:p>
+            <a:pPr indent="0" marL="0">
+              <a:buNone/>
+            </a:pPr>
+            <a:r>
+              <a:rPr lang="en-US" sz="1050" dirty="0">
+                <a:solidFill>
+                  <a:srgbClr val="1E293B"/>
+                </a:solidFill>
+                <a:latin typeface="Calibri" pitchFamily="34" charset="0"/>
+                <a:ea typeface="Calibri" pitchFamily="34" charset="-122"/>
+                <a:cs typeface="Calibri" pitchFamily="34" charset="-120"/>
+              </a:rPr>
+              <a:t>Notebook → script split, run-dir schema with checkpoint/resume, parser as a tested module, Modal Volume for cached weights — without these, a 24-run matrix isn't redoable.</a:t>
+            </a:r>
+            <a:endParaRPr lang="en-US" sz="1050" dirty="0"/>
+          </a:p>
+        </p:txBody>
+      </p:sp>
+      <p:sp>
+        <p:nvSpPr>
+          <p:cNvPr id="9" name="Shape 7"/>
+          <p:cNvSpPr/>
+          <p:nvPr/>
+        </p:nvSpPr>
+        <p:spPr>
+          <a:xfrm>
+            <a:off x="457200" y="1956816"/>
+            <a:ext cx="8229600" cy="603504"/>
+          </a:xfrm>
+          <a:prstGeom prst="rect">
+            <a:avLst/>
+          </a:prstGeom>
+          <a:solidFill>
+            <a:srgbClr val="FFFFFF"/>
+          </a:solidFill>
+          <a:ln w="12700">
+            <a:solidFill>
+              <a:srgbClr val="CADCFC"/>
+            </a:solidFill>
+            <a:prstDash val="solid"/>
+          </a:ln>
+        </p:spPr>
+      </p:sp>
+      <p:sp>
+        <p:nvSpPr>
+          <p:cNvPr id="10" name="Shape 8"/>
+          <p:cNvSpPr/>
+          <p:nvPr/>
+        </p:nvSpPr>
+        <p:spPr>
+          <a:xfrm>
+            <a:off x="457200" y="1956816"/>
+            <a:ext cx="73152" cy="603504"/>
+          </a:xfrm>
+          <a:prstGeom prst="rect">
+            <a:avLst/>
+          </a:prstGeom>
+          <a:solidFill>
+            <a:srgbClr val="1E2761"/>
+          </a:solidFill>
+          <a:ln w="12700">
+            <a:solidFill>
+              <a:srgbClr val="1E2761"/>
+            </a:solidFill>
+            <a:prstDash val="solid"/>
+          </a:ln>
+        </p:spPr>
+      </p:sp>
+      <p:sp>
+        <p:nvSpPr>
+          <p:cNvPr id="11" name="Text 9"/>
+          <p:cNvSpPr/>
+          <p:nvPr/>
+        </p:nvSpPr>
+        <p:spPr>
+          <a:xfrm>
+            <a:off x="640080" y="1993392"/>
+            <a:ext cx="7955280" cy="256032"/>
+          </a:xfrm>
+          <a:prstGeom prst="rect">
+            <a:avLst/>
+          </a:prstGeom>
+          <a:noFill/>
+          <a:ln/>
+        </p:spPr>
+        <p:txBody>
+          <a:bodyPr wrap="square" lIns="0" tIns="0" rIns="0" bIns="0" rtlCol="0" anchor="ctr"/>
+          <a:lstStyle/>
+          <a:p>
+            <a:pPr indent="0" marL="0">
+              <a:buNone/>
+            </a:pPr>
+            <a:r>
+              <a:rPr lang="en-US" sz="1300" b="1" dirty="0">
+                <a:solidFill>
+                  <a:srgbClr val="1E2761"/>
+                </a:solidFill>
+                <a:latin typeface="Calibri" pitchFamily="34" charset="0"/>
+                <a:ea typeface="Calibri" pitchFamily="34" charset="-122"/>
+                <a:cs typeface="Calibri" pitchFamily="34" charset="-120"/>
+              </a:rPr>
+              <a:t>Models can vanish</a:t>
+            </a:r>
+            <a:endParaRPr lang="en-US" sz="1300" dirty="0"/>
+          </a:p>
+        </p:txBody>
+      </p:sp>
+      <p:sp>
+        <p:nvSpPr>
+          <p:cNvPr id="12" name="Text 10"/>
+          <p:cNvSpPr/>
+          <p:nvPr/>
+        </p:nvSpPr>
+        <p:spPr>
+          <a:xfrm>
+            <a:off x="640080" y="2249424"/>
+            <a:ext cx="7955280" cy="292608"/>
+          </a:xfrm>
+          <a:prstGeom prst="rect">
+            <a:avLst/>
+          </a:prstGeom>
+          <a:noFill/>
+          <a:ln/>
+        </p:spPr>
+        <p:txBody>
+          <a:bodyPr wrap="square" lIns="0" tIns="0" rIns="0" bIns="0" rtlCol="0" anchor="ctr"/>
+          <a:lstStyle/>
+          <a:p>
+            <a:pPr indent="0" marL="0">
+              <a:buNone/>
+            </a:pPr>
+            <a:r>
+              <a:rPr lang="en-US" sz="1050" dirty="0">
+                <a:solidFill>
+                  <a:srgbClr val="1E293B"/>
+                </a:solidFill>
+                <a:latin typeface="Calibri" pitchFamily="34" charset="0"/>
+                <a:ea typeface="Calibri" pitchFamily="34" charset="-122"/>
+                <a:cs typeface="Calibri" pitchFamily="34" charset="-120"/>
+              </a:rPr>
+              <a:t>TheFinAI/FinLLaMA-instruct was unpublished between paper and our run. Benchmark results are only as durable as the artifacts they reference.</a:t>
+            </a:r>
+            <a:endParaRPr lang="en-US" sz="1050" dirty="0"/>
+          </a:p>
+        </p:txBody>
+      </p:sp>
+      <p:sp>
+        <p:nvSpPr>
+          <p:cNvPr id="13" name="Shape 11"/>
+          <p:cNvSpPr/>
+          <p:nvPr/>
+        </p:nvSpPr>
+        <p:spPr>
+          <a:xfrm>
+            <a:off x="457200" y="2633472"/>
+            <a:ext cx="8229600" cy="603504"/>
+          </a:xfrm>
+          <a:prstGeom prst="rect">
+            <a:avLst/>
+          </a:prstGeom>
+          <a:solidFill>
+            <a:srgbClr val="FFFFFF"/>
+          </a:solidFill>
+          <a:ln w="12700">
+            <a:solidFill>
+              <a:srgbClr val="CADCFC"/>
+            </a:solidFill>
+            <a:prstDash val="solid"/>
+          </a:ln>
+        </p:spPr>
+      </p:sp>
+      <p:sp>
+        <p:nvSpPr>
+          <p:cNvPr id="14" name="Shape 12"/>
+          <p:cNvSpPr/>
+          <p:nvPr/>
+        </p:nvSpPr>
+        <p:spPr>
+          <a:xfrm>
+            <a:off x="457200" y="2633472"/>
+            <a:ext cx="73152" cy="603504"/>
+          </a:xfrm>
+          <a:prstGeom prst="rect">
+            <a:avLst/>
+          </a:prstGeom>
+          <a:solidFill>
+            <a:srgbClr val="1E2761"/>
+          </a:solidFill>
+          <a:ln w="12700">
+            <a:solidFill>
+              <a:srgbClr val="1E2761"/>
+            </a:solidFill>
+            <a:prstDash val="solid"/>
+          </a:ln>
+        </p:spPr>
+      </p:sp>
+      <p:sp>
+        <p:nvSpPr>
+          <p:cNvPr id="15" name="Text 13"/>
+          <p:cNvSpPr/>
+          <p:nvPr/>
+        </p:nvSpPr>
+        <p:spPr>
+          <a:xfrm>
+            <a:off x="640080" y="2670048"/>
+            <a:ext cx="7955280" cy="256032"/>
+          </a:xfrm>
+          <a:prstGeom prst="rect">
+            <a:avLst/>
+          </a:prstGeom>
+          <a:noFill/>
+          <a:ln/>
+        </p:spPr>
+        <p:txBody>
+          <a:bodyPr wrap="square" lIns="0" tIns="0" rIns="0" bIns="0" rtlCol="0" anchor="ctr"/>
+          <a:lstStyle/>
+          <a:p>
+            <a:pPr indent="0" marL="0">
+              <a:buNone/>
+            </a:pPr>
+            <a:r>
+              <a:rPr lang="en-US" sz="1300" b="1" dirty="0">
+                <a:solidFill>
+                  <a:srgbClr val="1E2761"/>
+                </a:solidFill>
+                <a:latin typeface="Calibri" pitchFamily="34" charset="0"/>
+                <a:ea typeface="Calibri" pitchFamily="34" charset="-122"/>
+                <a:cs typeface="Calibri" pitchFamily="34" charset="-120"/>
+              </a:rPr>
+              <a:t>Prompt sensitivity ≥ model choice (often)</a:t>
+            </a:r>
+            <a:endParaRPr lang="en-US" sz="1300" dirty="0"/>
+          </a:p>
+        </p:txBody>
+      </p:sp>
+      <p:sp>
+        <p:nvSpPr>
+          <p:cNvPr id="16" name="Text 14"/>
+          <p:cNvSpPr/>
+          <p:nvPr/>
+        </p:nvSpPr>
+        <p:spPr>
+          <a:xfrm>
+            <a:off x="640080" y="2926080"/>
+            <a:ext cx="7955280" cy="292608"/>
+          </a:xfrm>
+          <a:prstGeom prst="rect">
+            <a:avLst/>
+          </a:prstGeom>
+          <a:noFill/>
+          <a:ln/>
+        </p:spPr>
+        <p:txBody>
+          <a:bodyPr wrap="square" lIns="0" tIns="0" rIns="0" bIns="0" rtlCol="0" anchor="ctr"/>
+          <a:lstStyle/>
+          <a:p>
+            <a:pPr indent="0" marL="0">
+              <a:buNone/>
+            </a:pPr>
+            <a:r>
+              <a:rPr lang="en-US" sz="1050" dirty="0">
+                <a:solidFill>
+                  <a:srgbClr val="1E293B"/>
+                </a:solidFill>
+                <a:latin typeface="Calibri" pitchFamily="34" charset="0"/>
+                <a:ea typeface="Calibri" pitchFamily="34" charset="-122"/>
+                <a:cs typeface="Calibri" pitchFamily="34" charset="-120"/>
+              </a:rPr>
+              <a:t>ΔF1 between Template A and B was up to 16 points on the same model and dataset — comparable to gaps between models. Single-prompt LLM benchmarks should not be trusted.</a:t>
+            </a:r>
+            <a:endParaRPr lang="en-US" sz="1050" dirty="0"/>
+          </a:p>
+        </p:txBody>
+      </p:sp>
+      <p:sp>
+        <p:nvSpPr>
+          <p:cNvPr id="17" name="Shape 15"/>
+          <p:cNvSpPr/>
+          <p:nvPr/>
+        </p:nvSpPr>
+        <p:spPr>
+          <a:xfrm>
+            <a:off x="457200" y="3310128"/>
+            <a:ext cx="8229600" cy="603504"/>
+          </a:xfrm>
+          <a:prstGeom prst="rect">
+            <a:avLst/>
+          </a:prstGeom>
+          <a:solidFill>
+            <a:srgbClr val="FFFFFF"/>
+          </a:solidFill>
+          <a:ln w="12700">
+            <a:solidFill>
+              <a:srgbClr val="CADCFC"/>
+            </a:solidFill>
+            <a:prstDash val="solid"/>
+          </a:ln>
+        </p:spPr>
+      </p:sp>
+      <p:sp>
+        <p:nvSpPr>
+          <p:cNvPr id="18" name="Shape 16"/>
+          <p:cNvSpPr/>
+          <p:nvPr/>
+        </p:nvSpPr>
+        <p:spPr>
+          <a:xfrm>
+            <a:off x="457200" y="3310128"/>
+            <a:ext cx="73152" cy="603504"/>
+          </a:xfrm>
+          <a:prstGeom prst="rect">
+            <a:avLst/>
+          </a:prstGeom>
+          <a:solidFill>
+            <a:srgbClr val="1E2761"/>
+          </a:solidFill>
+          <a:ln w="12700">
+            <a:solidFill>
+              <a:srgbClr val="1E2761"/>
+            </a:solidFill>
+            <a:prstDash val="solid"/>
+          </a:ln>
+        </p:spPr>
+      </p:sp>
+      <p:sp>
+        <p:nvSpPr>
+          <p:cNvPr id="19" name="Text 17"/>
+          <p:cNvSpPr/>
+          <p:nvPr/>
+        </p:nvSpPr>
+        <p:spPr>
+          <a:xfrm>
+            <a:off x="640080" y="3346704"/>
+            <a:ext cx="7955280" cy="256032"/>
+          </a:xfrm>
+          <a:prstGeom prst="rect">
+            <a:avLst/>
+          </a:prstGeom>
+          <a:noFill/>
+          <a:ln/>
+        </p:spPr>
+        <p:txBody>
+          <a:bodyPr wrap="square" lIns="0" tIns="0" rIns="0" bIns="0" rtlCol="0" anchor="ctr"/>
+          <a:lstStyle/>
+          <a:p>
+            <a:pPr indent="0" marL="0">
+              <a:buNone/>
+            </a:pPr>
+            <a:r>
+              <a:rPr lang="en-US" sz="1300" b="1" dirty="0">
+                <a:solidFill>
+                  <a:srgbClr val="1E2761"/>
+                </a:solidFill>
+                <a:latin typeface="Calibri" pitchFamily="34" charset="0"/>
+                <a:ea typeface="Calibri" pitchFamily="34" charset="-122"/>
+                <a:cs typeface="Calibri" pitchFamily="34" charset="-120"/>
+              </a:rPr>
+              <a:t>Coverage matters more than people report</a:t>
+            </a:r>
+            <a:endParaRPr lang="en-US" sz="1300" dirty="0"/>
+          </a:p>
+        </p:txBody>
+      </p:sp>
+      <p:sp>
+        <p:nvSpPr>
+          <p:cNvPr id="20" name="Text 18"/>
+          <p:cNvSpPr/>
+          <p:nvPr/>
+        </p:nvSpPr>
+        <p:spPr>
+          <a:xfrm>
+            <a:off x="640080" y="3602736"/>
+            <a:ext cx="7955280" cy="292608"/>
+          </a:xfrm>
+          <a:prstGeom prst="rect">
+            <a:avLst/>
+          </a:prstGeom>
+          <a:noFill/>
+          <a:ln/>
+        </p:spPr>
+        <p:txBody>
+          <a:bodyPr wrap="square" lIns="0" tIns="0" rIns="0" bIns="0" rtlCol="0" anchor="ctr"/>
+          <a:lstStyle/>
+          <a:p>
+            <a:pPr indent="0" marL="0">
+              <a:buNone/>
+            </a:pPr>
+            <a:r>
+              <a:rPr lang="en-US" sz="1050" dirty="0">
+                <a:solidFill>
+                  <a:srgbClr val="1E293B"/>
+                </a:solidFill>
+                <a:latin typeface="Calibri" pitchFamily="34" charset="0"/>
+                <a:ea typeface="Calibri" pitchFamily="34" charset="-122"/>
+                <a:cs typeface="Calibri" pitchFamily="34" charset="-120"/>
+              </a:rPr>
+              <a:t>Force-mapping plutus-8B's unparsed outputs to 'neutral' would overstate accuracy by up to 1.25 points (FPB, Template A, 3-shot). Most papers don't report it.</a:t>
+            </a:r>
+            <a:endParaRPr lang="en-US" sz="1050" dirty="0"/>
+          </a:p>
+        </p:txBody>
+      </p:sp>
+      <p:sp>
+        <p:nvSpPr>
+          <p:cNvPr id="21" name="Shape 19"/>
+          <p:cNvSpPr/>
+          <p:nvPr/>
+        </p:nvSpPr>
+        <p:spPr>
+          <a:xfrm>
+            <a:off x="457200" y="3986784"/>
+            <a:ext cx="8229600" cy="603504"/>
+          </a:xfrm>
+          <a:prstGeom prst="rect">
+            <a:avLst/>
+          </a:prstGeom>
+          <a:solidFill>
+            <a:srgbClr val="FFFFFF"/>
+          </a:solidFill>
+          <a:ln w="12700">
+            <a:solidFill>
+              <a:srgbClr val="CADCFC"/>
+            </a:solidFill>
+            <a:prstDash val="solid"/>
+          </a:ln>
+        </p:spPr>
+      </p:sp>
+      <p:sp>
+        <p:nvSpPr>
+          <p:cNvPr id="22" name="Shape 20"/>
+          <p:cNvSpPr/>
+          <p:nvPr/>
+        </p:nvSpPr>
+        <p:spPr>
+          <a:xfrm>
+            <a:off x="457200" y="3986784"/>
+            <a:ext cx="73152" cy="603504"/>
+          </a:xfrm>
+          <a:prstGeom prst="rect">
+            <a:avLst/>
+          </a:prstGeom>
+          <a:solidFill>
+            <a:srgbClr val="1E2761"/>
+          </a:solidFill>
+          <a:ln w="12700">
+            <a:solidFill>
+              <a:srgbClr val="1E2761"/>
+            </a:solidFill>
+            <a:prstDash val="solid"/>
+          </a:ln>
+        </p:spPr>
+      </p:sp>
+      <p:sp>
+        <p:nvSpPr>
+          <p:cNvPr id="23" name="Text 21"/>
+          <p:cNvSpPr/>
+          <p:nvPr/>
+        </p:nvSpPr>
+        <p:spPr>
+          <a:xfrm>
+            <a:off x="640080" y="4023360"/>
+            <a:ext cx="7955280" cy="256032"/>
+          </a:xfrm>
+          <a:prstGeom prst="rect">
+            <a:avLst/>
+          </a:prstGeom>
+          <a:noFill/>
+          <a:ln/>
+        </p:spPr>
+        <p:txBody>
+          <a:bodyPr wrap="square" lIns="0" tIns="0" rIns="0" bIns="0" rtlCol="0" anchor="ctr"/>
+          <a:lstStyle/>
+          <a:p>
+            <a:pPr indent="0" marL="0">
+              <a:buNone/>
+            </a:pPr>
+            <a:r>
+              <a:rPr lang="en-US" sz="1300" b="1" dirty="0">
+                <a:solidFill>
+                  <a:srgbClr val="1E2761"/>
+                </a:solidFill>
+                <a:latin typeface="Calibri" pitchFamily="34" charset="0"/>
+                <a:ea typeface="Calibri" pitchFamily="34" charset="-122"/>
+                <a:cs typeface="Calibri" pitchFamily="34" charset="-120"/>
+              </a:rPr>
+              <a:t>Data leakage caveat</a:t>
+            </a:r>
+            <a:endParaRPr lang="en-US" sz="1300" dirty="0"/>
+          </a:p>
+        </p:txBody>
+      </p:sp>
+      <p:sp>
+        <p:nvSpPr>
+          <p:cNvPr id="24" name="Text 22"/>
+          <p:cNvSpPr/>
+          <p:nvPr/>
+        </p:nvSpPr>
+        <p:spPr>
+          <a:xfrm>
+            <a:off x="640080" y="4279392"/>
+            <a:ext cx="7955280" cy="292608"/>
+          </a:xfrm>
+          <a:prstGeom prst="rect">
+            <a:avLst/>
+          </a:prstGeom>
+          <a:noFill/>
+          <a:ln/>
+        </p:spPr>
+        <p:txBody>
+          <a:bodyPr wrap="square" lIns="0" tIns="0" rIns="0" bIns="0" rtlCol="0" anchor="ctr"/>
+          <a:lstStyle/>
+          <a:p>
+            <a:pPr indent="0" marL="0">
+              <a:buNone/>
+            </a:pPr>
+            <a:r>
+              <a:rPr lang="en-US" sz="1050" dirty="0">
+                <a:solidFill>
+                  <a:srgbClr val="1E293B"/>
+                </a:solidFill>
+                <a:latin typeface="Calibri" pitchFamily="34" charset="0"/>
+                <a:ea typeface="Calibri" pitchFamily="34" charset="-122"/>
+                <a:cs typeface="Calibri" pitchFamily="34" charset="-120"/>
+              </a:rPr>
+              <a:t>FPB (2014) and FiQA (2018) almost certainly leaked into pretraining. Numbers here are an upper bound on real-world generalisation — a 2025 hold-out would be the honest test.</a:t>
+            </a:r>
+            <a:endParaRPr lang="en-US" sz="1050" dirty="0"/>
+          </a:p>
+        </p:txBody>
+      </p:sp>
+    </p:spTree>
+  </p:cSld>
+  <p:clrMapOvr>
+    <a:masterClrMapping/>
+  </p:clrMapOvr>
+</p:sld>
+</file>
+
+<file path=ppt/slides/slide28.xml><?xml version="1.0" encoding="utf-8"?>
+<p:sld xmlns:a="http://schemas.openxmlformats.org/drawingml/2006/main" xmlns:r="http://schemas.openxmlformats.org/officeDocument/2006/relationships" xmlns:p="http://schemas.openxmlformats.org/presentationml/2006/main">
+  <p:cSld name="Slide 28">
+    <p:bg>
+      <p:bgPr>
+        <a:solidFill>
+          <a:srgbClr val="FFFFFF"/>
+        </a:solidFill>
+      </p:bgPr>
+    </p:bg>
+    <p:spTree>
+      <p:nvGrpSpPr>
+        <p:cNvPr id="1" name=""/>
+        <p:cNvGrpSpPr/>
+        <p:nvPr/>
+      </p:nvGrpSpPr>
+      <p:grpSpPr>
+        <a:xfrm>
+          <a:off x="0" y="0"/>
+          <a:ext cx="0" cy="0"/>
+          <a:chOff x="0" y="0"/>
+          <a:chExt cx="0" cy="0"/>
+        </a:xfrm>
+      </p:grpSpPr>
+      <p:sp>
+        <p:nvSpPr>
+          <p:cNvPr id="2" name="Shape 0"/>
+          <p:cNvSpPr/>
+          <p:nvPr/>
+        </p:nvSpPr>
+        <p:spPr>
+          <a:xfrm>
+            <a:off x="0" y="0"/>
+            <a:ext cx="9144000" cy="45720"/>
+          </a:xfrm>
+          <a:prstGeom prst="rect">
+            <a:avLst/>
+          </a:prstGeom>
+          <a:solidFill>
+            <a:srgbClr val="1E2761"/>
+          </a:solidFill>
+          <a:ln w="12700">
+            <a:solidFill>
+              <a:srgbClr val="1E2761"/>
+            </a:solidFill>
+            <a:prstDash val="solid"/>
+          </a:ln>
+        </p:spPr>
+      </p:sp>
+      <p:sp>
+        <p:nvSpPr>
+          <p:cNvPr id="3" name="Text 1"/>
+          <p:cNvSpPr/>
+          <p:nvPr/>
+        </p:nvSpPr>
+        <p:spPr>
+          <a:xfrm>
+            <a:off x="365760" y="4892040"/>
+            <a:ext cx="8412480" cy="228600"/>
+          </a:xfrm>
+          <a:prstGeom prst="rect">
+            <a:avLst/>
+          </a:prstGeom>
+          <a:noFill/>
+          <a:ln/>
+        </p:spPr>
+        <p:txBody>
+          <a:bodyPr wrap="square" rtlCol="0" anchor="ctr"/>
+          <a:lstStyle/>
+          <a:p>
+            <a:pPr indent="0" marL="0">
+              <a:buNone/>
+            </a:pPr>
+            <a:r>
+              <a:rPr lang="en-US" sz="900" dirty="0">
+                <a:solidFill>
+                  <a:srgbClr val="64748B"/>
+                </a:solidFill>
+                <a:latin typeface="Calibri" pitchFamily="34" charset="0"/>
+                <a:ea typeface="Calibri" pitchFamily="34" charset="-122"/>
+                <a:cs typeface="Calibri" pitchFamily="34" charset="-120"/>
+              </a:rPr>
+              <a:t>LLMs in Finance Seminar  ·  Implementation Presentation</a:t>
+            </a:r>
+            <a:endParaRPr lang="en-US" sz="900" dirty="0"/>
+          </a:p>
+        </p:txBody>
+      </p:sp>
+      <p:sp>
+        <p:nvSpPr>
+          <p:cNvPr id="4" name="Text 2"/>
+          <p:cNvSpPr/>
+          <p:nvPr/>
+        </p:nvSpPr>
+        <p:spPr>
+          <a:xfrm>
+            <a:off x="365760" y="228600"/>
+            <a:ext cx="8412480" cy="548640"/>
+          </a:xfrm>
+          <a:prstGeom prst="rect">
+            <a:avLst/>
+          </a:prstGeom>
+          <a:noFill/>
+          <a:ln/>
+        </p:spPr>
+        <p:txBody>
+          <a:bodyPr wrap="square" lIns="0" tIns="0" rIns="0" bIns="0" rtlCol="0" anchor="ctr"/>
+          <a:lstStyle/>
+          <a:p>
+            <a:pPr indent="0" marL="0">
+              <a:buNone/>
+            </a:pPr>
+            <a:r>
+              <a:rPr lang="en-US" sz="2600" b="1" dirty="0">
+                <a:solidFill>
+                  <a:srgbClr val="1E2761"/>
+                </a:solidFill>
+                <a:latin typeface="Calibri" pitchFamily="34" charset="0"/>
+                <a:ea typeface="Calibri" pitchFamily="34" charset="-122"/>
+                <a:cs typeface="Calibri" pitchFamily="34" charset="-120"/>
+              </a:rPr>
+              <a:t>What we'd do differently</a:t>
+            </a:r>
+            <a:endParaRPr lang="en-US" sz="2600" dirty="0"/>
+          </a:p>
+        </p:txBody>
+      </p:sp>
+      <p:sp>
+        <p:nvSpPr>
+          <p:cNvPr id="5" name="Text 3"/>
+          <p:cNvSpPr/>
+          <p:nvPr/>
+        </p:nvSpPr>
+        <p:spPr>
+          <a:xfrm>
+            <a:off x="457200" y="1463040"/>
+            <a:ext cx="8229600" cy="2743200"/>
+          </a:xfrm>
+          <a:prstGeom prst="rect">
+            <a:avLst/>
+          </a:prstGeom>
+          <a:noFill/>
+          <a:ln/>
+        </p:spPr>
+        <p:txBody>
+          <a:bodyPr wrap="square" rtlCol="0" anchor="t"/>
+          <a:lstStyle/>
+          <a:p>
+            <a:pPr marL="342900" indent="-342900">
+              <a:spcAft>
+                <a:spcPts val="600"/>
+              </a:spcAft>
+              <a:buSzPct val="100000"/>
+              <a:buChar char="•"/>
+            </a:pPr>
+            <a:r>
+              <a:rPr lang="en-US" sz="1400" dirty="0">
+                <a:solidFill>
+                  <a:srgbClr val="1E293B"/>
+                </a:solidFill>
+                <a:latin typeface="Calibri" pitchFamily="34" charset="0"/>
+                <a:ea typeface="Calibri" pitchFamily="34" charset="-122"/>
+                <a:cs typeface="Calibri" pitchFamily="34" charset="-120"/>
+              </a:rPr>
+              <a:t>Build a 2025 financial-news held-out set to break leakage from FPB/FiQA pretraining</a:t>
+            </a:r>
+            <a:endParaRPr lang="en-US" sz="1400" dirty="0"/>
+          </a:p>
+          <a:p>
+            <a:pPr marL="342900" indent="-342900">
+              <a:spcAft>
+                <a:spcPts val="600"/>
+              </a:spcAft>
+              <a:buSzPct val="100000"/>
+              <a:buChar char="•"/>
+            </a:pPr>
+            <a:r>
+              <a:rPr lang="en-US" sz="1400" dirty="0">
+                <a:solidFill>
+                  <a:srgbClr val="1E293B"/>
+                </a:solidFill>
+                <a:latin typeface="Calibri" pitchFamily="34" charset="0"/>
+                <a:ea typeface="Calibri" pitchFamily="34" charset="-122"/>
+                <a:cs typeface="Calibri" pitchFamily="34" charset="-120"/>
+              </a:rPr>
+              <a:t>Run three or four prompt templates instead of two — make sensitivity even more legible</a:t>
+            </a:r>
+            <a:endParaRPr lang="en-US" sz="1400" dirty="0"/>
+          </a:p>
+          <a:p>
+            <a:pPr marL="342900" indent="-342900">
+              <a:spcAft>
+                <a:spcPts val="600"/>
+              </a:spcAft>
+              <a:buSzPct val="100000"/>
+              <a:buChar char="•"/>
+            </a:pPr>
+            <a:r>
+              <a:rPr lang="en-US" sz="1400" dirty="0">
+                <a:solidFill>
+                  <a:srgbClr val="1E293B"/>
+                </a:solidFill>
+                <a:latin typeface="Calibri" pitchFamily="34" charset="0"/>
+                <a:ea typeface="Calibri" pitchFamily="34" charset="-122"/>
+                <a:cs typeface="Calibri" pitchFamily="34" charset="-120"/>
+              </a:rPr>
+              <a:t>Add an LLM-as-judge sanity pass over a 100-sample slice — catch label noise</a:t>
+            </a:r>
+            <a:endParaRPr lang="en-US" sz="1400" dirty="0"/>
+          </a:p>
+          <a:p>
+            <a:pPr marL="342900" indent="-342900">
+              <a:spcAft>
+                <a:spcPts val="600"/>
+              </a:spcAft>
+              <a:buSzPct val="100000"/>
+              <a:buChar char="•"/>
+            </a:pPr>
+            <a:r>
+              <a:rPr lang="en-US" sz="1400" dirty="0">
+                <a:solidFill>
+                  <a:srgbClr val="1E293B"/>
+                </a:solidFill>
+                <a:latin typeface="Calibri" pitchFamily="34" charset="0"/>
+                <a:ea typeface="Calibri" pitchFamily="34" charset="-122"/>
+                <a:cs typeface="Calibri" pitchFamily="34" charset="-120"/>
+              </a:rPr>
+              <a:t>Try few-shot examples drawn from the same dataset as the test (when available) — closer to real deployment</a:t>
+            </a:r>
+            <a:endParaRPr lang="en-US" sz="1400" dirty="0"/>
+          </a:p>
+          <a:p>
+            <a:pPr marL="342900" indent="-342900">
+              <a:spcAft>
+                <a:spcPts val="600"/>
+              </a:spcAft>
+              <a:buSzPct val="100000"/>
+              <a:buChar char="•"/>
+            </a:pPr>
+            <a:r>
+              <a:rPr lang="en-US" sz="1400" dirty="0">
+                <a:solidFill>
+                  <a:srgbClr val="1E293B"/>
+                </a:solidFill>
+                <a:latin typeface="Calibri" pitchFamily="34" charset="0"/>
+                <a:ea typeface="Calibri" pitchFamily="34" charset="-122"/>
+                <a:cs typeface="Calibri" pitchFamily="34" charset="-120"/>
+              </a:rPr>
+              <a:t>Include a smaller financial model (e.g. finma-7b) and a non-financial 8B baseline of the same era for a tighter family comparison</a:t>
+            </a:r>
+            <a:endParaRPr lang="en-US" sz="1400" dirty="0"/>
+          </a:p>
+        </p:txBody>
+      </p:sp>
+    </p:spTree>
+  </p:cSld>
+  <p:clrMapOvr>
+    <a:masterClrMapping/>
+  </p:clrMapOvr>
+</p:sld>
+</file>
+
+<file path=ppt/slides/slide29.xml><?xml version="1.0" encoding="utf-8"?>
+<p:sld xmlns:a="http://schemas.openxmlformats.org/drawingml/2006/main" xmlns:r="http://schemas.openxmlformats.org/officeDocument/2006/relationships" xmlns:p="http://schemas.openxmlformats.org/presentationml/2006/main">
+  <p:cSld name="Slide 29">
+    <p:bg>
+      <p:bgPr>
+        <a:solidFill>
+          <a:srgbClr val="1E2761"/>
+        </a:solidFill>
+      </p:bgPr>
+    </p:bg>
+    <p:spTree>
+      <p:nvGrpSpPr>
+        <p:cNvPr id="1" name=""/>
+        <p:cNvGrpSpPr/>
+        <p:nvPr/>
+      </p:nvGrpSpPr>
+      <p:grpSpPr>
+        <a:xfrm>
+          <a:off x="0" y="0"/>
+          <a:ext cx="0" cy="0"/>
+          <a:chOff x="0" y="0"/>
+          <a:chExt cx="0" cy="0"/>
+        </a:xfrm>
+      </p:grpSpPr>
+      <p:sp>
+        <p:nvSpPr>
+          <p:cNvPr id="2" name="Shape 0"/>
+          <p:cNvSpPr/>
+          <p:nvPr/>
+        </p:nvSpPr>
+        <p:spPr>
+          <a:xfrm>
+            <a:off x="0" y="4206240"/>
+            <a:ext cx="9144000" cy="45720"/>
+          </a:xfrm>
+          <a:prstGeom prst="rect">
+            <a:avLst/>
+          </a:prstGeom>
+          <a:solidFill>
+            <a:srgbClr val="CADCFC"/>
+          </a:solidFill>
+          <a:ln w="12700">
+            <a:solidFill>
+              <a:srgbClr val="CADCFC"/>
+            </a:solidFill>
+            <a:prstDash val="solid"/>
+          </a:ln>
+        </p:spPr>
+      </p:sp>
+      <p:sp>
+        <p:nvSpPr>
+          <p:cNvPr id="3" name="Text 1"/>
+          <p:cNvSpPr/>
+          <p:nvPr/>
+        </p:nvSpPr>
+        <p:spPr>
+          <a:xfrm>
+            <a:off x="548640" y="731520"/>
+            <a:ext cx="8046720" cy="548640"/>
+          </a:xfrm>
+          <a:prstGeom prst="rect">
+            <a:avLst/>
+          </a:prstGeom>
+          <a:noFill/>
+          <a:ln/>
+        </p:spPr>
+        <p:txBody>
+          <a:bodyPr wrap="square" lIns="0" tIns="0" rIns="0" bIns="0" rtlCol="0" anchor="ctr"/>
+          <a:lstStyle/>
+          <a:p>
+            <a:pPr indent="0" marL="0">
+              <a:buNone/>
+            </a:pPr>
+            <a:r>
+              <a:rPr lang="en-US" sz="2200" i="1" dirty="0">
+                <a:solidFill>
+                  <a:srgbClr val="CADCFC"/>
+                </a:solidFill>
+                <a:latin typeface="Calibri" pitchFamily="34" charset="0"/>
+                <a:ea typeface="Calibri" pitchFamily="34" charset="-122"/>
+                <a:cs typeface="Calibri" pitchFamily="34" charset="-120"/>
+              </a:rPr>
+              <a:t>Bottom line</a:t>
+            </a:r>
+            <a:endParaRPr lang="en-US" sz="2200" dirty="0"/>
+          </a:p>
+        </p:txBody>
+      </p:sp>
+      <p:sp>
+        <p:nvSpPr>
+          <p:cNvPr id="4" name="Text 2"/>
+          <p:cNvSpPr/>
+          <p:nvPr/>
+        </p:nvSpPr>
+        <p:spPr>
+          <a:xfrm>
+            <a:off x="548640" y="1463040"/>
+            <a:ext cx="8046720" cy="1645920"/>
+          </a:xfrm>
+          <a:prstGeom prst="rect">
+            <a:avLst/>
+          </a:prstGeom>
+          <a:noFill/>
+          <a:ln/>
+        </p:spPr>
+        <p:txBody>
+          <a:bodyPr wrap="square" lIns="0" tIns="0" rIns="0" bIns="0" rtlCol="0" anchor="ctr"/>
+          <a:lstStyle/>
+          <a:p>
+            <a:pPr indent="0" marL="0">
+              <a:buNone/>
+            </a:pPr>
+            <a:r>
+              <a:rPr lang="en-US" sz="1800" b="1" dirty="0">
+                <a:solidFill>
+                  <a:srgbClr val="FFFFFF"/>
+                </a:solidFill>
+                <a:latin typeface="Calibri" pitchFamily="34" charset="0"/>
+                <a:ea typeface="Calibri" pitchFamily="34" charset="-122"/>
+                <a:cs typeface="Calibri" pitchFamily="34" charset="-120"/>
+              </a:rPr>
+              <a:t>Financial instruction tuning did NOT clearly help. plutus-8B scored 0.829 / 0.597 F1m on FPB / FiQA — beaten on FPB by Mistral-7B (0.890) and on FiQA by Qwen2.5-7B (0.673). FinBERT (110M, in-domain trained) crushed every 8B model on FPB but lost by 19 points on FiQA.</a:t>
+            </a:r>
+            <a:endParaRPr lang="en-US" sz="1800" dirty="0"/>
+          </a:p>
+        </p:txBody>
+      </p:sp>
+      <p:sp>
+        <p:nvSpPr>
+          <p:cNvPr id="5" name="Text 3"/>
+          <p:cNvSpPr/>
+          <p:nvPr/>
+        </p:nvSpPr>
+        <p:spPr>
+          <a:xfrm>
+            <a:off x="548640" y="3383280"/>
+            <a:ext cx="8046720" cy="365760"/>
+          </a:xfrm>
+          <a:prstGeom prst="rect">
+            <a:avLst/>
+          </a:prstGeom>
+          <a:noFill/>
+          <a:ln/>
+        </p:spPr>
+        <p:txBody>
+          <a:bodyPr wrap="square" lIns="0" tIns="0" rIns="0" bIns="0" rtlCol="0" anchor="ctr"/>
+          <a:lstStyle/>
+          <a:p>
+            <a:pPr indent="0" marL="0">
+              <a:buNone/>
+            </a:pPr>
+            <a:r>
+              <a:rPr lang="en-US" sz="1300" i="1" dirty="0">
+                <a:solidFill>
+                  <a:srgbClr val="CADCFC"/>
+                </a:solidFill>
+                <a:latin typeface="Calibri" pitchFamily="34" charset="0"/>
+                <a:ea typeface="Calibri" pitchFamily="34" charset="-122"/>
+                <a:cs typeface="Calibri" pitchFamily="34" charset="-120"/>
+              </a:rPr>
+              <a:t>Two takeaways for the audience to remember:</a:t>
+            </a:r>
+            <a:endParaRPr lang="en-US" sz="1300" dirty="0"/>
+          </a:p>
+        </p:txBody>
+      </p:sp>
+      <p:sp>
+        <p:nvSpPr>
+          <p:cNvPr id="6" name="Text 4"/>
+          <p:cNvSpPr/>
+          <p:nvPr/>
+        </p:nvSpPr>
+        <p:spPr>
+          <a:xfrm>
+            <a:off x="548640" y="3703320"/>
+            <a:ext cx="8046720" cy="548640"/>
+          </a:xfrm>
+          <a:prstGeom prst="rect">
+            <a:avLst/>
+          </a:prstGeom>
+          <a:noFill/>
+          <a:ln/>
+        </p:spPr>
+        <p:txBody>
+          <a:bodyPr wrap="square" lIns="0" tIns="0" rIns="0" bIns="0" rtlCol="0" anchor="ctr"/>
+          <a:lstStyle/>
+          <a:p>
+            <a:pPr indent="0" marL="0">
+              <a:buNone/>
+            </a:pPr>
+            <a:r>
               <a:rPr lang="en-US" sz="1200" dirty="0">
                 <a:solidFill>
-                  <a:srgbClr val="CADCFC"/>
-                </a:solidFill>
-                <a:latin typeface="Consolas" pitchFamily="34" charset="0"/>
-                <a:ea typeface="Consolas" pitchFamily="34" charset="-122"/>
-                <a:cs typeface="Consolas" pitchFamily="34" charset="-120"/>
-              </a:rPr>
-              <a:t>Live dashboard · localhost:8502  (run dashboard/run.bat)</a:t>
+                  <a:srgbClr val="FFFFFF"/>
+                </a:solidFill>
+                <a:latin typeface="Calibri" pitchFamily="34" charset="0"/>
+                <a:ea typeface="Calibri" pitchFamily="34" charset="-122"/>
+                <a:cs typeface="Calibri" pitchFamily="34" charset="-120"/>
+              </a:rPr>
+              <a:t>1. Don't trust LLM benchmarks reported with a single prompt — sensitivity here was 9-16 F1 points.</a:t>
+            </a:r>
+            <a:endParaRPr lang="en-US" sz="1200" dirty="0"/>
+          </a:p>
+          <a:p>
+            <a:pPr indent="0" marL="0">
+              <a:buNone/>
+            </a:pPr>
+            <a:r>
+              <a:rPr lang="en-US" sz="1200" dirty="0">
+                <a:solidFill>
+                  <a:srgbClr val="FFFFFF"/>
+                </a:solidFill>
+                <a:latin typeface="Calibri" pitchFamily="34" charset="0"/>
+                <a:ea typeface="Calibri" pitchFamily="34" charset="-122"/>
+                <a:cs typeface="Calibri" pitchFamily="34" charset="-120"/>
+              </a:rPr>
+              <a:t>2. Specialised small models still beat 8B general LLMs in-domain — and the inverse on noisier text.</a:t>
+            </a:r>
+            <a:endParaRPr lang="en-US" sz="1200" dirty="0"/>
+          </a:p>
+          <a:p>
+            <a:pPr indent="0" marL="0">
+              <a:buNone/>
+            </a:pPr>
+            <a:r>
+              <a:rPr lang="en-US" sz="1200" dirty="0">
+                <a:solidFill>
+                  <a:srgbClr val="FFFFFF"/>
+                </a:solidFill>
+                <a:latin typeface="Calibri" pitchFamily="34" charset="0"/>
+                <a:ea typeface="Calibri" pitchFamily="34" charset="-122"/>
+                <a:cs typeface="Calibri" pitchFamily="34" charset="-120"/>
+              </a:rPr>
+              <a:t>3. Reproducibility is structural: artefacts disappear, tokenizer formats break, gates close. Build for it.</a:t>
             </a:r>
             <a:endParaRPr lang="en-US" sz="1200" dirty="0"/>
           </a:p>
@@ -11528,6 +13423,194 @@
 </p:sld>
 </file>
 
+<file path=ppt/slides/slide30.xml><?xml version="1.0" encoding="utf-8"?>
+<p:sld xmlns:a="http://schemas.openxmlformats.org/drawingml/2006/main" xmlns:r="http://schemas.openxmlformats.org/officeDocument/2006/relationships" xmlns:p="http://schemas.openxmlformats.org/presentationml/2006/main">
+  <p:cSld name="Slide 30">
+    <p:bg>
+      <p:bgPr>
+        <a:solidFill>
+          <a:srgbClr val="1E2761"/>
+        </a:solidFill>
+      </p:bgPr>
+    </p:bg>
+    <p:spTree>
+      <p:nvGrpSpPr>
+        <p:cNvPr id="1" name=""/>
+        <p:cNvGrpSpPr/>
+        <p:nvPr/>
+      </p:nvGrpSpPr>
+      <p:grpSpPr>
+        <a:xfrm>
+          <a:off x="0" y="0"/>
+          <a:ext cx="0" cy="0"/>
+          <a:chOff x="0" y="0"/>
+          <a:chExt cx="0" cy="0"/>
+        </a:xfrm>
+      </p:grpSpPr>
+      <p:sp>
+        <p:nvSpPr>
+          <p:cNvPr id="2" name="Text 0"/>
+          <p:cNvSpPr/>
+          <p:nvPr/>
+        </p:nvSpPr>
+        <p:spPr>
+          <a:xfrm>
+            <a:off x="548640" y="1463040"/>
+            <a:ext cx="8046720" cy="914400"/>
+          </a:xfrm>
+          <a:prstGeom prst="rect">
+            <a:avLst/>
+          </a:prstGeom>
+          <a:noFill/>
+          <a:ln/>
+        </p:spPr>
+        <p:txBody>
+          <a:bodyPr wrap="square" lIns="0" tIns="0" rIns="0" bIns="0" rtlCol="0" anchor="ctr"/>
+          <a:lstStyle/>
+          <a:p>
+            <a:pPr indent="0" marL="0">
+              <a:buNone/>
+            </a:pPr>
+            <a:r>
+              <a:rPr lang="en-US" sz="5600" b="1" dirty="0">
+                <a:solidFill>
+                  <a:srgbClr val="FFFFFF"/>
+                </a:solidFill>
+                <a:latin typeface="Calibri" pitchFamily="34" charset="0"/>
+                <a:ea typeface="Calibri" pitchFamily="34" charset="-122"/>
+                <a:cs typeface="Calibri" pitchFamily="34" charset="-120"/>
+              </a:rPr>
+              <a:t>Thank you</a:t>
+            </a:r>
+            <a:endParaRPr lang="en-US" sz="5600" dirty="0"/>
+          </a:p>
+        </p:txBody>
+      </p:sp>
+      <p:sp>
+        <p:nvSpPr>
+          <p:cNvPr id="3" name="Text 1"/>
+          <p:cNvSpPr/>
+          <p:nvPr/>
+        </p:nvSpPr>
+        <p:spPr>
+          <a:xfrm>
+            <a:off x="548640" y="2377440"/>
+            <a:ext cx="8046720" cy="548640"/>
+          </a:xfrm>
+          <a:prstGeom prst="rect">
+            <a:avLst/>
+          </a:prstGeom>
+          <a:noFill/>
+          <a:ln/>
+        </p:spPr>
+        <p:txBody>
+          <a:bodyPr wrap="square" lIns="0" tIns="0" rIns="0" bIns="0" rtlCol="0" anchor="ctr"/>
+          <a:lstStyle/>
+          <a:p>
+            <a:pPr indent="0" marL="0">
+              <a:buNone/>
+            </a:pPr>
+            <a:r>
+              <a:rPr lang="en-US" sz="2400" i="1" dirty="0">
+                <a:solidFill>
+                  <a:srgbClr val="CADCFC"/>
+                </a:solidFill>
+                <a:latin typeface="Calibri" pitchFamily="34" charset="0"/>
+                <a:ea typeface="Calibri" pitchFamily="34" charset="-122"/>
+                <a:cs typeface="Calibri" pitchFamily="34" charset="-120"/>
+              </a:rPr>
+              <a:t>Questions?</a:t>
+            </a:r>
+            <a:endParaRPr lang="en-US" sz="2400" dirty="0"/>
+          </a:p>
+        </p:txBody>
+      </p:sp>
+      <p:sp>
+        <p:nvSpPr>
+          <p:cNvPr id="4" name="Text 2"/>
+          <p:cNvSpPr/>
+          <p:nvPr/>
+        </p:nvSpPr>
+        <p:spPr>
+          <a:xfrm>
+            <a:off x="548640" y="4114800"/>
+            <a:ext cx="8046720" cy="365760"/>
+          </a:xfrm>
+          <a:prstGeom prst="rect">
+            <a:avLst/>
+          </a:prstGeom>
+          <a:noFill/>
+          <a:ln/>
+        </p:spPr>
+        <p:txBody>
+          <a:bodyPr wrap="square" lIns="0" tIns="0" rIns="0" bIns="0" rtlCol="0" anchor="ctr"/>
+          <a:lstStyle/>
+          <a:p>
+            <a:pPr indent="0" marL="0">
+              <a:buNone/>
+            </a:pPr>
+            <a:r>
+              <a:rPr lang="en-US" sz="1200" dirty="0">
+                <a:solidFill>
+                  <a:srgbClr val="CADCFC"/>
+                </a:solidFill>
+                <a:latin typeface="Consolas" pitchFamily="34" charset="0"/>
+                <a:ea typeface="Consolas" pitchFamily="34" charset="-122"/>
+                <a:cs typeface="Consolas" pitchFamily="34" charset="-120"/>
+              </a:rPr>
+              <a:t>Code · github.com/shimi777/finllama-sentiment</a:t>
+            </a:r>
+            <a:endParaRPr lang="en-US" sz="1200" dirty="0"/>
+          </a:p>
+        </p:txBody>
+      </p:sp>
+      <p:sp>
+        <p:nvSpPr>
+          <p:cNvPr id="5" name="Text 3"/>
+          <p:cNvSpPr/>
+          <p:nvPr/>
+        </p:nvSpPr>
+        <p:spPr>
+          <a:xfrm>
+            <a:off x="548640" y="4434840"/>
+            <a:ext cx="8046720" cy="365760"/>
+          </a:xfrm>
+          <a:prstGeom prst="rect">
+            <a:avLst/>
+          </a:prstGeom>
+          <a:noFill/>
+          <a:ln/>
+        </p:spPr>
+        <p:txBody>
+          <a:bodyPr wrap="square" lIns="0" tIns="0" rIns="0" bIns="0" rtlCol="0" anchor="ctr"/>
+          <a:lstStyle/>
+          <a:p>
+            <a:pPr indent="0" marL="0">
+              <a:buNone/>
+            </a:pPr>
+            <a:r>
+              <a:rPr lang="en-US" sz="1200" dirty="0">
+                <a:solidFill>
+                  <a:srgbClr val="CADCFC"/>
+                </a:solidFill>
+                <a:latin typeface="Consolas" pitchFamily="34" charset="0"/>
+                <a:ea typeface="Consolas" pitchFamily="34" charset="-122"/>
+                <a:cs typeface="Consolas" pitchFamily="34" charset="-120"/>
+              </a:rPr>
+              <a:t>Live dashboard · localhost:8502  (run dashboard/run.bat)</a:t>
+            </a:r>
+            <a:endParaRPr lang="en-US" sz="1200" dirty="0"/>
+          </a:p>
+        </p:txBody>
+      </p:sp>
+    </p:spTree>
+  </p:cSld>
+  <p:clrMapOvr>
+    <a:masterClrMapping/>
+  </p:clrMapOvr>
+</p:sld>
+</file>
+
 <file path=ppt/slides/slide4.xml><?xml version="1.0" encoding="utf-8"?>
 <p:sld xmlns:a="http://schemas.openxmlformats.org/drawingml/2006/main" xmlns:r="http://schemas.openxmlformats.org/officeDocument/2006/relationships" xmlns:p="http://schemas.openxmlformats.org/presentationml/2006/main">
   <p:cSld name="Slide 4">
@@ -11799,14 +13882,39 @@
       </p:sp>
       <p:sp>
         <p:nvSpPr>
-          <p:cNvPr id="9" name="Text 7"/>
-          <p:cNvSpPr/>
-          <p:nvPr/>
-        </p:nvSpPr>
-        <p:spPr>
-          <a:xfrm>
-            <a:off x="457200" y="3108960"/>
-            <a:ext cx="8229600" cy="1371600"/>
+          <p:cNvPr id="9" name="Shape 7"/>
+          <p:cNvSpPr/>
+          <p:nvPr/>
+        </p:nvSpPr>
+        <p:spPr>
+          <a:xfrm>
+            <a:off x="457200" y="3017520"/>
+            <a:ext cx="8229600" cy="1554480"/>
+          </a:xfrm>
+          <a:prstGeom prst="rect">
+            <a:avLst/>
+          </a:prstGeom>
+          <a:solidFill>
+            <a:srgbClr val="FFFFFF"/>
+          </a:solidFill>
+          <a:ln w="12700">
+            <a:solidFill>
+              <a:srgbClr val="1E2761"/>
+            </a:solidFill>
+            <a:prstDash val="solid"/>
+          </a:ln>
+        </p:spPr>
+      </p:sp>
+      <p:sp>
+        <p:nvSpPr>
+          <p:cNvPr id="10" name="Text 8"/>
+          <p:cNvSpPr/>
+          <p:nvPr/>
+        </p:nvSpPr>
+        <p:spPr>
+          <a:xfrm>
+            <a:off x="594360" y="3108960"/>
+            <a:ext cx="2560320" cy="320040"/>
           </a:xfrm>
           <a:prstGeom prst="rect">
             <a:avLst/>
@@ -11815,18 +13923,53 @@
           <a:ln/>
         </p:spPr>
         <p:txBody>
-          <a:bodyPr wrap="square" rtlCol="0" anchor="t"/>
-          <a:lstStyle/>
-          <a:p>
-            <a:pPr marL="342900" indent="-342900">
-              <a:spcAft>
-                <a:spcPts val="600"/>
-              </a:spcAft>
-              <a:buSzPct val="100000"/>
-              <a:buChar char="•"/>
-            </a:pPr>
-            <a:r>
-              <a:rPr lang="en-US" sz="1400" dirty="0">
+          <a:bodyPr wrap="square" lIns="0" tIns="0" rIns="0" bIns="0" rtlCol="0" anchor="ctr"/>
+          <a:lstStyle/>
+          <a:p>
+            <a:pPr indent="0" marL="0">
+              <a:buNone/>
+            </a:pPr>
+            <a:r>
+              <a:rPr lang="en-US" sz="1300" b="1" dirty="0">
+                <a:solidFill>
+                  <a:srgbClr val="F96167"/>
+                </a:solidFill>
+                <a:latin typeface="Calibri" pitchFamily="34" charset="0"/>
+                <a:ea typeface="Calibri" pitchFamily="34" charset="-122"/>
+                <a:cs typeface="Calibri" pitchFamily="34" charset="-120"/>
+              </a:rPr>
+              <a:t>Reproduced</a:t>
+            </a:r>
+            <a:endParaRPr lang="en-US" sz="1300" dirty="0"/>
+          </a:p>
+        </p:txBody>
+      </p:sp>
+      <p:sp>
+        <p:nvSpPr>
+          <p:cNvPr id="11" name="Text 9"/>
+          <p:cNvSpPr/>
+          <p:nvPr/>
+        </p:nvSpPr>
+        <p:spPr>
+          <a:xfrm>
+            <a:off x="594360" y="3429000"/>
+            <a:ext cx="2560320" cy="1097280"/>
+          </a:xfrm>
+          <a:prstGeom prst="rect">
+            <a:avLst/>
+          </a:prstGeom>
+          <a:noFill/>
+          <a:ln/>
+        </p:spPr>
+        <p:txBody>
+          <a:bodyPr wrap="square" lIns="0" tIns="0" rIns="0" bIns="0" rtlCol="0" anchor="ctr"/>
+          <a:lstStyle/>
+          <a:p>
+            <a:pPr indent="0" marL="0">
+              <a:buNone/>
+            </a:pPr>
+            <a:r>
+              <a:rPr lang="en-US" sz="1050" dirty="0">
                 <a:solidFill>
                   <a:srgbClr val="1E293B"/>
                 </a:solidFill>
@@ -11834,20 +13977,100 @@
                 <a:ea typeface="Calibri" pitchFamily="34" charset="-122"/>
                 <a:cs typeface="Calibri" pitchFamily="34" charset="-120"/>
               </a:rPr>
-              <a:t>Inference only — no fine-tuning, no multimodal, no trading simulation</a:t>
-            </a:r>
-            <a:endParaRPr lang="en-US" sz="1400" dirty="0"/>
-          </a:p>
-          <a:p>
-            <a:pPr marL="342900" indent="-342900">
-              <a:spcAft>
-                <a:spcPts val="600"/>
-              </a:spcAft>
-              <a:buSzPct val="100000"/>
-              <a:buChar char="•"/>
-            </a:pPr>
-            <a:r>
-              <a:rPr lang="en-US" sz="1400" dirty="0">
+              <a:t>FPB / FiQA-SA sentiment task; 4-bit inference of an 8B financial LLM vs. 7-8B general LLMs vs. classical baselines; F1-macro / accuracy reporting.</a:t>
+            </a:r>
+            <a:endParaRPr lang="en-US" sz="1050" dirty="0"/>
+          </a:p>
+        </p:txBody>
+      </p:sp>
+      <p:sp>
+        <p:nvSpPr>
+          <p:cNvPr id="12" name="Shape 10"/>
+          <p:cNvSpPr/>
+          <p:nvPr/>
+        </p:nvSpPr>
+        <p:spPr>
+          <a:xfrm>
+            <a:off x="3223260" y="3108960"/>
+            <a:ext cx="0" cy="1371600"/>
+          </a:xfrm>
+          <a:prstGeom prst="line">
+            <a:avLst/>
+          </a:prstGeom>
+          <a:noFill/>
+          <a:ln w="12700">
+            <a:solidFill>
+              <a:srgbClr val="CADCFC"/>
+            </a:solidFill>
+            <a:prstDash val="solid"/>
+          </a:ln>
+        </p:spPr>
+      </p:sp>
+      <p:sp>
+        <p:nvSpPr>
+          <p:cNvPr id="13" name="Text 11"/>
+          <p:cNvSpPr/>
+          <p:nvPr/>
+        </p:nvSpPr>
+        <p:spPr>
+          <a:xfrm>
+            <a:off x="3383280" y="3108960"/>
+            <a:ext cx="2560320" cy="320040"/>
+          </a:xfrm>
+          <a:prstGeom prst="rect">
+            <a:avLst/>
+          </a:prstGeom>
+          <a:noFill/>
+          <a:ln/>
+        </p:spPr>
+        <p:txBody>
+          <a:bodyPr wrap="square" lIns="0" tIns="0" rIns="0" bIns="0" rtlCol="0" anchor="ctr"/>
+          <a:lstStyle/>
+          <a:p>
+            <a:pPr indent="0" marL="0">
+              <a:buNone/>
+            </a:pPr>
+            <a:r>
+              <a:rPr lang="en-US" sz="1300" b="1" dirty="0">
+                <a:solidFill>
+                  <a:srgbClr val="F96167"/>
+                </a:solidFill>
+                <a:latin typeface="Calibri" pitchFamily="34" charset="0"/>
+                <a:ea typeface="Calibri" pitchFamily="34" charset="-122"/>
+                <a:cs typeface="Calibri" pitchFamily="34" charset="-120"/>
+              </a:rPr>
+              <a:t>Adapted</a:t>
+            </a:r>
+            <a:endParaRPr lang="en-US" sz="1300" dirty="0"/>
+          </a:p>
+        </p:txBody>
+      </p:sp>
+      <p:sp>
+        <p:nvSpPr>
+          <p:cNvPr id="14" name="Text 12"/>
+          <p:cNvSpPr/>
+          <p:nvPr/>
+        </p:nvSpPr>
+        <p:spPr>
+          <a:xfrm>
+            <a:off x="3383280" y="3429000"/>
+            <a:ext cx="2560320" cy="1097280"/>
+          </a:xfrm>
+          <a:prstGeom prst="rect">
+            <a:avLst/>
+          </a:prstGeom>
+          <a:noFill/>
+          <a:ln/>
+        </p:spPr>
+        <p:txBody>
+          <a:bodyPr wrap="square" lIns="0" tIns="0" rIns="0" bIns="0" rtlCol="0" anchor="ctr"/>
+          <a:lstStyle/>
+          <a:p>
+            <a:pPr indent="0" marL="0">
+              <a:buNone/>
+            </a:pPr>
+            <a:r>
+              <a:rPr lang="en-US" sz="1050" dirty="0">
                 <a:solidFill>
                   <a:srgbClr val="1E293B"/>
                 </a:solidFill>
@@ -11855,20 +14078,100 @@
                 <a:ea typeface="Calibri" pitchFamily="34" charset="-122"/>
                 <a:cs typeface="Calibri" pitchFamily="34" charset="-120"/>
               </a:rPr>
-              <a:t>Two prompt templates × {0, 3}-shot — quantify prompt sensitivity, not pick the best</a:t>
-            </a:r>
-            <a:endParaRPr lang="en-US" sz="1400" dirty="0"/>
-          </a:p>
-          <a:p>
-            <a:pPr marL="342900" indent="-342900">
-              <a:spcAft>
-                <a:spcPts val="600"/>
-              </a:spcAft>
-              <a:buSzPct val="100000"/>
-              <a:buChar char="•"/>
-            </a:pPr>
-            <a:r>
-              <a:rPr lang="en-US" sz="1400" dirty="0">
+              <a:t>Substituted plutus-8B-instruct (TheFinAI's 2025 successor) when FinLLaMA-instruct was unpublished; prompt templates A/B specifically chosen to measure sensitivity.</a:t>
+            </a:r>
+            <a:endParaRPr lang="en-US" sz="1050" dirty="0"/>
+          </a:p>
+        </p:txBody>
+      </p:sp>
+      <p:sp>
+        <p:nvSpPr>
+          <p:cNvPr id="15" name="Shape 13"/>
+          <p:cNvSpPr/>
+          <p:nvPr/>
+        </p:nvSpPr>
+        <p:spPr>
+          <a:xfrm>
+            <a:off x="6012180" y="3108960"/>
+            <a:ext cx="0" cy="1371600"/>
+          </a:xfrm>
+          <a:prstGeom prst="line">
+            <a:avLst/>
+          </a:prstGeom>
+          <a:noFill/>
+          <a:ln w="12700">
+            <a:solidFill>
+              <a:srgbClr val="CADCFC"/>
+            </a:solidFill>
+            <a:prstDash val="solid"/>
+          </a:ln>
+        </p:spPr>
+      </p:sp>
+      <p:sp>
+        <p:nvSpPr>
+          <p:cNvPr id="16" name="Text 14"/>
+          <p:cNvSpPr/>
+          <p:nvPr/>
+        </p:nvSpPr>
+        <p:spPr>
+          <a:xfrm>
+            <a:off x="6172200" y="3108960"/>
+            <a:ext cx="2560320" cy="320040"/>
+          </a:xfrm>
+          <a:prstGeom prst="rect">
+            <a:avLst/>
+          </a:prstGeom>
+          <a:noFill/>
+          <a:ln/>
+        </p:spPr>
+        <p:txBody>
+          <a:bodyPr wrap="square" lIns="0" tIns="0" rIns="0" bIns="0" rtlCol="0" anchor="ctr"/>
+          <a:lstStyle/>
+          <a:p>
+            <a:pPr indent="0" marL="0">
+              <a:buNone/>
+            </a:pPr>
+            <a:r>
+              <a:rPr lang="en-US" sz="1300" b="1" dirty="0">
+                <a:solidFill>
+                  <a:srgbClr val="F96167"/>
+                </a:solidFill>
+                <a:latin typeface="Calibri" pitchFamily="34" charset="0"/>
+                <a:ea typeface="Calibri" pitchFamily="34" charset="-122"/>
+                <a:cs typeface="Calibri" pitchFamily="34" charset="-120"/>
+              </a:rPr>
+              <a:t>Simplified</a:t>
+            </a:r>
+            <a:endParaRPr lang="en-US" sz="1300" dirty="0"/>
+          </a:p>
+        </p:txBody>
+      </p:sp>
+      <p:sp>
+        <p:nvSpPr>
+          <p:cNvPr id="17" name="Text 15"/>
+          <p:cNvSpPr/>
+          <p:nvPr/>
+        </p:nvSpPr>
+        <p:spPr>
+          <a:xfrm>
+            <a:off x="6172200" y="3429000"/>
+            <a:ext cx="2560320" cy="1097280"/>
+          </a:xfrm>
+          <a:prstGeom prst="rect">
+            <a:avLst/>
+          </a:prstGeom>
+          <a:noFill/>
+          <a:ln/>
+        </p:spPr>
+        <p:txBody>
+          <a:bodyPr wrap="square" lIns="0" tIns="0" rIns="0" bIns="0" rtlCol="0" anchor="ctr"/>
+          <a:lstStyle/>
+          <a:p>
+            <a:pPr indent="0" marL="0">
+              <a:buNone/>
+            </a:pPr>
+            <a:r>
+              <a:rPr lang="en-US" sz="1050" dirty="0">
                 <a:solidFill>
                   <a:srgbClr val="1E293B"/>
                 </a:solidFill>
@@ -11876,30 +14179,9 @@
                 <a:ea typeface="Calibri" pitchFamily="34" charset="-122"/>
                 <a:cs typeface="Calibri" pitchFamily="34" charset="-120"/>
               </a:rPr>
-              <a:t>Two datasets: Financial PhraseBank (FPB) and FiQA-SA</a:t>
-            </a:r>
-            <a:endParaRPr lang="en-US" sz="1400" dirty="0"/>
-          </a:p>
-          <a:p>
-            <a:pPr marL="342900" indent="-342900">
-              <a:spcAft>
-                <a:spcPts val="600"/>
-              </a:spcAft>
-              <a:buSzPct val="100000"/>
-              <a:buChar char="•"/>
-            </a:pPr>
-            <a:r>
-              <a:rPr lang="en-US" sz="1400" dirty="0">
-                <a:solidFill>
-                  <a:srgbClr val="1E293B"/>
-                </a:solidFill>
-                <a:latin typeface="Calibri" pitchFamily="34" charset="0"/>
-                <a:ea typeface="Calibri" pitchFamily="34" charset="-122"/>
-                <a:cs typeface="Calibri" pitchFamily="34" charset="-120"/>
-              </a:rPr>
-              <a:t>Five models in the comparison; reported metrics: F1-macro, accuracy, parsing coverage</a:t>
-            </a:r>
-            <a:endParaRPr lang="en-US" sz="1400" dirty="0"/>
+              <a:t>Inference only (no fine-tuning, no multimodal, no trading sim). 300-sample subsample per dataset for the LLM matrix to fit Modal T4 budget. Two prompts, two shot counts.</a:t>
+            </a:r>
+            <a:endParaRPr lang="en-US" sz="1050" dirty="0"/>
           </a:p>
         </p:txBody>
       </p:sp>
